--- a/Employee_Earnings_Calculator_Presentation.pptx
+++ b/Employee_Earnings_Calculator_Presentation.pptx
@@ -3115,7 +3115,7 @@
             <a:avLst/>
           </a:prstGeom>
           <a:solidFill>
-            <a:srgbClr val="090D16"/>
+            <a:srgbClr val="F8FAFC"/>
           </a:solidFill>
           <a:ln>
             <a:noFill/>
@@ -3145,107 +3145,23 @@
       </p:sp>
       <p:sp>
         <p:nvSpPr>
-          <p:cNvPr id="3" name="TextBox 2"/>
-          <p:cNvSpPr txBox="1"/>
-          <p:nvPr/>
-        </p:nvSpPr>
-        <p:spPr>
-          <a:xfrm>
-            <a:off x="731520" y="6309360"/>
-            <a:ext cx="10698480" cy="365760"/>
-          </a:xfrm>
-          <a:prstGeom prst="rect">
-            <a:avLst/>
-          </a:prstGeom>
-          <a:noFill/>
-        </p:spPr>
-        <p:txBody>
-          <a:bodyPr wrap="none">
-            <a:spAutoFit/>
-          </a:bodyPr>
-          <a:lstStyle/>
-          <a:p>
-            <a:pPr>
-              <a:defRPr sz="1000">
-                <a:solidFill>
-                  <a:srgbClr val="94A3B8"/>
-                </a:solidFill>
-              </a:defRPr>
-            </a:pPr>
-            <a:r>
-              <a:t>Sanjana Chirutha (STU ID: STU6817962b86d921746376235)  |  Edunet Foundation  |  AICTE  |  IBM SkillsBuild</a:t>
-            </a:r>
-          </a:p>
-        </p:txBody>
-      </p:sp>
-      <p:sp>
-        <p:nvSpPr>
-          <p:cNvPr id="4" name="TextBox 3"/>
-          <p:cNvSpPr txBox="1"/>
-          <p:nvPr/>
-        </p:nvSpPr>
-        <p:spPr>
-          <a:xfrm>
-            <a:off x="914400" y="1097280"/>
-            <a:ext cx="10362895" cy="2011680"/>
-          </a:xfrm>
-          <a:prstGeom prst="rect">
-            <a:avLst/>
-          </a:prstGeom>
-          <a:noFill/>
-        </p:spPr>
-        <p:txBody>
-          <a:bodyPr wrap="none">
-            <a:spAutoFit/>
-          </a:bodyPr>
-          <a:lstStyle/>
-          <a:p>
-            <a:pPr algn="ctr">
-              <a:defRPr sz="4000" b="1">
-                <a:solidFill>
-                  <a:srgbClr val="6366F1"/>
-                </a:solidFill>
-              </a:defRPr>
-            </a:pPr>
-            <a:r>
-              <a:t>Employee Earnings Calculator</a:t>
-            </a:r>
-          </a:p>
-          <a:p>
-            <a:pPr algn="ctr">
-              <a:defRPr sz="2000">
-                <a:solidFill>
-                  <a:srgbClr val="94A3B8"/>
-                </a:solidFill>
-              </a:defRPr>
-            </a:pPr>
-            <a:r>
-              <a:t>Predictive Salary Intelligence System Powered by Machine Learning</a:t>
-            </a:r>
-          </a:p>
-        </p:txBody>
-      </p:sp>
-      <p:sp>
-        <p:nvSpPr>
-          <p:cNvPr id="5" name="Rounded Rectangle 4"/>
+          <p:cNvPr id="3" name="Rectangle 2"/>
           <p:cNvSpPr/>
           <p:nvPr/>
         </p:nvSpPr>
         <p:spPr>
           <a:xfrm>
-            <a:off x="1371600" y="3291840"/>
-            <a:ext cx="4389120" cy="2377440"/>
-          </a:xfrm>
-          <a:prstGeom prst="roundRect">
+            <a:off x="0" y="0"/>
+            <a:ext cx="365760" cy="6858000"/>
+          </a:xfrm>
+          <a:prstGeom prst="rect">
             <a:avLst/>
           </a:prstGeom>
           <a:solidFill>
-            <a:srgbClr val="152036"/>
+            <a:srgbClr val="0284C7"/>
           </a:solidFill>
           <a:ln>
-            <a:solidFill>
-              <a:srgbClr val="FFFFFF"/>
-            </a:solidFill>
+            <a:noFill/>
           </a:ln>
         </p:spPr>
         <p:style>
@@ -3272,120 +3188,23 @@
       </p:sp>
       <p:sp>
         <p:nvSpPr>
-          <p:cNvPr id="6" name="TextBox 5"/>
-          <p:cNvSpPr txBox="1"/>
-          <p:nvPr/>
-        </p:nvSpPr>
-        <p:spPr>
-          <a:xfrm>
-            <a:off x="1554480" y="3474720"/>
-            <a:ext cx="4023360" cy="2011680"/>
-          </a:xfrm>
-          <a:prstGeom prst="rect">
-            <a:avLst/>
-          </a:prstGeom>
-          <a:noFill/>
-        </p:spPr>
-        <p:txBody>
-          <a:bodyPr wrap="square">
-            <a:spAutoFit/>
-          </a:bodyPr>
-          <a:lstStyle/>
-          <a:p>
-            <a:r>
-              <a:rPr b="1" sz="1400">
-                <a:solidFill>
-                  <a:srgbClr val="F8FAFC"/>
-                </a:solidFill>
-              </a:rPr>
-              <a:t>Student Name: </a:t>
-            </a:r>
-            <a:r>
-              <a:rPr sz="1400">
-                <a:solidFill>
-                  <a:srgbClr val="6366F1"/>
-                </a:solidFill>
-              </a:rPr>
-              <a:t>Sanjana Chirutha</a:t>
-            </a:r>
-          </a:p>
-          <a:p>
-            <a:r>
-              <a:rPr b="1" sz="1400">
-                <a:solidFill>
-                  <a:srgbClr val="F8FAFC"/>
-                </a:solidFill>
-              </a:rPr>
-              <a:t>Student STU ID: </a:t>
-            </a:r>
-            <a:r>
-              <a:rPr sz="1400">
-                <a:solidFill>
-                  <a:srgbClr val="6366F1"/>
-                </a:solidFill>
-              </a:rPr>
-              <a:t>STU6817962b86d921746376235</a:t>
-            </a:r>
-          </a:p>
-          <a:p>
-            <a:r>
-              <a:rPr b="1" sz="1400">
-                <a:solidFill>
-                  <a:srgbClr val="F8FAFC"/>
-                </a:solidFill>
-              </a:rPr>
-              <a:t>Domain: </a:t>
-            </a:r>
-            <a:r>
-              <a:rPr sz="1400">
-                <a:solidFill>
-                  <a:srgbClr val="6366F1"/>
-                </a:solidFill>
-              </a:rPr>
-              <a:t>AI &amp; Machine Learning</a:t>
-            </a:r>
-          </a:p>
-          <a:p>
-            <a:r>
-              <a:rPr b="1" sz="1400">
-                <a:solidFill>
-                  <a:srgbClr val="F8FAFC"/>
-                </a:solidFill>
-              </a:rPr>
-              <a:t>Internship Period: </a:t>
-            </a:r>
-            <a:r>
-              <a:rPr sz="1400">
-                <a:solidFill>
-                  <a:srgbClr val="6366F1"/>
-                </a:solidFill>
-              </a:rPr>
-              <a:t>18/06/2025 – 30/07/2025</a:t>
-            </a:r>
-          </a:p>
-        </p:txBody>
-      </p:sp>
-      <p:sp>
-        <p:nvSpPr>
-          <p:cNvPr id="7" name="Rounded Rectangle 6"/>
+          <p:cNvPr id="4" name="Rectangle 3"/>
           <p:cNvSpPr/>
           <p:nvPr/>
         </p:nvSpPr>
         <p:spPr>
           <a:xfrm>
-            <a:off x="6400800" y="3291840"/>
-            <a:ext cx="4389120" cy="2377440"/>
-          </a:xfrm>
-          <a:prstGeom prst="roundRect">
+            <a:off x="365760" y="6583680"/>
+            <a:ext cx="11825935" cy="274320"/>
+          </a:xfrm>
+          <a:prstGeom prst="rect">
             <a:avLst/>
           </a:prstGeom>
           <a:solidFill>
-            <a:srgbClr val="152036"/>
+            <a:srgbClr val="1E3A8A"/>
           </a:solidFill>
           <a:ln>
-            <a:solidFill>
-              <a:srgbClr val="FFFFFF"/>
-            </a:solidFill>
+            <a:noFill/>
           </a:ln>
         </p:spPr>
         <p:style>
@@ -3412,14 +3231,176 @@
       </p:sp>
       <p:sp>
         <p:nvSpPr>
-          <p:cNvPr id="8" name="TextBox 7"/>
+          <p:cNvPr id="5" name="TextBox 4"/>
           <p:cNvSpPr txBox="1"/>
           <p:nvPr/>
         </p:nvSpPr>
         <p:spPr>
           <a:xfrm>
-            <a:off x="6583680" y="3474720"/>
-            <a:ext cx="4023360" cy="2011680"/>
+            <a:off x="731520" y="6601968"/>
+            <a:ext cx="10698480" cy="228600"/>
+          </a:xfrm>
+          <a:prstGeom prst="rect">
+            <a:avLst/>
+          </a:prstGeom>
+          <a:noFill/>
+        </p:spPr>
+        <p:txBody>
+          <a:bodyPr wrap="none">
+            <a:spAutoFit/>
+          </a:bodyPr>
+          <a:lstStyle/>
+          <a:p>
+            <a:pPr>
+              <a:defRPr sz="1000">
+                <a:solidFill>
+                  <a:srgbClr val="FFFFFF"/>
+                </a:solidFill>
+              </a:defRPr>
+            </a:pPr>
+            <a:r>
+              <a:t>Sanjana Chirutha (STU ID: STU6817962b86d921746376235)  |  Edunet Foundation  |  AICTE  |  IBM SkillsBuild</a:t>
+            </a:r>
+          </a:p>
+        </p:txBody>
+      </p:sp>
+      <p:sp>
+        <p:nvSpPr>
+          <p:cNvPr id="6" name="TextBox 5"/>
+          <p:cNvSpPr txBox="1"/>
+          <p:nvPr/>
+        </p:nvSpPr>
+        <p:spPr>
+          <a:xfrm>
+            <a:off x="731520" y="365760"/>
+            <a:ext cx="10698480" cy="731520"/>
+          </a:xfrm>
+          <a:prstGeom prst="rect">
+            <a:avLst/>
+          </a:prstGeom>
+          <a:noFill/>
+        </p:spPr>
+        <p:txBody>
+          <a:bodyPr wrap="none">
+            <a:spAutoFit/>
+          </a:bodyPr>
+          <a:lstStyle/>
+          <a:p>
+            <a:pPr algn="ctr">
+              <a:defRPr sz="1400" b="1">
+                <a:solidFill>
+                  <a:srgbClr val="0284C7"/>
+                </a:solidFill>
+              </a:defRPr>
+            </a:pPr>
+            <a:r>
+              <a:t>edunet foundation   |   AICTE   |   IBM SkillsBuild</a:t>
+            </a:r>
+          </a:p>
+        </p:txBody>
+      </p:sp>
+      <p:sp>
+        <p:nvSpPr>
+          <p:cNvPr id="7" name="TextBox 6"/>
+          <p:cNvSpPr txBox="1"/>
+          <p:nvPr/>
+        </p:nvSpPr>
+        <p:spPr>
+          <a:xfrm>
+            <a:off x="731520" y="1097280"/>
+            <a:ext cx="10698480" cy="1828800"/>
+          </a:xfrm>
+          <a:prstGeom prst="rect">
+            <a:avLst/>
+          </a:prstGeom>
+          <a:noFill/>
+        </p:spPr>
+        <p:txBody>
+          <a:bodyPr wrap="none">
+            <a:spAutoFit/>
+          </a:bodyPr>
+          <a:lstStyle/>
+          <a:p>
+            <a:pPr algn="ctr">
+              <a:defRPr sz="3200" b="1">
+                <a:solidFill>
+                  <a:srgbClr val="1E3A8A"/>
+                </a:solidFill>
+              </a:defRPr>
+            </a:pPr>
+            <a:r>
+              <a:t>Certificate of Completion &amp; Internship Project</a:t>
+            </a:r>
+          </a:p>
+          <a:p>
+            <a:pPr algn="ctr">
+              <a:defRPr sz="2000">
+                <a:solidFill>
+                  <a:srgbClr val="475569"/>
+                </a:solidFill>
+              </a:defRPr>
+            </a:pPr>
+            <a:r>
+              <a:t>Employee Earnings Calculator (ML-Powered Salary Intelligence)</a:t>
+            </a:r>
+          </a:p>
+        </p:txBody>
+      </p:sp>
+      <p:sp>
+        <p:nvSpPr>
+          <p:cNvPr id="8" name="Rounded Rectangle 7"/>
+          <p:cNvSpPr/>
+          <p:nvPr/>
+        </p:nvSpPr>
+        <p:spPr>
+          <a:xfrm>
+            <a:off x="1097280" y="3108960"/>
+            <a:ext cx="4754880" cy="2926080"/>
+          </a:xfrm>
+          <a:prstGeom prst="roundRect">
+            <a:avLst/>
+          </a:prstGeom>
+          <a:solidFill>
+            <a:srgbClr val="F1F5F9"/>
+          </a:solidFill>
+          <a:ln>
+            <a:solidFill>
+              <a:srgbClr val="CBD5E1"/>
+            </a:solidFill>
+          </a:ln>
+        </p:spPr>
+        <p:style>
+          <a:lnRef idx="1">
+            <a:schemeClr val="accent1"/>
+          </a:lnRef>
+          <a:fillRef idx="3">
+            <a:schemeClr val="accent1"/>
+          </a:fillRef>
+          <a:effectRef idx="2">
+            <a:schemeClr val="accent1"/>
+          </a:effectRef>
+          <a:fontRef idx="minor">
+            <a:schemeClr val="lt1"/>
+          </a:fontRef>
+        </p:style>
+        <p:txBody>
+          <a:bodyPr rtlCol="0" anchor="ctr"/>
+          <a:lstStyle/>
+          <a:p>
+            <a:pPr algn="ctr"/>
+          </a:p>
+        </p:txBody>
+      </p:sp>
+      <p:sp>
+        <p:nvSpPr>
+          <p:cNvPr id="9" name="TextBox 8"/>
+          <p:cNvSpPr txBox="1"/>
+          <p:nvPr/>
+        </p:nvSpPr>
+        <p:spPr>
+          <a:xfrm>
+            <a:off x="1280160" y="3291840"/>
+            <a:ext cx="4389120" cy="2560320"/>
           </a:xfrm>
           <a:prstGeom prst="rect">
             <a:avLst/>
@@ -3433,17 +3414,157 @@
           <a:lstStyle/>
           <a:p>
             <a:r>
-              <a:rPr b="1" sz="1400">
-                <a:solidFill>
-                  <a:srgbClr val="F8FAFC"/>
+              <a:rPr b="1" sz="1300">
+                <a:solidFill>
+                  <a:srgbClr val="0F172A"/>
+                </a:solidFill>
+              </a:rPr>
+              <a:t>Student Name: </a:t>
+            </a:r>
+            <a:r>
+              <a:rPr sz="1300">
+                <a:solidFill>
+                  <a:srgbClr val="1E3A8A"/>
+                </a:solidFill>
+              </a:rPr>
+              <a:t>Sanjana Chirutha</a:t>
+            </a:r>
+          </a:p>
+          <a:p>
+            <a:r>
+              <a:rPr b="1" sz="1300">
+                <a:solidFill>
+                  <a:srgbClr val="0F172A"/>
+                </a:solidFill>
+              </a:rPr>
+              <a:t>Student STU ID: </a:t>
+            </a:r>
+            <a:r>
+              <a:rPr sz="1300">
+                <a:solidFill>
+                  <a:srgbClr val="1E3A8A"/>
+                </a:solidFill>
+              </a:rPr>
+              <a:t>STU6817962b86d921746376235</a:t>
+            </a:r>
+          </a:p>
+          <a:p>
+            <a:r>
+              <a:rPr b="1" sz="1300">
+                <a:solidFill>
+                  <a:srgbClr val="0F172A"/>
+                </a:solidFill>
+              </a:rPr>
+              <a:t>Program: </a:t>
+            </a:r>
+            <a:r>
+              <a:rPr sz="1300">
+                <a:solidFill>
+                  <a:srgbClr val="1E3A8A"/>
+                </a:solidFill>
+              </a:rPr>
+              <a:t>6 Weeks Virtual Internship on AI &amp; ML</a:t>
+            </a:r>
+          </a:p>
+          <a:p>
+            <a:r>
+              <a:rPr b="1" sz="1300">
+                <a:solidFill>
+                  <a:srgbClr val="0F172A"/>
+                </a:solidFill>
+              </a:rPr>
+              <a:t>Internship Period: </a:t>
+            </a:r>
+            <a:r>
+              <a:rPr sz="1300">
+                <a:solidFill>
+                  <a:srgbClr val="1E3A8A"/>
+                </a:solidFill>
+              </a:rPr>
+              <a:t>18/06/2025 – 30/07/2025</a:t>
+            </a:r>
+          </a:p>
+        </p:txBody>
+      </p:sp>
+      <p:sp>
+        <p:nvSpPr>
+          <p:cNvPr id="10" name="Rounded Rectangle 9"/>
+          <p:cNvSpPr/>
+          <p:nvPr/>
+        </p:nvSpPr>
+        <p:spPr>
+          <a:xfrm>
+            <a:off x="6217920" y="3108960"/>
+            <a:ext cx="4754880" cy="2926080"/>
+          </a:xfrm>
+          <a:prstGeom prst="roundRect">
+            <a:avLst/>
+          </a:prstGeom>
+          <a:solidFill>
+            <a:srgbClr val="F1F5F9"/>
+          </a:solidFill>
+          <a:ln>
+            <a:solidFill>
+              <a:srgbClr val="CBD5E1"/>
+            </a:solidFill>
+          </a:ln>
+        </p:spPr>
+        <p:style>
+          <a:lnRef idx="1">
+            <a:schemeClr val="accent1"/>
+          </a:lnRef>
+          <a:fillRef idx="3">
+            <a:schemeClr val="accent1"/>
+          </a:fillRef>
+          <a:effectRef idx="2">
+            <a:schemeClr val="accent1"/>
+          </a:effectRef>
+          <a:fontRef idx="minor">
+            <a:schemeClr val="lt1"/>
+          </a:fontRef>
+        </p:style>
+        <p:txBody>
+          <a:bodyPr rtlCol="0" anchor="ctr"/>
+          <a:lstStyle/>
+          <a:p>
+            <a:pPr algn="ctr"/>
+          </a:p>
+        </p:txBody>
+      </p:sp>
+      <p:sp>
+        <p:nvSpPr>
+          <p:cNvPr id="11" name="TextBox 10"/>
+          <p:cNvSpPr txBox="1"/>
+          <p:nvPr/>
+        </p:nvSpPr>
+        <p:spPr>
+          <a:xfrm>
+            <a:off x="6400800" y="3291840"/>
+            <a:ext cx="4389120" cy="2560320"/>
+          </a:xfrm>
+          <a:prstGeom prst="rect">
+            <a:avLst/>
+          </a:prstGeom>
+          <a:noFill/>
+        </p:spPr>
+        <p:txBody>
+          <a:bodyPr wrap="square">
+            <a:spAutoFit/>
+          </a:bodyPr>
+          <a:lstStyle/>
+          <a:p>
+            <a:r>
+              <a:rPr b="1" sz="1300">
+                <a:solidFill>
+                  <a:srgbClr val="0F172A"/>
                 </a:solidFill>
               </a:rPr>
               <a:t>Implementing Org: </a:t>
             </a:r>
             <a:r>
-              <a:rPr sz="1400">
-                <a:solidFill>
-                  <a:srgbClr val="6366F1"/>
+              <a:rPr sz="1300">
+                <a:solidFill>
+                  <a:srgbClr val="1E3A8A"/>
                 </a:solidFill>
               </a:rPr>
               <a:t>Edunet Foundation</a:t>
@@ -3451,17 +3572,17 @@
           </a:p>
           <a:p>
             <a:r>
-              <a:rPr b="1" sz="1400">
-                <a:solidFill>
-                  <a:srgbClr val="F8FAFC"/>
+              <a:rPr b="1" sz="1300">
+                <a:solidFill>
+                  <a:srgbClr val="0F172A"/>
                 </a:solidFill>
               </a:rPr>
-              <a:t>Collaborating Org: </a:t>
-            </a:r>
-            <a:r>
-              <a:rPr sz="1400">
-                <a:solidFill>
-                  <a:srgbClr val="6366F1"/>
+              <a:t>Collaborator: </a:t>
+            </a:r>
+            <a:r>
+              <a:rPr sz="1300">
+                <a:solidFill>
+                  <a:srgbClr val="1E3A8A"/>
                 </a:solidFill>
               </a:rPr>
               <a:t>AICTE</a:t>
@@ -3469,17 +3590,17 @@
           </a:p>
           <a:p>
             <a:r>
-              <a:rPr b="1" sz="1400">
-                <a:solidFill>
-                  <a:srgbClr val="F8FAFC"/>
+              <a:rPr b="1" sz="1300">
+                <a:solidFill>
+                  <a:srgbClr val="0F172A"/>
                 </a:solidFill>
               </a:rPr>
               <a:t>Technology Partner: </a:t>
             </a:r>
             <a:r>
-              <a:rPr sz="1400">
-                <a:solidFill>
-                  <a:srgbClr val="6366F1"/>
+              <a:rPr sz="1300">
+                <a:solidFill>
+                  <a:srgbClr val="1E3A8A"/>
                 </a:solidFill>
               </a:rPr>
               <a:t>IBM SkillsBuild</a:t>
@@ -3487,20 +3608,20 @@
           </a:p>
           <a:p>
             <a:r>
-              <a:rPr b="1" sz="1400">
-                <a:solidFill>
-                  <a:srgbClr val="F8FAFC"/>
+              <a:rPr b="1" sz="1300">
+                <a:solidFill>
+                  <a:srgbClr val="0F172A"/>
                 </a:solidFill>
               </a:rPr>
-              <a:t>GitHub Repo: </a:t>
-            </a:r>
-            <a:r>
-              <a:rPr sz="1400">
-                <a:solidFill>
-                  <a:srgbClr val="6366F1"/>
+              <a:t>Signatory Chairman: </a:t>
+            </a:r>
+            <a:r>
+              <a:rPr sz="1300">
+                <a:solidFill>
+                  <a:srgbClr val="1E3A8A"/>
                 </a:solidFill>
               </a:rPr>
-              <a:t>github.com/Sanjana-Chirutha</a:t>
+              <a:t>Nagesh Singh (Edunet Foundation)</a:t>
             </a:r>
           </a:p>
         </p:txBody>
@@ -3538,7 +3659,7 @@
             <a:avLst/>
           </a:prstGeom>
           <a:solidFill>
-            <a:srgbClr val="090D16"/>
+            <a:srgbClr val="F8FAFC"/>
           </a:solidFill>
           <a:ln>
             <a:noFill/>
@@ -3568,131 +3689,23 @@
       </p:sp>
       <p:sp>
         <p:nvSpPr>
-          <p:cNvPr id="3" name="TextBox 2"/>
-          <p:cNvSpPr txBox="1"/>
-          <p:nvPr/>
-        </p:nvSpPr>
-        <p:spPr>
-          <a:xfrm>
-            <a:off x="731520" y="365760"/>
-            <a:ext cx="10698480" cy="731520"/>
-          </a:xfrm>
-          <a:prstGeom prst="rect">
-            <a:avLst/>
-          </a:prstGeom>
-          <a:noFill/>
-        </p:spPr>
-        <p:txBody>
-          <a:bodyPr wrap="square">
-            <a:spAutoFit/>
-          </a:bodyPr>
-          <a:lstStyle/>
-          <a:p>
-            <a:pPr>
-              <a:defRPr sz="2600" b="1">
-                <a:solidFill>
-                  <a:srgbClr val="F8FAFC"/>
-                </a:solidFill>
-                <a:latin typeface="Arial"/>
-              </a:defRPr>
-            </a:pPr>
-            <a:r>
-              <a:t>Batch CSV Prediction Engine</a:t>
-            </a:r>
-          </a:p>
-        </p:txBody>
-      </p:sp>
-      <p:sp>
-        <p:nvSpPr>
-          <p:cNvPr id="4" name="TextBox 3"/>
-          <p:cNvSpPr txBox="1"/>
-          <p:nvPr/>
-        </p:nvSpPr>
-        <p:spPr>
-          <a:xfrm>
-            <a:off x="9601200" y="365760"/>
-            <a:ext cx="1828800" cy="457200"/>
-          </a:xfrm>
-          <a:prstGeom prst="rect">
-            <a:avLst/>
-          </a:prstGeom>
-          <a:noFill/>
-        </p:spPr>
-        <p:txBody>
-          <a:bodyPr wrap="none">
-            <a:spAutoFit/>
-          </a:bodyPr>
-          <a:lstStyle/>
-          <a:p>
-            <a:pPr algn="r">
-              <a:defRPr sz="1300" b="1">
-                <a:solidFill>
-                  <a:srgbClr val="6366F1"/>
-                </a:solidFill>
-              </a:defRPr>
-            </a:pPr>
-            <a:r>
-              <a:t>Slide 10/13</a:t>
-            </a:r>
-          </a:p>
-        </p:txBody>
-      </p:sp>
-      <p:sp>
-        <p:nvSpPr>
-          <p:cNvPr id="5" name="TextBox 4"/>
-          <p:cNvSpPr txBox="1"/>
-          <p:nvPr/>
-        </p:nvSpPr>
-        <p:spPr>
-          <a:xfrm>
-            <a:off x="731520" y="6309360"/>
-            <a:ext cx="10698480" cy="365760"/>
-          </a:xfrm>
-          <a:prstGeom prst="rect">
-            <a:avLst/>
-          </a:prstGeom>
-          <a:noFill/>
-        </p:spPr>
-        <p:txBody>
-          <a:bodyPr wrap="none">
-            <a:spAutoFit/>
-          </a:bodyPr>
-          <a:lstStyle/>
-          <a:p>
-            <a:pPr>
-              <a:defRPr sz="1000">
-                <a:solidFill>
-                  <a:srgbClr val="94A3B8"/>
-                </a:solidFill>
-              </a:defRPr>
-            </a:pPr>
-            <a:r>
-              <a:t>Sanjana Chirutha (STU ID: STU6817962b86d921746376235)  |  Edunet Foundation  |  AICTE  |  IBM SkillsBuild</a:t>
-            </a:r>
-          </a:p>
-        </p:txBody>
-      </p:sp>
-      <p:sp>
-        <p:nvSpPr>
-          <p:cNvPr id="6" name="Rounded Rectangle 5"/>
+          <p:cNvPr id="3" name="Rectangle 2"/>
           <p:cNvSpPr/>
           <p:nvPr/>
         </p:nvSpPr>
         <p:spPr>
           <a:xfrm>
-            <a:off x="731520" y="1371600"/>
-            <a:ext cx="10698480" cy="4389120"/>
-          </a:xfrm>
-          <a:prstGeom prst="roundRect">
+            <a:off x="0" y="0"/>
+            <a:ext cx="365760" cy="6858000"/>
+          </a:xfrm>
+          <a:prstGeom prst="rect">
             <a:avLst/>
           </a:prstGeom>
           <a:solidFill>
-            <a:srgbClr val="152036"/>
+            <a:srgbClr val="0284C7"/>
           </a:solidFill>
           <a:ln>
-            <a:solidFill>
-              <a:srgbClr val="FFFFFF"/>
-            </a:solidFill>
+            <a:noFill/>
           </a:ln>
         </p:spPr>
         <p:style>
@@ -3719,14 +3732,57 @@
       </p:sp>
       <p:sp>
         <p:nvSpPr>
-          <p:cNvPr id="7" name="TextBox 6"/>
+          <p:cNvPr id="4" name="Rectangle 3"/>
+          <p:cNvSpPr/>
+          <p:nvPr/>
+        </p:nvSpPr>
+        <p:spPr>
+          <a:xfrm>
+            <a:off x="365760" y="6583680"/>
+            <a:ext cx="11825935" cy="274320"/>
+          </a:xfrm>
+          <a:prstGeom prst="rect">
+            <a:avLst/>
+          </a:prstGeom>
+          <a:solidFill>
+            <a:srgbClr val="1E3A8A"/>
+          </a:solidFill>
+          <a:ln>
+            <a:noFill/>
+          </a:ln>
+        </p:spPr>
+        <p:style>
+          <a:lnRef idx="1">
+            <a:schemeClr val="accent1"/>
+          </a:lnRef>
+          <a:fillRef idx="3">
+            <a:schemeClr val="accent1"/>
+          </a:fillRef>
+          <a:effectRef idx="2">
+            <a:schemeClr val="accent1"/>
+          </a:effectRef>
+          <a:fontRef idx="minor">
+            <a:schemeClr val="lt1"/>
+          </a:fontRef>
+        </p:style>
+        <p:txBody>
+          <a:bodyPr rtlCol="0" anchor="ctr"/>
+          <a:lstStyle/>
+          <a:p>
+            <a:pPr algn="ctr"/>
+          </a:p>
+        </p:txBody>
+      </p:sp>
+      <p:sp>
+        <p:nvSpPr>
+          <p:cNvPr id="5" name="TextBox 4"/>
           <p:cNvSpPr txBox="1"/>
           <p:nvPr/>
         </p:nvSpPr>
         <p:spPr>
           <a:xfrm>
-            <a:off x="1005840" y="1554480"/>
-            <a:ext cx="10149840" cy="4023360"/>
+            <a:off x="731520" y="365760"/>
+            <a:ext cx="9601200" cy="731520"/>
           </a:xfrm>
           <a:prstGeom prst="rect">
             <a:avLst/>
@@ -3740,21 +3796,172 @@
           <a:lstStyle/>
           <a:p>
             <a:pPr>
+              <a:defRPr sz="2600" b="1">
+                <a:solidFill>
+                  <a:srgbClr val="1E3A8A"/>
+                </a:solidFill>
+                <a:latin typeface="Helvetica"/>
+              </a:defRPr>
+            </a:pPr>
+            <a:r>
+              <a:t>Batch CSV Prediction Engine</a:t>
+            </a:r>
+          </a:p>
+        </p:txBody>
+      </p:sp>
+      <p:sp>
+        <p:nvSpPr>
+          <p:cNvPr id="6" name="TextBox 5"/>
+          <p:cNvSpPr txBox="1"/>
+          <p:nvPr/>
+        </p:nvSpPr>
+        <p:spPr>
+          <a:xfrm>
+            <a:off x="9601200" y="365760"/>
+            <a:ext cx="1828800" cy="457200"/>
+          </a:xfrm>
+          <a:prstGeom prst="rect">
+            <a:avLst/>
+          </a:prstGeom>
+          <a:noFill/>
+        </p:spPr>
+        <p:txBody>
+          <a:bodyPr wrap="none">
+            <a:spAutoFit/>
+          </a:bodyPr>
+          <a:lstStyle/>
+          <a:p>
+            <a:pPr algn="r">
+              <a:defRPr sz="1300" b="1">
+                <a:solidFill>
+                  <a:srgbClr val="0284C7"/>
+                </a:solidFill>
+              </a:defRPr>
+            </a:pPr>
+            <a:r>
+              <a:t>Slide 10/13</a:t>
+            </a:r>
+          </a:p>
+        </p:txBody>
+      </p:sp>
+      <p:sp>
+        <p:nvSpPr>
+          <p:cNvPr id="7" name="TextBox 6"/>
+          <p:cNvSpPr txBox="1"/>
+          <p:nvPr/>
+        </p:nvSpPr>
+        <p:spPr>
+          <a:xfrm>
+            <a:off x="731520" y="6601968"/>
+            <a:ext cx="10698480" cy="228600"/>
+          </a:xfrm>
+          <a:prstGeom prst="rect">
+            <a:avLst/>
+          </a:prstGeom>
+          <a:noFill/>
+        </p:spPr>
+        <p:txBody>
+          <a:bodyPr wrap="none">
+            <a:spAutoFit/>
+          </a:bodyPr>
+          <a:lstStyle/>
+          <a:p>
+            <a:pPr>
+              <a:defRPr sz="1000">
+                <a:solidFill>
+                  <a:srgbClr val="FFFFFF"/>
+                </a:solidFill>
+              </a:defRPr>
+            </a:pPr>
+            <a:r>
+              <a:t>Sanjana Chirutha (STU ID: STU6817962b86d921746376235)  |  Edunet Foundation  |  AICTE  |  IBM SkillsBuild</a:t>
+            </a:r>
+          </a:p>
+        </p:txBody>
+      </p:sp>
+      <p:sp>
+        <p:nvSpPr>
+          <p:cNvPr id="8" name="Rounded Rectangle 7"/>
+          <p:cNvSpPr/>
+          <p:nvPr/>
+        </p:nvSpPr>
+        <p:spPr>
+          <a:xfrm>
+            <a:off x="731520" y="1371600"/>
+            <a:ext cx="10698480" cy="4754880"/>
+          </a:xfrm>
+          <a:prstGeom prst="roundRect">
+            <a:avLst/>
+          </a:prstGeom>
+          <a:solidFill>
+            <a:srgbClr val="F1F5F9"/>
+          </a:solidFill>
+          <a:ln>
+            <a:solidFill>
+              <a:srgbClr val="CBD5E1"/>
+            </a:solidFill>
+          </a:ln>
+        </p:spPr>
+        <p:style>
+          <a:lnRef idx="1">
+            <a:schemeClr val="accent1"/>
+          </a:lnRef>
+          <a:fillRef idx="3">
+            <a:schemeClr val="accent1"/>
+          </a:fillRef>
+          <a:effectRef idx="2">
+            <a:schemeClr val="accent1"/>
+          </a:effectRef>
+          <a:fontRef idx="minor">
+            <a:schemeClr val="lt1"/>
+          </a:fontRef>
+        </p:style>
+        <p:txBody>
+          <a:bodyPr rtlCol="0" anchor="ctr"/>
+          <a:lstStyle/>
+          <a:p>
+            <a:pPr algn="ctr"/>
+          </a:p>
+        </p:txBody>
+      </p:sp>
+      <p:sp>
+        <p:nvSpPr>
+          <p:cNvPr id="9" name="TextBox 8"/>
+          <p:cNvSpPr txBox="1"/>
+          <p:nvPr/>
+        </p:nvSpPr>
+        <p:spPr>
+          <a:xfrm>
+            <a:off x="1005840" y="1554480"/>
+            <a:ext cx="10149840" cy="4389120"/>
+          </a:xfrm>
+          <a:prstGeom prst="rect">
+            <a:avLst/>
+          </a:prstGeom>
+          <a:noFill/>
+        </p:spPr>
+        <p:txBody>
+          <a:bodyPr wrap="square">
+            <a:spAutoFit/>
+          </a:bodyPr>
+          <a:lstStyle/>
+          <a:p>
+            <a:pPr>
               <a:defRPr sz="2000" b="1">
                 <a:solidFill>
-                  <a:srgbClr val="10B981"/>
-                </a:solidFill>
-              </a:defRPr>
-            </a:pPr>
-            <a:r>
-              <a:t>Bulk Prediction &amp; Report Export Workflow</a:t>
+                  <a:srgbClr val="1E3A8A"/>
+                </a:solidFill>
+              </a:defRPr>
+            </a:pPr>
+            <a:r>
+              <a:t>Bulk Prediction Workflow</a:t>
             </a:r>
           </a:p>
           <a:p>
             <a:pPr>
-              <a:defRPr sz="1500">
-                <a:solidFill>
-                  <a:srgbClr val="F8FAFC"/>
+              <a:defRPr sz="1400">
+                <a:solidFill>
+                  <a:srgbClr val="0F172A"/>
                 </a:solidFill>
               </a:defRPr>
             </a:pPr>
@@ -3764,9 +3971,9 @@
           </a:p>
           <a:p>
             <a:pPr>
-              <a:defRPr sz="1500">
-                <a:solidFill>
-                  <a:srgbClr val="F8FAFC"/>
+              <a:defRPr sz="1400">
+                <a:solidFill>
+                  <a:srgbClr val="0F172A"/>
                 </a:solidFill>
               </a:defRPr>
             </a:pPr>
@@ -3776,9 +3983,9 @@
           </a:p>
           <a:p>
             <a:pPr>
-              <a:defRPr sz="1500">
-                <a:solidFill>
-                  <a:srgbClr val="F8FAFC"/>
+              <a:defRPr sz="1400">
+                <a:solidFill>
+                  <a:srgbClr val="0F172A"/>
                 </a:solidFill>
               </a:defRPr>
             </a:pPr>
@@ -3788,9 +3995,9 @@
           </a:p>
           <a:p>
             <a:pPr>
-              <a:defRPr sz="1500">
-                <a:solidFill>
-                  <a:srgbClr val="F8FAFC"/>
+              <a:defRPr sz="1400">
+                <a:solidFill>
+                  <a:srgbClr val="0F172A"/>
                 </a:solidFill>
               </a:defRPr>
             </a:pPr>
@@ -3833,7 +4040,7 @@
             <a:avLst/>
           </a:prstGeom>
           <a:solidFill>
-            <a:srgbClr val="090D16"/>
+            <a:srgbClr val="F8FAFC"/>
           </a:solidFill>
           <a:ln>
             <a:noFill/>
@@ -3863,131 +4070,23 @@
       </p:sp>
       <p:sp>
         <p:nvSpPr>
-          <p:cNvPr id="3" name="TextBox 2"/>
-          <p:cNvSpPr txBox="1"/>
-          <p:nvPr/>
-        </p:nvSpPr>
-        <p:spPr>
-          <a:xfrm>
-            <a:off x="731520" y="365760"/>
-            <a:ext cx="10698480" cy="731520"/>
-          </a:xfrm>
-          <a:prstGeom prst="rect">
-            <a:avLst/>
-          </a:prstGeom>
-          <a:noFill/>
-        </p:spPr>
-        <p:txBody>
-          <a:bodyPr wrap="square">
-            <a:spAutoFit/>
-          </a:bodyPr>
-          <a:lstStyle/>
-          <a:p>
-            <a:pPr>
-              <a:defRPr sz="2600" b="1">
-                <a:solidFill>
-                  <a:srgbClr val="F8FAFC"/>
-                </a:solidFill>
-                <a:latin typeface="Arial"/>
-              </a:defRPr>
-            </a:pPr>
-            <a:r>
-              <a:t>Engineering Challenges &amp; Solutions</a:t>
-            </a:r>
-          </a:p>
-        </p:txBody>
-      </p:sp>
-      <p:sp>
-        <p:nvSpPr>
-          <p:cNvPr id="4" name="TextBox 3"/>
-          <p:cNvSpPr txBox="1"/>
-          <p:nvPr/>
-        </p:nvSpPr>
-        <p:spPr>
-          <a:xfrm>
-            <a:off x="9601200" y="365760"/>
-            <a:ext cx="1828800" cy="457200"/>
-          </a:xfrm>
-          <a:prstGeom prst="rect">
-            <a:avLst/>
-          </a:prstGeom>
-          <a:noFill/>
-        </p:spPr>
-        <p:txBody>
-          <a:bodyPr wrap="none">
-            <a:spAutoFit/>
-          </a:bodyPr>
-          <a:lstStyle/>
-          <a:p>
-            <a:pPr algn="r">
-              <a:defRPr sz="1300" b="1">
-                <a:solidFill>
-                  <a:srgbClr val="6366F1"/>
-                </a:solidFill>
-              </a:defRPr>
-            </a:pPr>
-            <a:r>
-              <a:t>Slide 11/13</a:t>
-            </a:r>
-          </a:p>
-        </p:txBody>
-      </p:sp>
-      <p:sp>
-        <p:nvSpPr>
-          <p:cNvPr id="5" name="TextBox 4"/>
-          <p:cNvSpPr txBox="1"/>
-          <p:nvPr/>
-        </p:nvSpPr>
-        <p:spPr>
-          <a:xfrm>
-            <a:off x="731520" y="6309360"/>
-            <a:ext cx="10698480" cy="365760"/>
-          </a:xfrm>
-          <a:prstGeom prst="rect">
-            <a:avLst/>
-          </a:prstGeom>
-          <a:noFill/>
-        </p:spPr>
-        <p:txBody>
-          <a:bodyPr wrap="none">
-            <a:spAutoFit/>
-          </a:bodyPr>
-          <a:lstStyle/>
-          <a:p>
-            <a:pPr>
-              <a:defRPr sz="1000">
-                <a:solidFill>
-                  <a:srgbClr val="94A3B8"/>
-                </a:solidFill>
-              </a:defRPr>
-            </a:pPr>
-            <a:r>
-              <a:t>Sanjana Chirutha (STU ID: STU6817962b86d921746376235)  |  Edunet Foundation  |  AICTE  |  IBM SkillsBuild</a:t>
-            </a:r>
-          </a:p>
-        </p:txBody>
-      </p:sp>
-      <p:sp>
-        <p:nvSpPr>
-          <p:cNvPr id="6" name="Rounded Rectangle 5"/>
+          <p:cNvPr id="3" name="Rectangle 2"/>
           <p:cNvSpPr/>
           <p:nvPr/>
         </p:nvSpPr>
         <p:spPr>
           <a:xfrm>
-            <a:off x="731520" y="1371600"/>
-            <a:ext cx="10698480" cy="4389120"/>
-          </a:xfrm>
-          <a:prstGeom prst="roundRect">
+            <a:off x="0" y="0"/>
+            <a:ext cx="365760" cy="6858000"/>
+          </a:xfrm>
+          <a:prstGeom prst="rect">
             <a:avLst/>
           </a:prstGeom>
           <a:solidFill>
-            <a:srgbClr val="152036"/>
+            <a:srgbClr val="0284C7"/>
           </a:solidFill>
           <a:ln>
-            <a:solidFill>
-              <a:srgbClr val="FFFFFF"/>
-            </a:solidFill>
+            <a:noFill/>
           </a:ln>
         </p:spPr>
         <p:style>
@@ -4014,14 +4113,57 @@
       </p:sp>
       <p:sp>
         <p:nvSpPr>
-          <p:cNvPr id="7" name="TextBox 6"/>
+          <p:cNvPr id="4" name="Rectangle 3"/>
+          <p:cNvSpPr/>
+          <p:nvPr/>
+        </p:nvSpPr>
+        <p:spPr>
+          <a:xfrm>
+            <a:off x="365760" y="6583680"/>
+            <a:ext cx="11825935" cy="274320"/>
+          </a:xfrm>
+          <a:prstGeom prst="rect">
+            <a:avLst/>
+          </a:prstGeom>
+          <a:solidFill>
+            <a:srgbClr val="1E3A8A"/>
+          </a:solidFill>
+          <a:ln>
+            <a:noFill/>
+          </a:ln>
+        </p:spPr>
+        <p:style>
+          <a:lnRef idx="1">
+            <a:schemeClr val="accent1"/>
+          </a:lnRef>
+          <a:fillRef idx="3">
+            <a:schemeClr val="accent1"/>
+          </a:fillRef>
+          <a:effectRef idx="2">
+            <a:schemeClr val="accent1"/>
+          </a:effectRef>
+          <a:fontRef idx="minor">
+            <a:schemeClr val="lt1"/>
+          </a:fontRef>
+        </p:style>
+        <p:txBody>
+          <a:bodyPr rtlCol="0" anchor="ctr"/>
+          <a:lstStyle/>
+          <a:p>
+            <a:pPr algn="ctr"/>
+          </a:p>
+        </p:txBody>
+      </p:sp>
+      <p:sp>
+        <p:nvSpPr>
+          <p:cNvPr id="5" name="TextBox 4"/>
           <p:cNvSpPr txBox="1"/>
           <p:nvPr/>
         </p:nvSpPr>
         <p:spPr>
           <a:xfrm>
-            <a:off x="1005840" y="1554480"/>
-            <a:ext cx="10149840" cy="4023360"/>
+            <a:off x="731520" y="365760"/>
+            <a:ext cx="9601200" cy="731520"/>
           </a:xfrm>
           <a:prstGeom prst="rect">
             <a:avLst/>
@@ -4035,21 +4177,172 @@
           <a:lstStyle/>
           <a:p>
             <a:pPr>
+              <a:defRPr sz="2600" b="1">
+                <a:solidFill>
+                  <a:srgbClr val="1E3A8A"/>
+                </a:solidFill>
+                <a:latin typeface="Helvetica"/>
+              </a:defRPr>
+            </a:pPr>
+            <a:r>
+              <a:t>Engineering Challenges &amp; Solutions</a:t>
+            </a:r>
+          </a:p>
+        </p:txBody>
+      </p:sp>
+      <p:sp>
+        <p:nvSpPr>
+          <p:cNvPr id="6" name="TextBox 5"/>
+          <p:cNvSpPr txBox="1"/>
+          <p:nvPr/>
+        </p:nvSpPr>
+        <p:spPr>
+          <a:xfrm>
+            <a:off x="9601200" y="365760"/>
+            <a:ext cx="1828800" cy="457200"/>
+          </a:xfrm>
+          <a:prstGeom prst="rect">
+            <a:avLst/>
+          </a:prstGeom>
+          <a:noFill/>
+        </p:spPr>
+        <p:txBody>
+          <a:bodyPr wrap="none">
+            <a:spAutoFit/>
+          </a:bodyPr>
+          <a:lstStyle/>
+          <a:p>
+            <a:pPr algn="r">
+              <a:defRPr sz="1300" b="1">
+                <a:solidFill>
+                  <a:srgbClr val="0284C7"/>
+                </a:solidFill>
+              </a:defRPr>
+            </a:pPr>
+            <a:r>
+              <a:t>Slide 11/13</a:t>
+            </a:r>
+          </a:p>
+        </p:txBody>
+      </p:sp>
+      <p:sp>
+        <p:nvSpPr>
+          <p:cNvPr id="7" name="TextBox 6"/>
+          <p:cNvSpPr txBox="1"/>
+          <p:nvPr/>
+        </p:nvSpPr>
+        <p:spPr>
+          <a:xfrm>
+            <a:off x="731520" y="6601968"/>
+            <a:ext cx="10698480" cy="228600"/>
+          </a:xfrm>
+          <a:prstGeom prst="rect">
+            <a:avLst/>
+          </a:prstGeom>
+          <a:noFill/>
+        </p:spPr>
+        <p:txBody>
+          <a:bodyPr wrap="none">
+            <a:spAutoFit/>
+          </a:bodyPr>
+          <a:lstStyle/>
+          <a:p>
+            <a:pPr>
+              <a:defRPr sz="1000">
+                <a:solidFill>
+                  <a:srgbClr val="FFFFFF"/>
+                </a:solidFill>
+              </a:defRPr>
+            </a:pPr>
+            <a:r>
+              <a:t>Sanjana Chirutha (STU ID: STU6817962b86d921746376235)  |  Edunet Foundation  |  AICTE  |  IBM SkillsBuild</a:t>
+            </a:r>
+          </a:p>
+        </p:txBody>
+      </p:sp>
+      <p:sp>
+        <p:nvSpPr>
+          <p:cNvPr id="8" name="Rounded Rectangle 7"/>
+          <p:cNvSpPr/>
+          <p:nvPr/>
+        </p:nvSpPr>
+        <p:spPr>
+          <a:xfrm>
+            <a:off x="731520" y="1371600"/>
+            <a:ext cx="10698480" cy="4754880"/>
+          </a:xfrm>
+          <a:prstGeom prst="roundRect">
+            <a:avLst/>
+          </a:prstGeom>
+          <a:solidFill>
+            <a:srgbClr val="F1F5F9"/>
+          </a:solidFill>
+          <a:ln>
+            <a:solidFill>
+              <a:srgbClr val="CBD5E1"/>
+            </a:solidFill>
+          </a:ln>
+        </p:spPr>
+        <p:style>
+          <a:lnRef idx="1">
+            <a:schemeClr val="accent1"/>
+          </a:lnRef>
+          <a:fillRef idx="3">
+            <a:schemeClr val="accent1"/>
+          </a:fillRef>
+          <a:effectRef idx="2">
+            <a:schemeClr val="accent1"/>
+          </a:effectRef>
+          <a:fontRef idx="minor">
+            <a:schemeClr val="lt1"/>
+          </a:fontRef>
+        </p:style>
+        <p:txBody>
+          <a:bodyPr rtlCol="0" anchor="ctr"/>
+          <a:lstStyle/>
+          <a:p>
+            <a:pPr algn="ctr"/>
+          </a:p>
+        </p:txBody>
+      </p:sp>
+      <p:sp>
+        <p:nvSpPr>
+          <p:cNvPr id="9" name="TextBox 8"/>
+          <p:cNvSpPr txBox="1"/>
+          <p:nvPr/>
+        </p:nvSpPr>
+        <p:spPr>
+          <a:xfrm>
+            <a:off x="1005840" y="1554480"/>
+            <a:ext cx="10149840" cy="4389120"/>
+          </a:xfrm>
+          <a:prstGeom prst="rect">
+            <a:avLst/>
+          </a:prstGeom>
+          <a:noFill/>
+        </p:spPr>
+        <p:txBody>
+          <a:bodyPr wrap="square">
+            <a:spAutoFit/>
+          </a:bodyPr>
+          <a:lstStyle/>
+          <a:p>
+            <a:pPr>
               <a:defRPr sz="2000" b="1">
                 <a:solidFill>
-                  <a:srgbClr val="6366F1"/>
-                </a:solidFill>
-              </a:defRPr>
-            </a:pPr>
-            <a:r>
-              <a:t>Key Problems Solved During Internship</a:t>
+                  <a:srgbClr val="1E3A8A"/>
+                </a:solidFill>
+              </a:defRPr>
+            </a:pPr>
+            <a:r>
+              <a:t>Key Engineering Problems Solved</a:t>
             </a:r>
           </a:p>
           <a:p>
             <a:pPr>
               <a:defRPr sz="1400">
                 <a:solidFill>
-                  <a:srgbClr val="F8FAFC"/>
+                  <a:srgbClr val="0F172A"/>
                 </a:solidFill>
               </a:defRPr>
             </a:pPr>
@@ -4061,7 +4354,7 @@
             <a:pPr>
               <a:defRPr sz="1400">
                 <a:solidFill>
-                  <a:srgbClr val="F8FAFC"/>
+                  <a:srgbClr val="0F172A"/>
                 </a:solidFill>
               </a:defRPr>
             </a:pPr>
@@ -4073,7 +4366,7 @@
             <a:pPr>
               <a:defRPr sz="1400">
                 <a:solidFill>
-                  <a:srgbClr val="F8FAFC"/>
+                  <a:srgbClr val="0F172A"/>
                 </a:solidFill>
               </a:defRPr>
             </a:pPr>
@@ -4116,7 +4409,7 @@
             <a:avLst/>
           </a:prstGeom>
           <a:solidFill>
-            <a:srgbClr val="090D16"/>
+            <a:srgbClr val="F8FAFC"/>
           </a:solidFill>
           <a:ln>
             <a:noFill/>
@@ -4146,131 +4439,23 @@
       </p:sp>
       <p:sp>
         <p:nvSpPr>
-          <p:cNvPr id="3" name="TextBox 2"/>
-          <p:cNvSpPr txBox="1"/>
-          <p:nvPr/>
-        </p:nvSpPr>
-        <p:spPr>
-          <a:xfrm>
-            <a:off x="731520" y="365760"/>
-            <a:ext cx="10698480" cy="731520"/>
-          </a:xfrm>
-          <a:prstGeom prst="rect">
-            <a:avLst/>
-          </a:prstGeom>
-          <a:noFill/>
-        </p:spPr>
-        <p:txBody>
-          <a:bodyPr wrap="square">
-            <a:spAutoFit/>
-          </a:bodyPr>
-          <a:lstStyle/>
-          <a:p>
-            <a:pPr>
-              <a:defRPr sz="2600" b="1">
-                <a:solidFill>
-                  <a:srgbClr val="F8FAFC"/>
-                </a:solidFill>
-                <a:latin typeface="Arial"/>
-              </a:defRPr>
-            </a:pPr>
-            <a:r>
-              <a:t>Key Internship Outcomes &amp; Skills Gained</a:t>
-            </a:r>
-          </a:p>
-        </p:txBody>
-      </p:sp>
-      <p:sp>
-        <p:nvSpPr>
-          <p:cNvPr id="4" name="TextBox 3"/>
-          <p:cNvSpPr txBox="1"/>
-          <p:nvPr/>
-        </p:nvSpPr>
-        <p:spPr>
-          <a:xfrm>
-            <a:off x="9601200" y="365760"/>
-            <a:ext cx="1828800" cy="457200"/>
-          </a:xfrm>
-          <a:prstGeom prst="rect">
-            <a:avLst/>
-          </a:prstGeom>
-          <a:noFill/>
-        </p:spPr>
-        <p:txBody>
-          <a:bodyPr wrap="none">
-            <a:spAutoFit/>
-          </a:bodyPr>
-          <a:lstStyle/>
-          <a:p>
-            <a:pPr algn="r">
-              <a:defRPr sz="1300" b="1">
-                <a:solidFill>
-                  <a:srgbClr val="6366F1"/>
-                </a:solidFill>
-              </a:defRPr>
-            </a:pPr>
-            <a:r>
-              <a:t>Slide 12/13</a:t>
-            </a:r>
-          </a:p>
-        </p:txBody>
-      </p:sp>
-      <p:sp>
-        <p:nvSpPr>
-          <p:cNvPr id="5" name="TextBox 4"/>
-          <p:cNvSpPr txBox="1"/>
-          <p:nvPr/>
-        </p:nvSpPr>
-        <p:spPr>
-          <a:xfrm>
-            <a:off x="731520" y="6309360"/>
-            <a:ext cx="10698480" cy="365760"/>
-          </a:xfrm>
-          <a:prstGeom prst="rect">
-            <a:avLst/>
-          </a:prstGeom>
-          <a:noFill/>
-        </p:spPr>
-        <p:txBody>
-          <a:bodyPr wrap="none">
-            <a:spAutoFit/>
-          </a:bodyPr>
-          <a:lstStyle/>
-          <a:p>
-            <a:pPr>
-              <a:defRPr sz="1000">
-                <a:solidFill>
-                  <a:srgbClr val="94A3B8"/>
-                </a:solidFill>
-              </a:defRPr>
-            </a:pPr>
-            <a:r>
-              <a:t>Sanjana Chirutha (STU ID: STU6817962b86d921746376235)  |  Edunet Foundation  |  AICTE  |  IBM SkillsBuild</a:t>
-            </a:r>
-          </a:p>
-        </p:txBody>
-      </p:sp>
-      <p:sp>
-        <p:nvSpPr>
-          <p:cNvPr id="6" name="Rounded Rectangle 5"/>
+          <p:cNvPr id="3" name="Rectangle 2"/>
           <p:cNvSpPr/>
           <p:nvPr/>
         </p:nvSpPr>
         <p:spPr>
           <a:xfrm>
-            <a:off x="731520" y="1371600"/>
-            <a:ext cx="10698480" cy="4389120"/>
-          </a:xfrm>
-          <a:prstGeom prst="roundRect">
+            <a:off x="0" y="0"/>
+            <a:ext cx="365760" cy="6858000"/>
+          </a:xfrm>
+          <a:prstGeom prst="rect">
             <a:avLst/>
           </a:prstGeom>
           <a:solidFill>
-            <a:srgbClr val="152036"/>
+            <a:srgbClr val="0284C7"/>
           </a:solidFill>
           <a:ln>
-            <a:solidFill>
-              <a:srgbClr val="FFFFFF"/>
-            </a:solidFill>
+            <a:noFill/>
           </a:ln>
         </p:spPr>
         <p:style>
@@ -4297,14 +4482,57 @@
       </p:sp>
       <p:sp>
         <p:nvSpPr>
-          <p:cNvPr id="7" name="TextBox 6"/>
+          <p:cNvPr id="4" name="Rectangle 3"/>
+          <p:cNvSpPr/>
+          <p:nvPr/>
+        </p:nvSpPr>
+        <p:spPr>
+          <a:xfrm>
+            <a:off x="365760" y="6583680"/>
+            <a:ext cx="11825935" cy="274320"/>
+          </a:xfrm>
+          <a:prstGeom prst="rect">
+            <a:avLst/>
+          </a:prstGeom>
+          <a:solidFill>
+            <a:srgbClr val="1E3A8A"/>
+          </a:solidFill>
+          <a:ln>
+            <a:noFill/>
+          </a:ln>
+        </p:spPr>
+        <p:style>
+          <a:lnRef idx="1">
+            <a:schemeClr val="accent1"/>
+          </a:lnRef>
+          <a:fillRef idx="3">
+            <a:schemeClr val="accent1"/>
+          </a:fillRef>
+          <a:effectRef idx="2">
+            <a:schemeClr val="accent1"/>
+          </a:effectRef>
+          <a:fontRef idx="minor">
+            <a:schemeClr val="lt1"/>
+          </a:fontRef>
+        </p:style>
+        <p:txBody>
+          <a:bodyPr rtlCol="0" anchor="ctr"/>
+          <a:lstStyle/>
+          <a:p>
+            <a:pPr algn="ctr"/>
+          </a:p>
+        </p:txBody>
+      </p:sp>
+      <p:sp>
+        <p:nvSpPr>
+          <p:cNvPr id="5" name="TextBox 4"/>
           <p:cNvSpPr txBox="1"/>
           <p:nvPr/>
         </p:nvSpPr>
         <p:spPr>
           <a:xfrm>
-            <a:off x="1005840" y="1554480"/>
-            <a:ext cx="10149840" cy="4023360"/>
+            <a:off x="731520" y="365760"/>
+            <a:ext cx="9601200" cy="731520"/>
           </a:xfrm>
           <a:prstGeom prst="rect">
             <a:avLst/>
@@ -4318,9 +4546,160 @@
           <a:lstStyle/>
           <a:p>
             <a:pPr>
+              <a:defRPr sz="2600" b="1">
+                <a:solidFill>
+                  <a:srgbClr val="1E3A8A"/>
+                </a:solidFill>
+                <a:latin typeface="Helvetica"/>
+              </a:defRPr>
+            </a:pPr>
+            <a:r>
+              <a:t>Key Internship Outcomes &amp; Skills Gained</a:t>
+            </a:r>
+          </a:p>
+        </p:txBody>
+      </p:sp>
+      <p:sp>
+        <p:nvSpPr>
+          <p:cNvPr id="6" name="TextBox 5"/>
+          <p:cNvSpPr txBox="1"/>
+          <p:nvPr/>
+        </p:nvSpPr>
+        <p:spPr>
+          <a:xfrm>
+            <a:off x="9601200" y="365760"/>
+            <a:ext cx="1828800" cy="457200"/>
+          </a:xfrm>
+          <a:prstGeom prst="rect">
+            <a:avLst/>
+          </a:prstGeom>
+          <a:noFill/>
+        </p:spPr>
+        <p:txBody>
+          <a:bodyPr wrap="none">
+            <a:spAutoFit/>
+          </a:bodyPr>
+          <a:lstStyle/>
+          <a:p>
+            <a:pPr algn="r">
+              <a:defRPr sz="1300" b="1">
+                <a:solidFill>
+                  <a:srgbClr val="0284C7"/>
+                </a:solidFill>
+              </a:defRPr>
+            </a:pPr>
+            <a:r>
+              <a:t>Slide 12/13</a:t>
+            </a:r>
+          </a:p>
+        </p:txBody>
+      </p:sp>
+      <p:sp>
+        <p:nvSpPr>
+          <p:cNvPr id="7" name="TextBox 6"/>
+          <p:cNvSpPr txBox="1"/>
+          <p:nvPr/>
+        </p:nvSpPr>
+        <p:spPr>
+          <a:xfrm>
+            <a:off x="731520" y="6601968"/>
+            <a:ext cx="10698480" cy="228600"/>
+          </a:xfrm>
+          <a:prstGeom prst="rect">
+            <a:avLst/>
+          </a:prstGeom>
+          <a:noFill/>
+        </p:spPr>
+        <p:txBody>
+          <a:bodyPr wrap="none">
+            <a:spAutoFit/>
+          </a:bodyPr>
+          <a:lstStyle/>
+          <a:p>
+            <a:pPr>
+              <a:defRPr sz="1000">
+                <a:solidFill>
+                  <a:srgbClr val="FFFFFF"/>
+                </a:solidFill>
+              </a:defRPr>
+            </a:pPr>
+            <a:r>
+              <a:t>Sanjana Chirutha (STU ID: STU6817962b86d921746376235)  |  Edunet Foundation  |  AICTE  |  IBM SkillsBuild</a:t>
+            </a:r>
+          </a:p>
+        </p:txBody>
+      </p:sp>
+      <p:sp>
+        <p:nvSpPr>
+          <p:cNvPr id="8" name="Rounded Rectangle 7"/>
+          <p:cNvSpPr/>
+          <p:nvPr/>
+        </p:nvSpPr>
+        <p:spPr>
+          <a:xfrm>
+            <a:off x="731520" y="1371600"/>
+            <a:ext cx="10698480" cy="4754880"/>
+          </a:xfrm>
+          <a:prstGeom prst="roundRect">
+            <a:avLst/>
+          </a:prstGeom>
+          <a:solidFill>
+            <a:srgbClr val="F1F5F9"/>
+          </a:solidFill>
+          <a:ln>
+            <a:solidFill>
+              <a:srgbClr val="CBD5E1"/>
+            </a:solidFill>
+          </a:ln>
+        </p:spPr>
+        <p:style>
+          <a:lnRef idx="1">
+            <a:schemeClr val="accent1"/>
+          </a:lnRef>
+          <a:fillRef idx="3">
+            <a:schemeClr val="accent1"/>
+          </a:fillRef>
+          <a:effectRef idx="2">
+            <a:schemeClr val="accent1"/>
+          </a:effectRef>
+          <a:fontRef idx="minor">
+            <a:schemeClr val="lt1"/>
+          </a:fontRef>
+        </p:style>
+        <p:txBody>
+          <a:bodyPr rtlCol="0" anchor="ctr"/>
+          <a:lstStyle/>
+          <a:p>
+            <a:pPr algn="ctr"/>
+          </a:p>
+        </p:txBody>
+      </p:sp>
+      <p:sp>
+        <p:nvSpPr>
+          <p:cNvPr id="9" name="TextBox 8"/>
+          <p:cNvSpPr txBox="1"/>
+          <p:nvPr/>
+        </p:nvSpPr>
+        <p:spPr>
+          <a:xfrm>
+            <a:off x="1005840" y="1554480"/>
+            <a:ext cx="10149840" cy="4389120"/>
+          </a:xfrm>
+          <a:prstGeom prst="rect">
+            <a:avLst/>
+          </a:prstGeom>
+          <a:noFill/>
+        </p:spPr>
+        <p:txBody>
+          <a:bodyPr wrap="square">
+            <a:spAutoFit/>
+          </a:bodyPr>
+          <a:lstStyle/>
+          <a:p>
+            <a:pPr>
               <a:defRPr sz="2000" b="1">
                 <a:solidFill>
-                  <a:srgbClr val="10B981"/>
+                  <a:srgbClr val="1E3A8A"/>
                 </a:solidFill>
               </a:defRPr>
             </a:pPr>
@@ -4330,9 +4709,9 @@
           </a:p>
           <a:p>
             <a:pPr>
-              <a:defRPr sz="1500">
-                <a:solidFill>
-                  <a:srgbClr val="F8FAFC"/>
+              <a:defRPr sz="1400">
+                <a:solidFill>
+                  <a:srgbClr val="0F172A"/>
                 </a:solidFill>
               </a:defRPr>
             </a:pPr>
@@ -4342,9 +4721,9 @@
           </a:p>
           <a:p>
             <a:pPr>
-              <a:defRPr sz="1500">
-                <a:solidFill>
-                  <a:srgbClr val="F8FAFC"/>
+              <a:defRPr sz="1400">
+                <a:solidFill>
+                  <a:srgbClr val="0F172A"/>
                 </a:solidFill>
               </a:defRPr>
             </a:pPr>
@@ -4354,9 +4733,9 @@
           </a:p>
           <a:p>
             <a:pPr>
-              <a:defRPr sz="1500">
-                <a:solidFill>
-                  <a:srgbClr val="F8FAFC"/>
+              <a:defRPr sz="1400">
+                <a:solidFill>
+                  <a:srgbClr val="0F172A"/>
                 </a:solidFill>
               </a:defRPr>
             </a:pPr>
@@ -4366,9 +4745,9 @@
           </a:p>
           <a:p>
             <a:pPr>
-              <a:defRPr sz="1500">
-                <a:solidFill>
-                  <a:srgbClr val="F8FAFC"/>
+              <a:defRPr sz="1400">
+                <a:solidFill>
+                  <a:srgbClr val="0F172A"/>
                 </a:solidFill>
               </a:defRPr>
             </a:pPr>
@@ -4411,7 +4790,7 @@
             <a:avLst/>
           </a:prstGeom>
           <a:solidFill>
-            <a:srgbClr val="090D16"/>
+            <a:srgbClr val="F8FAFC"/>
           </a:solidFill>
           <a:ln>
             <a:noFill/>
@@ -4441,107 +4820,23 @@
       </p:sp>
       <p:sp>
         <p:nvSpPr>
-          <p:cNvPr id="3" name="TextBox 2"/>
-          <p:cNvSpPr txBox="1"/>
-          <p:nvPr/>
-        </p:nvSpPr>
-        <p:spPr>
-          <a:xfrm>
-            <a:off x="731520" y="6309360"/>
-            <a:ext cx="10698480" cy="365760"/>
-          </a:xfrm>
-          <a:prstGeom prst="rect">
-            <a:avLst/>
-          </a:prstGeom>
-          <a:noFill/>
-        </p:spPr>
-        <p:txBody>
-          <a:bodyPr wrap="none">
-            <a:spAutoFit/>
-          </a:bodyPr>
-          <a:lstStyle/>
-          <a:p>
-            <a:pPr>
-              <a:defRPr sz="1000">
-                <a:solidFill>
-                  <a:srgbClr val="94A3B8"/>
-                </a:solidFill>
-              </a:defRPr>
-            </a:pPr>
-            <a:r>
-              <a:t>Sanjana Chirutha (STU ID: STU6817962b86d921746376235)  |  Edunet Foundation  |  AICTE  |  IBM SkillsBuild</a:t>
-            </a:r>
-          </a:p>
-        </p:txBody>
-      </p:sp>
-      <p:sp>
-        <p:nvSpPr>
-          <p:cNvPr id="4" name="TextBox 3"/>
-          <p:cNvSpPr txBox="1"/>
-          <p:nvPr/>
-        </p:nvSpPr>
-        <p:spPr>
-          <a:xfrm>
-            <a:off x="914400" y="1371600"/>
-            <a:ext cx="10362895" cy="1645920"/>
-          </a:xfrm>
-          <a:prstGeom prst="rect">
-            <a:avLst/>
-          </a:prstGeom>
-          <a:noFill/>
-        </p:spPr>
-        <p:txBody>
-          <a:bodyPr wrap="none">
-            <a:spAutoFit/>
-          </a:bodyPr>
-          <a:lstStyle/>
-          <a:p>
-            <a:pPr algn="ctr">
-              <a:defRPr sz="4400" b="1">
-                <a:solidFill>
-                  <a:srgbClr val="6366F1"/>
-                </a:solidFill>
-              </a:defRPr>
-            </a:pPr>
-            <a:r>
-              <a:t>Thank You!</a:t>
-            </a:r>
-          </a:p>
-          <a:p>
-            <a:pPr algn="ctr">
-              <a:defRPr sz="2000">
-                <a:solidFill>
-                  <a:srgbClr val="94A3B8"/>
-                </a:solidFill>
-              </a:defRPr>
-            </a:pPr>
-            <a:r>
-              <a:t>Questions, Discussion &amp; Feedback Are Welcome</a:t>
-            </a:r>
-          </a:p>
-        </p:txBody>
-      </p:sp>
-      <p:sp>
-        <p:nvSpPr>
-          <p:cNvPr id="5" name="Rounded Rectangle 4"/>
+          <p:cNvPr id="3" name="Rectangle 2"/>
           <p:cNvSpPr/>
           <p:nvPr/>
         </p:nvSpPr>
         <p:spPr>
           <a:xfrm>
-            <a:off x="1371600" y="3291840"/>
-            <a:ext cx="4389120" cy="2194560"/>
-          </a:xfrm>
-          <a:prstGeom prst="roundRect">
+            <a:off x="0" y="0"/>
+            <a:ext cx="365760" cy="6858000"/>
+          </a:xfrm>
+          <a:prstGeom prst="rect">
             <a:avLst/>
           </a:prstGeom>
           <a:solidFill>
-            <a:srgbClr val="152036"/>
+            <a:srgbClr val="0284C7"/>
           </a:solidFill>
           <a:ln>
-            <a:solidFill>
-              <a:srgbClr val="FFFFFF"/>
-            </a:solidFill>
+            <a:noFill/>
           </a:ln>
         </p:spPr>
         <p:style>
@@ -4568,102 +4863,23 @@
       </p:sp>
       <p:sp>
         <p:nvSpPr>
-          <p:cNvPr id="6" name="TextBox 5"/>
-          <p:cNvSpPr txBox="1"/>
-          <p:nvPr/>
-        </p:nvSpPr>
-        <p:spPr>
-          <a:xfrm>
-            <a:off x="1554480" y="3474720"/>
-            <a:ext cx="4023360" cy="1828800"/>
-          </a:xfrm>
-          <a:prstGeom prst="rect">
-            <a:avLst/>
-          </a:prstGeom>
-          <a:noFill/>
-        </p:spPr>
-        <p:txBody>
-          <a:bodyPr wrap="square">
-            <a:spAutoFit/>
-          </a:bodyPr>
-          <a:lstStyle/>
-          <a:p>
-            <a:r>
-              <a:rPr b="1" sz="1400">
-                <a:solidFill>
-                  <a:srgbClr val="F8FAFC"/>
-                </a:solidFill>
-              </a:rPr>
-              <a:t>Student Name: </a:t>
-            </a:r>
-            <a:r>
-              <a:rPr sz="1400">
-                <a:solidFill>
-                  <a:srgbClr val="6366F1"/>
-                </a:solidFill>
-              </a:rPr>
-              <a:t>Sanjana Chirutha</a:t>
-            </a:r>
-          </a:p>
-          <a:p>
-            <a:r>
-              <a:rPr b="1" sz="1400">
-                <a:solidFill>
-                  <a:srgbClr val="F8FAFC"/>
-                </a:solidFill>
-              </a:rPr>
-              <a:t>STU ID: </a:t>
-            </a:r>
-            <a:r>
-              <a:rPr sz="1400">
-                <a:solidFill>
-                  <a:srgbClr val="6366F1"/>
-                </a:solidFill>
-              </a:rPr>
-              <a:t>STU6817962b86d921746376235</a:t>
-            </a:r>
-          </a:p>
-          <a:p>
-            <a:r>
-              <a:rPr b="1" sz="1400">
-                <a:solidFill>
-                  <a:srgbClr val="F8FAFC"/>
-                </a:solidFill>
-              </a:rPr>
-              <a:t>Internship Period: </a:t>
-            </a:r>
-            <a:r>
-              <a:rPr sz="1400">
-                <a:solidFill>
-                  <a:srgbClr val="6366F1"/>
-                </a:solidFill>
-              </a:rPr>
-              <a:t>18/06/2025 – 30/07/2025</a:t>
-            </a:r>
-          </a:p>
-        </p:txBody>
-      </p:sp>
-      <p:sp>
-        <p:nvSpPr>
-          <p:cNvPr id="7" name="Rounded Rectangle 6"/>
+          <p:cNvPr id="4" name="Rectangle 3"/>
           <p:cNvSpPr/>
           <p:nvPr/>
         </p:nvSpPr>
         <p:spPr>
           <a:xfrm>
-            <a:off x="6400800" y="3291840"/>
-            <a:ext cx="4389120" cy="2194560"/>
-          </a:xfrm>
-          <a:prstGeom prst="roundRect">
+            <a:off x="365760" y="6583680"/>
+            <a:ext cx="11825935" cy="274320"/>
+          </a:xfrm>
+          <a:prstGeom prst="rect">
             <a:avLst/>
           </a:prstGeom>
           <a:solidFill>
-            <a:srgbClr val="152036"/>
+            <a:srgbClr val="1E3A8A"/>
           </a:solidFill>
           <a:ln>
-            <a:solidFill>
-              <a:srgbClr val="FFFFFF"/>
-            </a:solidFill>
+            <a:noFill/>
           </a:ln>
         </p:spPr>
         <p:style>
@@ -4690,14 +4906,141 @@
       </p:sp>
       <p:sp>
         <p:nvSpPr>
+          <p:cNvPr id="5" name="TextBox 4"/>
+          <p:cNvSpPr txBox="1"/>
+          <p:nvPr/>
+        </p:nvSpPr>
+        <p:spPr>
+          <a:xfrm>
+            <a:off x="731520" y="6601968"/>
+            <a:ext cx="10698480" cy="228600"/>
+          </a:xfrm>
+          <a:prstGeom prst="rect">
+            <a:avLst/>
+          </a:prstGeom>
+          <a:noFill/>
+        </p:spPr>
+        <p:txBody>
+          <a:bodyPr wrap="none">
+            <a:spAutoFit/>
+          </a:bodyPr>
+          <a:lstStyle/>
+          <a:p>
+            <a:pPr>
+              <a:defRPr sz="1000">
+                <a:solidFill>
+                  <a:srgbClr val="FFFFFF"/>
+                </a:solidFill>
+              </a:defRPr>
+            </a:pPr>
+            <a:r>
+              <a:t>Sanjana Chirutha (STU ID: STU6817962b86d921746376235)  |  Edunet Foundation  |  AICTE  |  IBM SkillsBuild</a:t>
+            </a:r>
+          </a:p>
+        </p:txBody>
+      </p:sp>
+      <p:sp>
+        <p:nvSpPr>
+          <p:cNvPr id="6" name="TextBox 5"/>
+          <p:cNvSpPr txBox="1"/>
+          <p:nvPr/>
+        </p:nvSpPr>
+        <p:spPr>
+          <a:xfrm>
+            <a:off x="914400" y="1371600"/>
+            <a:ext cx="10362895" cy="1645920"/>
+          </a:xfrm>
+          <a:prstGeom prst="rect">
+            <a:avLst/>
+          </a:prstGeom>
+          <a:noFill/>
+        </p:spPr>
+        <p:txBody>
+          <a:bodyPr wrap="none">
+            <a:spAutoFit/>
+          </a:bodyPr>
+          <a:lstStyle/>
+          <a:p>
+            <a:pPr algn="ctr">
+              <a:defRPr sz="4400" b="1">
+                <a:solidFill>
+                  <a:srgbClr val="1E3A8A"/>
+                </a:solidFill>
+              </a:defRPr>
+            </a:pPr>
+            <a:r>
+              <a:t>Thank You!</a:t>
+            </a:r>
+          </a:p>
+          <a:p>
+            <a:pPr algn="ctr">
+              <a:defRPr sz="2000">
+                <a:solidFill>
+                  <a:srgbClr val="475569"/>
+                </a:solidFill>
+              </a:defRPr>
+            </a:pPr>
+            <a:r>
+              <a:t>Questions &amp; Feedback Are Welcome</a:t>
+            </a:r>
+          </a:p>
+        </p:txBody>
+      </p:sp>
+      <p:sp>
+        <p:nvSpPr>
+          <p:cNvPr id="7" name="Rounded Rectangle 6"/>
+          <p:cNvSpPr/>
+          <p:nvPr/>
+        </p:nvSpPr>
+        <p:spPr>
+          <a:xfrm>
+            <a:off x="1371600" y="3291840"/>
+            <a:ext cx="4389120" cy="2377440"/>
+          </a:xfrm>
+          <a:prstGeom prst="roundRect">
+            <a:avLst/>
+          </a:prstGeom>
+          <a:solidFill>
+            <a:srgbClr val="F1F5F9"/>
+          </a:solidFill>
+          <a:ln>
+            <a:solidFill>
+              <a:srgbClr val="CBD5E1"/>
+            </a:solidFill>
+          </a:ln>
+        </p:spPr>
+        <p:style>
+          <a:lnRef idx="1">
+            <a:schemeClr val="accent1"/>
+          </a:lnRef>
+          <a:fillRef idx="3">
+            <a:schemeClr val="accent1"/>
+          </a:fillRef>
+          <a:effectRef idx="2">
+            <a:schemeClr val="accent1"/>
+          </a:effectRef>
+          <a:fontRef idx="minor">
+            <a:schemeClr val="lt1"/>
+          </a:fontRef>
+        </p:style>
+        <p:txBody>
+          <a:bodyPr rtlCol="0" anchor="ctr"/>
+          <a:lstStyle/>
+          <a:p>
+            <a:pPr algn="ctr"/>
+          </a:p>
+        </p:txBody>
+      </p:sp>
+      <p:sp>
+        <p:nvSpPr>
           <p:cNvPr id="8" name="TextBox 7"/>
           <p:cNvSpPr txBox="1"/>
           <p:nvPr/>
         </p:nvSpPr>
         <p:spPr>
           <a:xfrm>
-            <a:off x="6583680" y="3474720"/>
-            <a:ext cx="4023360" cy="1828800"/>
+            <a:off x="1554480" y="3474720"/>
+            <a:ext cx="4023360" cy="2011680"/>
           </a:xfrm>
           <a:prstGeom prst="rect">
             <a:avLst/>
@@ -4711,17 +5054,139 @@
           <a:lstStyle/>
           <a:p>
             <a:r>
-              <a:rPr b="1" sz="1400">
-                <a:solidFill>
-                  <a:srgbClr val="F8FAFC"/>
+              <a:rPr b="1" sz="1300">
+                <a:solidFill>
+                  <a:srgbClr val="0F172A"/>
+                </a:solidFill>
+              </a:rPr>
+              <a:t>Student Name: </a:t>
+            </a:r>
+            <a:r>
+              <a:rPr sz="1300">
+                <a:solidFill>
+                  <a:srgbClr val="1E3A8A"/>
+                </a:solidFill>
+              </a:rPr>
+              <a:t>Sanjana Chirutha</a:t>
+            </a:r>
+          </a:p>
+          <a:p>
+            <a:r>
+              <a:rPr b="1" sz="1300">
+                <a:solidFill>
+                  <a:srgbClr val="0F172A"/>
+                </a:solidFill>
+              </a:rPr>
+              <a:t>STU ID: </a:t>
+            </a:r>
+            <a:r>
+              <a:rPr sz="1300">
+                <a:solidFill>
+                  <a:srgbClr val="1E3A8A"/>
+                </a:solidFill>
+              </a:rPr>
+              <a:t>STU6817962b86d921746376235</a:t>
+            </a:r>
+          </a:p>
+          <a:p>
+            <a:r>
+              <a:rPr b="1" sz="1300">
+                <a:solidFill>
+                  <a:srgbClr val="0F172A"/>
+                </a:solidFill>
+              </a:rPr>
+              <a:t>Internship Period: </a:t>
+            </a:r>
+            <a:r>
+              <a:rPr sz="1300">
+                <a:solidFill>
+                  <a:srgbClr val="1E3A8A"/>
+                </a:solidFill>
+              </a:rPr>
+              <a:t>18/06/2025 – 30/07/2025</a:t>
+            </a:r>
+          </a:p>
+        </p:txBody>
+      </p:sp>
+      <p:sp>
+        <p:nvSpPr>
+          <p:cNvPr id="9" name="Rounded Rectangle 8"/>
+          <p:cNvSpPr/>
+          <p:nvPr/>
+        </p:nvSpPr>
+        <p:spPr>
+          <a:xfrm>
+            <a:off x="6400800" y="3291840"/>
+            <a:ext cx="4389120" cy="2377440"/>
+          </a:xfrm>
+          <a:prstGeom prst="roundRect">
+            <a:avLst/>
+          </a:prstGeom>
+          <a:solidFill>
+            <a:srgbClr val="F1F5F9"/>
+          </a:solidFill>
+          <a:ln>
+            <a:solidFill>
+              <a:srgbClr val="CBD5E1"/>
+            </a:solidFill>
+          </a:ln>
+        </p:spPr>
+        <p:style>
+          <a:lnRef idx="1">
+            <a:schemeClr val="accent1"/>
+          </a:lnRef>
+          <a:fillRef idx="3">
+            <a:schemeClr val="accent1"/>
+          </a:fillRef>
+          <a:effectRef idx="2">
+            <a:schemeClr val="accent1"/>
+          </a:effectRef>
+          <a:fontRef idx="minor">
+            <a:schemeClr val="lt1"/>
+          </a:fontRef>
+        </p:style>
+        <p:txBody>
+          <a:bodyPr rtlCol="0" anchor="ctr"/>
+          <a:lstStyle/>
+          <a:p>
+            <a:pPr algn="ctr"/>
+          </a:p>
+        </p:txBody>
+      </p:sp>
+      <p:sp>
+        <p:nvSpPr>
+          <p:cNvPr id="10" name="TextBox 9"/>
+          <p:cNvSpPr txBox="1"/>
+          <p:nvPr/>
+        </p:nvSpPr>
+        <p:spPr>
+          <a:xfrm>
+            <a:off x="6583680" y="3474720"/>
+            <a:ext cx="4023360" cy="2011680"/>
+          </a:xfrm>
+          <a:prstGeom prst="rect">
+            <a:avLst/>
+          </a:prstGeom>
+          <a:noFill/>
+        </p:spPr>
+        <p:txBody>
+          <a:bodyPr wrap="square">
+            <a:spAutoFit/>
+          </a:bodyPr>
+          <a:lstStyle/>
+          <a:p>
+            <a:r>
+              <a:rPr b="1" sz="1300">
+                <a:solidFill>
+                  <a:srgbClr val="0F172A"/>
                 </a:solidFill>
               </a:rPr>
               <a:t>GitHub Repo: </a:t>
             </a:r>
             <a:r>
-              <a:rPr sz="1400">
-                <a:solidFill>
-                  <a:srgbClr val="6366F1"/>
+              <a:rPr sz="1300">
+                <a:solidFill>
+                  <a:srgbClr val="1E3A8A"/>
                 </a:solidFill>
               </a:rPr>
               <a:t>github.com/Sanjana-Chirutha</a:t>
@@ -4729,17 +5194,17 @@
           </a:p>
           <a:p>
             <a:r>
-              <a:rPr b="1" sz="1400">
-                <a:solidFill>
-                  <a:srgbClr val="F8FAFC"/>
+              <a:rPr b="1" sz="1300">
+                <a:solidFill>
+                  <a:srgbClr val="0F172A"/>
                 </a:solidFill>
               </a:rPr>
               <a:t>Live Web App: </a:t>
             </a:r>
             <a:r>
-              <a:rPr sz="1400">
-                <a:solidFill>
-                  <a:srgbClr val="6366F1"/>
+              <a:rPr sz="1300">
+                <a:solidFill>
+                  <a:srgbClr val="1E3A8A"/>
                 </a:solidFill>
               </a:rPr>
               <a:t>sanjana-chirutha.github.io</a:t>
@@ -4747,17 +5212,17 @@
           </a:p>
           <a:p>
             <a:r>
-              <a:rPr b="1" sz="1400">
-                <a:solidFill>
-                  <a:srgbClr val="F8FAFC"/>
+              <a:rPr b="1" sz="1300">
+                <a:solidFill>
+                  <a:srgbClr val="0F172A"/>
                 </a:solidFill>
               </a:rPr>
               <a:t>Organisations: </a:t>
             </a:r>
             <a:r>
-              <a:rPr sz="1400">
-                <a:solidFill>
-                  <a:srgbClr val="6366F1"/>
+              <a:rPr sz="1300">
+                <a:solidFill>
+                  <a:srgbClr val="1E3A8A"/>
                 </a:solidFill>
               </a:rPr>
               <a:t>Edunet | AICTE | IBM</a:t>
@@ -4798,7 +5263,7 @@
             <a:avLst/>
           </a:prstGeom>
           <a:solidFill>
-            <a:srgbClr val="090D16"/>
+            <a:srgbClr val="F8FAFC"/>
           </a:solidFill>
           <a:ln>
             <a:noFill/>
@@ -4828,131 +5293,23 @@
       </p:sp>
       <p:sp>
         <p:nvSpPr>
-          <p:cNvPr id="3" name="TextBox 2"/>
-          <p:cNvSpPr txBox="1"/>
-          <p:nvPr/>
-        </p:nvSpPr>
-        <p:spPr>
-          <a:xfrm>
-            <a:off x="731520" y="365760"/>
-            <a:ext cx="10698480" cy="731520"/>
-          </a:xfrm>
-          <a:prstGeom prst="rect">
-            <a:avLst/>
-          </a:prstGeom>
-          <a:noFill/>
-        </p:spPr>
-        <p:txBody>
-          <a:bodyPr wrap="square">
-            <a:spAutoFit/>
-          </a:bodyPr>
-          <a:lstStyle/>
-          <a:p>
-            <a:pPr>
-              <a:defRPr sz="2600" b="1">
-                <a:solidFill>
-                  <a:srgbClr val="F8FAFC"/>
-                </a:solidFill>
-                <a:latin typeface="Arial"/>
-              </a:defRPr>
-            </a:pPr>
-            <a:r>
-              <a:t>Organization &amp; Program Background</a:t>
-            </a:r>
-          </a:p>
-        </p:txBody>
-      </p:sp>
-      <p:sp>
-        <p:nvSpPr>
-          <p:cNvPr id="4" name="TextBox 3"/>
-          <p:cNvSpPr txBox="1"/>
-          <p:nvPr/>
-        </p:nvSpPr>
-        <p:spPr>
-          <a:xfrm>
-            <a:off x="9601200" y="365760"/>
-            <a:ext cx="1828800" cy="457200"/>
-          </a:xfrm>
-          <a:prstGeom prst="rect">
-            <a:avLst/>
-          </a:prstGeom>
-          <a:noFill/>
-        </p:spPr>
-        <p:txBody>
-          <a:bodyPr wrap="none">
-            <a:spAutoFit/>
-          </a:bodyPr>
-          <a:lstStyle/>
-          <a:p>
-            <a:pPr algn="r">
-              <a:defRPr sz="1300" b="1">
-                <a:solidFill>
-                  <a:srgbClr val="6366F1"/>
-                </a:solidFill>
-              </a:defRPr>
-            </a:pPr>
-            <a:r>
-              <a:t>Slide 02/13</a:t>
-            </a:r>
-          </a:p>
-        </p:txBody>
-      </p:sp>
-      <p:sp>
-        <p:nvSpPr>
-          <p:cNvPr id="5" name="TextBox 4"/>
-          <p:cNvSpPr txBox="1"/>
-          <p:nvPr/>
-        </p:nvSpPr>
-        <p:spPr>
-          <a:xfrm>
-            <a:off x="731520" y="6309360"/>
-            <a:ext cx="10698480" cy="365760"/>
-          </a:xfrm>
-          <a:prstGeom prst="rect">
-            <a:avLst/>
-          </a:prstGeom>
-          <a:noFill/>
-        </p:spPr>
-        <p:txBody>
-          <a:bodyPr wrap="none">
-            <a:spAutoFit/>
-          </a:bodyPr>
-          <a:lstStyle/>
-          <a:p>
-            <a:pPr>
-              <a:defRPr sz="1000">
-                <a:solidFill>
-                  <a:srgbClr val="94A3B8"/>
-                </a:solidFill>
-              </a:defRPr>
-            </a:pPr>
-            <a:r>
-              <a:t>Sanjana Chirutha (STU ID: STU6817962b86d921746376235)  |  Edunet Foundation  |  AICTE  |  IBM SkillsBuild</a:t>
-            </a:r>
-          </a:p>
-        </p:txBody>
-      </p:sp>
-      <p:sp>
-        <p:nvSpPr>
-          <p:cNvPr id="6" name="Rounded Rectangle 5"/>
+          <p:cNvPr id="3" name="Rectangle 2"/>
           <p:cNvSpPr/>
           <p:nvPr/>
         </p:nvSpPr>
         <p:spPr>
           <a:xfrm>
-            <a:off x="731520" y="1371600"/>
-            <a:ext cx="5120640" cy="4389120"/>
-          </a:xfrm>
-          <a:prstGeom prst="roundRect">
+            <a:off x="0" y="0"/>
+            <a:ext cx="365760" cy="6858000"/>
+          </a:xfrm>
+          <a:prstGeom prst="rect">
             <a:avLst/>
           </a:prstGeom>
           <a:solidFill>
-            <a:srgbClr val="152036"/>
+            <a:srgbClr val="0284C7"/>
           </a:solidFill>
           <a:ln>
-            <a:solidFill>
-              <a:srgbClr val="FFFFFF"/>
-            </a:solidFill>
+            <a:noFill/>
           </a:ln>
         </p:spPr>
         <p:style>
@@ -4979,96 +5336,23 @@
       </p:sp>
       <p:sp>
         <p:nvSpPr>
-          <p:cNvPr id="7" name="TextBox 6"/>
-          <p:cNvSpPr txBox="1"/>
-          <p:nvPr/>
-        </p:nvSpPr>
-        <p:spPr>
-          <a:xfrm>
-            <a:off x="914400" y="1554480"/>
-            <a:ext cx="4754880" cy="4023360"/>
-          </a:xfrm>
-          <a:prstGeom prst="rect">
-            <a:avLst/>
-          </a:prstGeom>
-          <a:noFill/>
-        </p:spPr>
-        <p:txBody>
-          <a:bodyPr wrap="square">
-            <a:spAutoFit/>
-          </a:bodyPr>
-          <a:lstStyle/>
-          <a:p>
-            <a:pPr>
-              <a:defRPr sz="2000" b="1">
-                <a:solidFill>
-                  <a:srgbClr val="10B981"/>
-                </a:solidFill>
-              </a:defRPr>
-            </a:pPr>
-            <a:r>
-              <a:t>Collaborating Organizations</a:t>
-            </a:r>
-          </a:p>
-          <a:p>
-            <a:pPr>
-              <a:defRPr sz="1400">
-                <a:solidFill>
-                  <a:srgbClr val="94A3B8"/>
-                </a:solidFill>
-              </a:defRPr>
-            </a:pPr>
-            <a:r>
-              <a:t>• Edunet Foundation: Primary implementing organization fostering technical skills and digital education excellence.</a:t>
-            </a:r>
-          </a:p>
-          <a:p>
-            <a:pPr>
-              <a:defRPr sz="1400">
-                <a:solidFill>
-                  <a:srgbClr val="94A3B8"/>
-                </a:solidFill>
-              </a:defRPr>
-            </a:pPr>
-            <a:r>
-              <a:t>• AICTE (All India Council for Technical Education): Statutory body guiding national technical curriculum standards.</a:t>
-            </a:r>
-          </a:p>
-          <a:p>
-            <a:pPr>
-              <a:defRPr sz="1400">
-                <a:solidFill>
-                  <a:srgbClr val="94A3B8"/>
-                </a:solidFill>
-              </a:defRPr>
-            </a:pPr>
-            <a:r>
-              <a:t>• IBM SkillsBuild: Industry partner providing practical AI &amp; ML learning workflows and credentials.</a:t>
-            </a:r>
-          </a:p>
-        </p:txBody>
-      </p:sp>
-      <p:sp>
-        <p:nvSpPr>
-          <p:cNvPr id="8" name="Rounded Rectangle 7"/>
+          <p:cNvPr id="4" name="Rectangle 3"/>
           <p:cNvSpPr/>
           <p:nvPr/>
         </p:nvSpPr>
         <p:spPr>
           <a:xfrm>
-            <a:off x="6217920" y="1371600"/>
-            <a:ext cx="5212080" cy="4389120"/>
-          </a:xfrm>
-          <a:prstGeom prst="roundRect">
+            <a:off x="365760" y="6583680"/>
+            <a:ext cx="11825935" cy="274320"/>
+          </a:xfrm>
+          <a:prstGeom prst="rect">
             <a:avLst/>
           </a:prstGeom>
           <a:solidFill>
-            <a:srgbClr val="152036"/>
+            <a:srgbClr val="1E3A8A"/>
           </a:solidFill>
           <a:ln>
-            <a:solidFill>
-              <a:srgbClr val="FFFFFF"/>
-            </a:solidFill>
+            <a:noFill/>
           </a:ln>
         </p:spPr>
         <p:style>
@@ -5095,14 +5379,14 @@
       </p:sp>
       <p:sp>
         <p:nvSpPr>
-          <p:cNvPr id="9" name="TextBox 8"/>
+          <p:cNvPr id="5" name="TextBox 4"/>
           <p:cNvSpPr txBox="1"/>
           <p:nvPr/>
         </p:nvSpPr>
         <p:spPr>
           <a:xfrm>
-            <a:off x="6400800" y="1554480"/>
-            <a:ext cx="4846320" cy="4023360"/>
+            <a:off x="731520" y="365760"/>
+            <a:ext cx="9601200" cy="731520"/>
           </a:xfrm>
           <a:prstGeom prst="rect">
             <a:avLst/>
@@ -5116,21 +5400,288 @@
           <a:lstStyle/>
           <a:p>
             <a:pPr>
+              <a:defRPr sz="2600" b="1">
+                <a:solidFill>
+                  <a:srgbClr val="1E3A8A"/>
+                </a:solidFill>
+                <a:latin typeface="Helvetica"/>
+              </a:defRPr>
+            </a:pPr>
+            <a:r>
+              <a:t>Organization &amp; Program Overview</a:t>
+            </a:r>
+          </a:p>
+        </p:txBody>
+      </p:sp>
+      <p:sp>
+        <p:nvSpPr>
+          <p:cNvPr id="6" name="TextBox 5"/>
+          <p:cNvSpPr txBox="1"/>
+          <p:nvPr/>
+        </p:nvSpPr>
+        <p:spPr>
+          <a:xfrm>
+            <a:off x="9601200" y="365760"/>
+            <a:ext cx="1828800" cy="457200"/>
+          </a:xfrm>
+          <a:prstGeom prst="rect">
+            <a:avLst/>
+          </a:prstGeom>
+          <a:noFill/>
+        </p:spPr>
+        <p:txBody>
+          <a:bodyPr wrap="none">
+            <a:spAutoFit/>
+          </a:bodyPr>
+          <a:lstStyle/>
+          <a:p>
+            <a:pPr algn="r">
+              <a:defRPr sz="1300" b="1">
+                <a:solidFill>
+                  <a:srgbClr val="0284C7"/>
+                </a:solidFill>
+              </a:defRPr>
+            </a:pPr>
+            <a:r>
+              <a:t>Slide 02/13</a:t>
+            </a:r>
+          </a:p>
+        </p:txBody>
+      </p:sp>
+      <p:sp>
+        <p:nvSpPr>
+          <p:cNvPr id="7" name="TextBox 6"/>
+          <p:cNvSpPr txBox="1"/>
+          <p:nvPr/>
+        </p:nvSpPr>
+        <p:spPr>
+          <a:xfrm>
+            <a:off x="731520" y="6601968"/>
+            <a:ext cx="10698480" cy="228600"/>
+          </a:xfrm>
+          <a:prstGeom prst="rect">
+            <a:avLst/>
+          </a:prstGeom>
+          <a:noFill/>
+        </p:spPr>
+        <p:txBody>
+          <a:bodyPr wrap="none">
+            <a:spAutoFit/>
+          </a:bodyPr>
+          <a:lstStyle/>
+          <a:p>
+            <a:pPr>
+              <a:defRPr sz="1000">
+                <a:solidFill>
+                  <a:srgbClr val="FFFFFF"/>
+                </a:solidFill>
+              </a:defRPr>
+            </a:pPr>
+            <a:r>
+              <a:t>Sanjana Chirutha (STU ID: STU6817962b86d921746376235)  |  Edunet Foundation  |  AICTE  |  IBM SkillsBuild</a:t>
+            </a:r>
+          </a:p>
+        </p:txBody>
+      </p:sp>
+      <p:sp>
+        <p:nvSpPr>
+          <p:cNvPr id="8" name="Rounded Rectangle 7"/>
+          <p:cNvSpPr/>
+          <p:nvPr/>
+        </p:nvSpPr>
+        <p:spPr>
+          <a:xfrm>
+            <a:off x="731520" y="1371600"/>
+            <a:ext cx="5120640" cy="4754880"/>
+          </a:xfrm>
+          <a:prstGeom prst="roundRect">
+            <a:avLst/>
+          </a:prstGeom>
+          <a:solidFill>
+            <a:srgbClr val="F1F5F9"/>
+          </a:solidFill>
+          <a:ln>
+            <a:solidFill>
+              <a:srgbClr val="CBD5E1"/>
+            </a:solidFill>
+          </a:ln>
+        </p:spPr>
+        <p:style>
+          <a:lnRef idx="1">
+            <a:schemeClr val="accent1"/>
+          </a:lnRef>
+          <a:fillRef idx="3">
+            <a:schemeClr val="accent1"/>
+          </a:fillRef>
+          <a:effectRef idx="2">
+            <a:schemeClr val="accent1"/>
+          </a:effectRef>
+          <a:fontRef idx="minor">
+            <a:schemeClr val="lt1"/>
+          </a:fontRef>
+        </p:style>
+        <p:txBody>
+          <a:bodyPr rtlCol="0" anchor="ctr"/>
+          <a:lstStyle/>
+          <a:p>
+            <a:pPr algn="ctr"/>
+          </a:p>
+        </p:txBody>
+      </p:sp>
+      <p:sp>
+        <p:nvSpPr>
+          <p:cNvPr id="9" name="TextBox 8"/>
+          <p:cNvSpPr txBox="1"/>
+          <p:nvPr/>
+        </p:nvSpPr>
+        <p:spPr>
+          <a:xfrm>
+            <a:off x="914400" y="1554480"/>
+            <a:ext cx="4754880" cy="4389120"/>
+          </a:xfrm>
+          <a:prstGeom prst="rect">
+            <a:avLst/>
+          </a:prstGeom>
+          <a:noFill/>
+        </p:spPr>
+        <p:txBody>
+          <a:bodyPr wrap="square">
+            <a:spAutoFit/>
+          </a:bodyPr>
+          <a:lstStyle/>
+          <a:p>
+            <a:pPr>
               <a:defRPr sz="2000" b="1">
                 <a:solidFill>
-                  <a:srgbClr val="10B981"/>
-                </a:solidFill>
-              </a:defRPr>
-            </a:pPr>
-            <a:r>
-              <a:t>Project Problem &amp; Objectives</a:t>
+                  <a:srgbClr val="1E3A8A"/>
+                </a:solidFill>
+              </a:defRPr>
+            </a:pPr>
+            <a:r>
+              <a:t>Collaborating Bodies</a:t>
             </a:r>
           </a:p>
           <a:p>
             <a:pPr>
-              <a:defRPr sz="1400">
-                <a:solidFill>
-                  <a:srgbClr val="94A3B8"/>
+              <a:defRPr sz="1300">
+                <a:solidFill>
+                  <a:srgbClr val="0F172A"/>
+                </a:solidFill>
+              </a:defRPr>
+            </a:pPr>
+            <a:r>
+              <a:t>• Edunet Foundation: Primary implementing organization leading youth digital skill development.</a:t>
+            </a:r>
+          </a:p>
+          <a:p>
+            <a:pPr>
+              <a:defRPr sz="1300">
+                <a:solidFill>
+                  <a:srgbClr val="0F172A"/>
+                </a:solidFill>
+              </a:defRPr>
+            </a:pPr>
+            <a:r>
+              <a:t>• AICTE (All India Council for Technical Education): Statutory body enabling national technical education standards.</a:t>
+            </a:r>
+          </a:p>
+          <a:p>
+            <a:pPr>
+              <a:defRPr sz="1300">
+                <a:solidFill>
+                  <a:srgbClr val="0F172A"/>
+                </a:solidFill>
+              </a:defRPr>
+            </a:pPr>
+            <a:r>
+              <a:t>• IBM SkillsBuild: Industry technology partner providing practical AI &amp; ML learning workflows.</a:t>
+            </a:r>
+          </a:p>
+        </p:txBody>
+      </p:sp>
+      <p:sp>
+        <p:nvSpPr>
+          <p:cNvPr id="10" name="Rounded Rectangle 9"/>
+          <p:cNvSpPr/>
+          <p:nvPr/>
+        </p:nvSpPr>
+        <p:spPr>
+          <a:xfrm>
+            <a:off x="6217920" y="1371600"/>
+            <a:ext cx="5212080" cy="4754880"/>
+          </a:xfrm>
+          <a:prstGeom prst="roundRect">
+            <a:avLst/>
+          </a:prstGeom>
+          <a:solidFill>
+            <a:srgbClr val="F1F5F9"/>
+          </a:solidFill>
+          <a:ln>
+            <a:solidFill>
+              <a:srgbClr val="CBD5E1"/>
+            </a:solidFill>
+          </a:ln>
+        </p:spPr>
+        <p:style>
+          <a:lnRef idx="1">
+            <a:schemeClr val="accent1"/>
+          </a:lnRef>
+          <a:fillRef idx="3">
+            <a:schemeClr val="accent1"/>
+          </a:fillRef>
+          <a:effectRef idx="2">
+            <a:schemeClr val="accent1"/>
+          </a:effectRef>
+          <a:fontRef idx="minor">
+            <a:schemeClr val="lt1"/>
+          </a:fontRef>
+        </p:style>
+        <p:txBody>
+          <a:bodyPr rtlCol="0" anchor="ctr"/>
+          <a:lstStyle/>
+          <a:p>
+            <a:pPr algn="ctr"/>
+          </a:p>
+        </p:txBody>
+      </p:sp>
+      <p:sp>
+        <p:nvSpPr>
+          <p:cNvPr id="11" name="TextBox 10"/>
+          <p:cNvSpPr txBox="1"/>
+          <p:nvPr/>
+        </p:nvSpPr>
+        <p:spPr>
+          <a:xfrm>
+            <a:off x="6400800" y="1554480"/>
+            <a:ext cx="4846320" cy="4389120"/>
+          </a:xfrm>
+          <a:prstGeom prst="rect">
+            <a:avLst/>
+          </a:prstGeom>
+          <a:noFill/>
+        </p:spPr>
+        <p:txBody>
+          <a:bodyPr wrap="square">
+            <a:spAutoFit/>
+          </a:bodyPr>
+          <a:lstStyle/>
+          <a:p>
+            <a:pPr>
+              <a:defRPr sz="2000" b="1">
+                <a:solidFill>
+                  <a:srgbClr val="1E3A8A"/>
+                </a:solidFill>
+              </a:defRPr>
+            </a:pPr>
+            <a:r>
+              <a:t>Project Objectives</a:t>
+            </a:r>
+          </a:p>
+          <a:p>
+            <a:pPr>
+              <a:defRPr sz="1300">
+                <a:solidFill>
+                  <a:srgbClr val="0F172A"/>
                 </a:solidFill>
               </a:defRPr>
             </a:pPr>
@@ -5140,9 +5691,9 @@
           </a:p>
           <a:p>
             <a:pPr>
-              <a:defRPr sz="1400">
-                <a:solidFill>
-                  <a:srgbClr val="94A3B8"/>
+              <a:defRPr sz="1300">
+                <a:solidFill>
+                  <a:srgbClr val="0F172A"/>
                 </a:solidFill>
               </a:defRPr>
             </a:pPr>
@@ -5152,9 +5703,9 @@
           </a:p>
           <a:p>
             <a:pPr>
-              <a:defRPr sz="1400">
-                <a:solidFill>
-                  <a:srgbClr val="94A3B8"/>
+              <a:defRPr sz="1300">
+                <a:solidFill>
+                  <a:srgbClr val="0F172A"/>
                 </a:solidFill>
               </a:defRPr>
             </a:pPr>
@@ -5197,7 +5748,7 @@
             <a:avLst/>
           </a:prstGeom>
           <a:solidFill>
-            <a:srgbClr val="090D16"/>
+            <a:srgbClr val="F8FAFC"/>
           </a:solidFill>
           <a:ln>
             <a:noFill/>
@@ -5227,131 +5778,23 @@
       </p:sp>
       <p:sp>
         <p:nvSpPr>
-          <p:cNvPr id="3" name="TextBox 2"/>
-          <p:cNvSpPr txBox="1"/>
-          <p:nvPr/>
-        </p:nvSpPr>
-        <p:spPr>
-          <a:xfrm>
-            <a:off x="731520" y="365760"/>
-            <a:ext cx="10698480" cy="731520"/>
-          </a:xfrm>
-          <a:prstGeom prst="rect">
-            <a:avLst/>
-          </a:prstGeom>
-          <a:noFill/>
-        </p:spPr>
-        <p:txBody>
-          <a:bodyPr wrap="square">
-            <a:spAutoFit/>
-          </a:bodyPr>
-          <a:lstStyle/>
-          <a:p>
-            <a:pPr>
-              <a:defRPr sz="2600" b="1">
-                <a:solidFill>
-                  <a:srgbClr val="F8FAFC"/>
-                </a:solidFill>
-                <a:latin typeface="Arial"/>
-              </a:defRPr>
-            </a:pPr>
-            <a:r>
-              <a:t>Key Features &amp; Core Modules</a:t>
-            </a:r>
-          </a:p>
-        </p:txBody>
-      </p:sp>
-      <p:sp>
-        <p:nvSpPr>
-          <p:cNvPr id="4" name="TextBox 3"/>
-          <p:cNvSpPr txBox="1"/>
-          <p:nvPr/>
-        </p:nvSpPr>
-        <p:spPr>
-          <a:xfrm>
-            <a:off x="9601200" y="365760"/>
-            <a:ext cx="1828800" cy="457200"/>
-          </a:xfrm>
-          <a:prstGeom prst="rect">
-            <a:avLst/>
-          </a:prstGeom>
-          <a:noFill/>
-        </p:spPr>
-        <p:txBody>
-          <a:bodyPr wrap="none">
-            <a:spAutoFit/>
-          </a:bodyPr>
-          <a:lstStyle/>
-          <a:p>
-            <a:pPr algn="r">
-              <a:defRPr sz="1300" b="1">
-                <a:solidFill>
-                  <a:srgbClr val="6366F1"/>
-                </a:solidFill>
-              </a:defRPr>
-            </a:pPr>
-            <a:r>
-              <a:t>Slide 03/13</a:t>
-            </a:r>
-          </a:p>
-        </p:txBody>
-      </p:sp>
-      <p:sp>
-        <p:nvSpPr>
-          <p:cNvPr id="5" name="TextBox 4"/>
-          <p:cNvSpPr txBox="1"/>
-          <p:nvPr/>
-        </p:nvSpPr>
-        <p:spPr>
-          <a:xfrm>
-            <a:off x="731520" y="6309360"/>
-            <a:ext cx="10698480" cy="365760"/>
-          </a:xfrm>
-          <a:prstGeom prst="rect">
-            <a:avLst/>
-          </a:prstGeom>
-          <a:noFill/>
-        </p:spPr>
-        <p:txBody>
-          <a:bodyPr wrap="none">
-            <a:spAutoFit/>
-          </a:bodyPr>
-          <a:lstStyle/>
-          <a:p>
-            <a:pPr>
-              <a:defRPr sz="1000">
-                <a:solidFill>
-                  <a:srgbClr val="94A3B8"/>
-                </a:solidFill>
-              </a:defRPr>
-            </a:pPr>
-            <a:r>
-              <a:t>Sanjana Chirutha (STU ID: STU6817962b86d921746376235)  |  Edunet Foundation  |  AICTE  |  IBM SkillsBuild</a:t>
-            </a:r>
-          </a:p>
-        </p:txBody>
-      </p:sp>
-      <p:sp>
-        <p:nvSpPr>
-          <p:cNvPr id="6" name="Rounded Rectangle 5"/>
+          <p:cNvPr id="3" name="Rectangle 2"/>
           <p:cNvSpPr/>
           <p:nvPr/>
         </p:nvSpPr>
         <p:spPr>
           <a:xfrm>
-            <a:off x="731520" y="1371600"/>
-            <a:ext cx="10698480" cy="822960"/>
-          </a:xfrm>
-          <a:prstGeom prst="roundRect">
+            <a:off x="0" y="0"/>
+            <a:ext cx="365760" cy="6858000"/>
+          </a:xfrm>
+          <a:prstGeom prst="rect">
             <a:avLst/>
           </a:prstGeom>
           <a:solidFill>
-            <a:srgbClr val="152036"/>
+            <a:srgbClr val="0284C7"/>
           </a:solidFill>
           <a:ln>
-            <a:solidFill>
-              <a:srgbClr val="FFFFFF"/>
-            </a:solidFill>
+            <a:noFill/>
           </a:ln>
         </p:spPr>
         <p:style>
@@ -5378,66 +5821,23 @@
       </p:sp>
       <p:sp>
         <p:nvSpPr>
-          <p:cNvPr id="7" name="TextBox 6"/>
-          <p:cNvSpPr txBox="1"/>
-          <p:nvPr/>
-        </p:nvSpPr>
-        <p:spPr>
-          <a:xfrm>
-            <a:off x="914400" y="1463040"/>
-            <a:ext cx="10332720" cy="640080"/>
-          </a:xfrm>
-          <a:prstGeom prst="rect">
-            <a:avLst/>
-          </a:prstGeom>
-          <a:noFill/>
-        </p:spPr>
-        <p:txBody>
-          <a:bodyPr wrap="square">
-            <a:spAutoFit/>
-          </a:bodyPr>
-          <a:lstStyle/>
-          <a:p>
-            <a:r>
-              <a:rPr b="1" sz="1600">
-                <a:solidFill>
-                  <a:srgbClr val="10B981"/>
-                </a:solidFill>
-              </a:rPr>
-              <a:t>Interactive Predictor: </a:t>
-            </a:r>
-            <a:r>
-              <a:rPr sz="1400">
-                <a:solidFill>
-                  <a:srgbClr val="F8FAFC"/>
-                </a:solidFill>
-              </a:rPr>
-              <a:t>Dynamic slider and dropdown controls with instant prediction updates (&lt;15 ms latency).</a:t>
-            </a:r>
-          </a:p>
-        </p:txBody>
-      </p:sp>
-      <p:sp>
-        <p:nvSpPr>
-          <p:cNvPr id="8" name="Rounded Rectangle 7"/>
+          <p:cNvPr id="4" name="Rectangle 3"/>
           <p:cNvSpPr/>
           <p:nvPr/>
         </p:nvSpPr>
         <p:spPr>
           <a:xfrm>
-            <a:off x="731520" y="2331720"/>
-            <a:ext cx="10698480" cy="822960"/>
-          </a:xfrm>
-          <a:prstGeom prst="roundRect">
+            <a:off x="365760" y="6583680"/>
+            <a:ext cx="11825935" cy="274320"/>
+          </a:xfrm>
+          <a:prstGeom prst="rect">
             <a:avLst/>
           </a:prstGeom>
           <a:solidFill>
-            <a:srgbClr val="152036"/>
+            <a:srgbClr val="1E3A8A"/>
           </a:solidFill>
           <a:ln>
-            <a:solidFill>
-              <a:srgbClr val="FFFFFF"/>
-            </a:solidFill>
+            <a:noFill/>
           </a:ln>
         </p:spPr>
         <p:style>
@@ -5464,14 +5864,14 @@
       </p:sp>
       <p:sp>
         <p:nvSpPr>
-          <p:cNvPr id="9" name="TextBox 8"/>
+          <p:cNvPr id="5" name="TextBox 4"/>
           <p:cNvSpPr txBox="1"/>
           <p:nvPr/>
         </p:nvSpPr>
         <p:spPr>
           <a:xfrm>
-            <a:off x="914400" y="2423160"/>
-            <a:ext cx="10332720" cy="640080"/>
+            <a:off x="731520" y="365760"/>
+            <a:ext cx="9601200" cy="731520"/>
           </a:xfrm>
           <a:prstGeom prst="rect">
             <a:avLst/>
@@ -5484,45 +5884,110 @@
           </a:bodyPr>
           <a:lstStyle/>
           <a:p>
-            <a:r>
-              <a:rPr b="1" sz="1600">
-                <a:solidFill>
-                  <a:srgbClr val="10B981"/>
-                </a:solidFill>
-              </a:rPr>
-              <a:t>SHAP Attribution: </a:t>
-            </a:r>
-            <a:r>
-              <a:rPr sz="1400">
-                <a:solidFill>
-                  <a:srgbClr val="F8FAFC"/>
-                </a:solidFill>
-              </a:rPr>
-              <a:t>Visual breakdown showing exact monetary additions (+) or deductions (-) relative to baseline.</a:t>
-            </a:r>
-          </a:p>
-        </p:txBody>
-      </p:sp>
-      <p:sp>
-        <p:nvSpPr>
-          <p:cNvPr id="10" name="Rounded Rectangle 9"/>
+            <a:pPr>
+              <a:defRPr sz="2600" b="1">
+                <a:solidFill>
+                  <a:srgbClr val="1E3A8A"/>
+                </a:solidFill>
+                <a:latin typeface="Helvetica"/>
+              </a:defRPr>
+            </a:pPr>
+            <a:r>
+              <a:t>Key Features &amp; Core Modules</a:t>
+            </a:r>
+          </a:p>
+        </p:txBody>
+      </p:sp>
+      <p:sp>
+        <p:nvSpPr>
+          <p:cNvPr id="6" name="TextBox 5"/>
+          <p:cNvSpPr txBox="1"/>
+          <p:nvPr/>
+        </p:nvSpPr>
+        <p:spPr>
+          <a:xfrm>
+            <a:off x="9601200" y="365760"/>
+            <a:ext cx="1828800" cy="457200"/>
+          </a:xfrm>
+          <a:prstGeom prst="rect">
+            <a:avLst/>
+          </a:prstGeom>
+          <a:noFill/>
+        </p:spPr>
+        <p:txBody>
+          <a:bodyPr wrap="none">
+            <a:spAutoFit/>
+          </a:bodyPr>
+          <a:lstStyle/>
+          <a:p>
+            <a:pPr algn="r">
+              <a:defRPr sz="1300" b="1">
+                <a:solidFill>
+                  <a:srgbClr val="0284C7"/>
+                </a:solidFill>
+              </a:defRPr>
+            </a:pPr>
+            <a:r>
+              <a:t>Slide 03/13</a:t>
+            </a:r>
+          </a:p>
+        </p:txBody>
+      </p:sp>
+      <p:sp>
+        <p:nvSpPr>
+          <p:cNvPr id="7" name="TextBox 6"/>
+          <p:cNvSpPr txBox="1"/>
+          <p:nvPr/>
+        </p:nvSpPr>
+        <p:spPr>
+          <a:xfrm>
+            <a:off x="731520" y="6601968"/>
+            <a:ext cx="10698480" cy="228600"/>
+          </a:xfrm>
+          <a:prstGeom prst="rect">
+            <a:avLst/>
+          </a:prstGeom>
+          <a:noFill/>
+        </p:spPr>
+        <p:txBody>
+          <a:bodyPr wrap="none">
+            <a:spAutoFit/>
+          </a:bodyPr>
+          <a:lstStyle/>
+          <a:p>
+            <a:pPr>
+              <a:defRPr sz="1000">
+                <a:solidFill>
+                  <a:srgbClr val="FFFFFF"/>
+                </a:solidFill>
+              </a:defRPr>
+            </a:pPr>
+            <a:r>
+              <a:t>Sanjana Chirutha (STU ID: STU6817962b86d921746376235)  |  Edunet Foundation  |  AICTE  |  IBM SkillsBuild</a:t>
+            </a:r>
+          </a:p>
+        </p:txBody>
+      </p:sp>
+      <p:sp>
+        <p:nvSpPr>
+          <p:cNvPr id="8" name="Rounded Rectangle 7"/>
           <p:cNvSpPr/>
           <p:nvPr/>
         </p:nvSpPr>
         <p:spPr>
           <a:xfrm>
-            <a:off x="731520" y="3291839"/>
-            <a:ext cx="10698480" cy="822960"/>
+            <a:off x="731520" y="1371600"/>
+            <a:ext cx="10698480" cy="868680"/>
           </a:xfrm>
           <a:prstGeom prst="roundRect">
             <a:avLst/>
           </a:prstGeom>
           <a:solidFill>
-            <a:srgbClr val="152036"/>
+            <a:srgbClr val="F1F5F9"/>
           </a:solidFill>
           <a:ln>
             <a:solidFill>
-              <a:srgbClr val="FFFFFF"/>
+              <a:srgbClr val="CBD5E1"/>
             </a:solidFill>
           </a:ln>
         </p:spPr>
@@ -5550,14 +6015,14 @@
       </p:sp>
       <p:sp>
         <p:nvSpPr>
-          <p:cNvPr id="11" name="TextBox 10"/>
+          <p:cNvPr id="9" name="TextBox 8"/>
           <p:cNvSpPr txBox="1"/>
           <p:nvPr/>
         </p:nvSpPr>
         <p:spPr>
           <a:xfrm>
-            <a:off x="914400" y="3383279"/>
-            <a:ext cx="10332720" cy="640080"/>
+            <a:off x="914400" y="1463040"/>
+            <a:ext cx="10332720" cy="685800"/>
           </a:xfrm>
           <a:prstGeom prst="rect">
             <a:avLst/>
@@ -5571,44 +6036,44 @@
           <a:lstStyle/>
           <a:p>
             <a:r>
-              <a:rPr b="1" sz="1600">
-                <a:solidFill>
-                  <a:srgbClr val="10B981"/>
+              <a:rPr b="1" sz="1500">
+                <a:solidFill>
+                  <a:srgbClr val="1E3A8A"/>
                 </a:solidFill>
               </a:rPr>
-              <a:t>Career Optimizer: </a:t>
-            </a:r>
-            <a:r>
-              <a:rPr sz="1400">
-                <a:solidFill>
-                  <a:srgbClr val="F8FAFC"/>
+              <a:t>Interactive Predictor: </a:t>
+            </a:r>
+            <a:r>
+              <a:rPr sz="1300">
+                <a:solidFill>
+                  <a:srgbClr val="0F172A"/>
                 </a:solidFill>
               </a:rPr>
-              <a:t>AI sensitivity recommendations engine providing actionable advice to boost earning potential.</a:t>
-            </a:r>
-          </a:p>
-        </p:txBody>
-      </p:sp>
-      <p:sp>
-        <p:nvSpPr>
-          <p:cNvPr id="12" name="Rounded Rectangle 11"/>
+              <a:t>Dynamic slider and dropdown controls with instant prediction updates (&lt;15 ms latency).</a:t>
+            </a:r>
+          </a:p>
+        </p:txBody>
+      </p:sp>
+      <p:sp>
+        <p:nvSpPr>
+          <p:cNvPr id="10" name="Rounded Rectangle 9"/>
           <p:cNvSpPr/>
           <p:nvPr/>
         </p:nvSpPr>
         <p:spPr>
           <a:xfrm>
-            <a:off x="731520" y="4251959"/>
-            <a:ext cx="10698480" cy="822960"/>
+            <a:off x="731520" y="2359152"/>
+            <a:ext cx="10698480" cy="868680"/>
           </a:xfrm>
           <a:prstGeom prst="roundRect">
             <a:avLst/>
           </a:prstGeom>
           <a:solidFill>
-            <a:srgbClr val="152036"/>
+            <a:srgbClr val="F1F5F9"/>
           </a:solidFill>
           <a:ln>
             <a:solidFill>
-              <a:srgbClr val="FFFFFF"/>
+              <a:srgbClr val="CBD5E1"/>
             </a:solidFill>
           </a:ln>
         </p:spPr>
@@ -5636,14 +6101,14 @@
       </p:sp>
       <p:sp>
         <p:nvSpPr>
-          <p:cNvPr id="13" name="TextBox 12"/>
+          <p:cNvPr id="11" name="TextBox 10"/>
           <p:cNvSpPr txBox="1"/>
           <p:nvPr/>
         </p:nvSpPr>
         <p:spPr>
           <a:xfrm>
-            <a:off x="914400" y="4343399"/>
-            <a:ext cx="10332720" cy="640080"/>
+            <a:off x="914400" y="2450592"/>
+            <a:ext cx="10332720" cy="685800"/>
           </a:xfrm>
           <a:prstGeom prst="rect">
             <a:avLst/>
@@ -5657,44 +6122,44 @@
           <a:lstStyle/>
           <a:p>
             <a:r>
-              <a:rPr b="1" sz="1600">
-                <a:solidFill>
-                  <a:srgbClr val="10B981"/>
+              <a:rPr b="1" sz="1500">
+                <a:solidFill>
+                  <a:srgbClr val="1E3A8A"/>
                 </a:solidFill>
               </a:rPr>
-              <a:t>Batch CSV Processing: </a:t>
-            </a:r>
-            <a:r>
-              <a:rPr sz="1400">
-                <a:solidFill>
-                  <a:srgbClr val="F8FAFC"/>
+              <a:t>SHAP Attribution: </a:t>
+            </a:r>
+            <a:r>
+              <a:rPr sz="1300">
+                <a:solidFill>
+                  <a:srgbClr val="0F172A"/>
                 </a:solidFill>
               </a:rPr>
-              <a:t>Bulk upload employee records via drag-and-drop CSV parser with downloadable results.</a:t>
-            </a:r>
-          </a:p>
-        </p:txBody>
-      </p:sp>
-      <p:sp>
-        <p:nvSpPr>
-          <p:cNvPr id="14" name="Rounded Rectangle 13"/>
+              <a:t>Visual breakdown showing exact monetary additions (+) or deductions (-) relative to baseline.</a:t>
+            </a:r>
+          </a:p>
+        </p:txBody>
+      </p:sp>
+      <p:sp>
+        <p:nvSpPr>
+          <p:cNvPr id="12" name="Rounded Rectangle 11"/>
           <p:cNvSpPr/>
           <p:nvPr/>
         </p:nvSpPr>
         <p:spPr>
           <a:xfrm>
-            <a:off x="731520" y="5212079"/>
-            <a:ext cx="10698480" cy="822960"/>
+            <a:off x="731520" y="3346704"/>
+            <a:ext cx="10698480" cy="868680"/>
           </a:xfrm>
           <a:prstGeom prst="roundRect">
             <a:avLst/>
           </a:prstGeom>
           <a:solidFill>
-            <a:srgbClr val="152036"/>
+            <a:srgbClr val="F1F5F9"/>
           </a:solidFill>
           <a:ln>
             <a:solidFill>
-              <a:srgbClr val="FFFFFF"/>
+              <a:srgbClr val="CBD5E1"/>
             </a:solidFill>
           </a:ln>
         </p:spPr>
@@ -5722,14 +6187,14 @@
       </p:sp>
       <p:sp>
         <p:nvSpPr>
-          <p:cNvPr id="15" name="TextBox 14"/>
+          <p:cNvPr id="13" name="TextBox 12"/>
           <p:cNvSpPr txBox="1"/>
           <p:nvPr/>
         </p:nvSpPr>
         <p:spPr>
           <a:xfrm>
-            <a:off x="914400" y="5303519"/>
-            <a:ext cx="10332720" cy="640080"/>
+            <a:off x="914400" y="3438144"/>
+            <a:ext cx="10332720" cy="685800"/>
           </a:xfrm>
           <a:prstGeom prst="rect">
             <a:avLst/>
@@ -5743,17 +6208,189 @@
           <a:lstStyle/>
           <a:p>
             <a:r>
-              <a:rPr b="1" sz="1600">
-                <a:solidFill>
-                  <a:srgbClr val="10B981"/>
+              <a:rPr b="1" sz="1500">
+                <a:solidFill>
+                  <a:srgbClr val="1E3A8A"/>
+                </a:solidFill>
+              </a:rPr>
+              <a:t>Career Optimizer: </a:t>
+            </a:r>
+            <a:r>
+              <a:rPr sz="1300">
+                <a:solidFill>
+                  <a:srgbClr val="0F172A"/>
+                </a:solidFill>
+              </a:rPr>
+              <a:t>AI sensitivity recommendations engine providing actionable advice to boost earning potential.</a:t>
+            </a:r>
+          </a:p>
+        </p:txBody>
+      </p:sp>
+      <p:sp>
+        <p:nvSpPr>
+          <p:cNvPr id="14" name="Rounded Rectangle 13"/>
+          <p:cNvSpPr/>
+          <p:nvPr/>
+        </p:nvSpPr>
+        <p:spPr>
+          <a:xfrm>
+            <a:off x="731520" y="4334256"/>
+            <a:ext cx="10698480" cy="868680"/>
+          </a:xfrm>
+          <a:prstGeom prst="roundRect">
+            <a:avLst/>
+          </a:prstGeom>
+          <a:solidFill>
+            <a:srgbClr val="F1F5F9"/>
+          </a:solidFill>
+          <a:ln>
+            <a:solidFill>
+              <a:srgbClr val="CBD5E1"/>
+            </a:solidFill>
+          </a:ln>
+        </p:spPr>
+        <p:style>
+          <a:lnRef idx="1">
+            <a:schemeClr val="accent1"/>
+          </a:lnRef>
+          <a:fillRef idx="3">
+            <a:schemeClr val="accent1"/>
+          </a:fillRef>
+          <a:effectRef idx="2">
+            <a:schemeClr val="accent1"/>
+          </a:effectRef>
+          <a:fontRef idx="minor">
+            <a:schemeClr val="lt1"/>
+          </a:fontRef>
+        </p:style>
+        <p:txBody>
+          <a:bodyPr rtlCol="0" anchor="ctr"/>
+          <a:lstStyle/>
+          <a:p>
+            <a:pPr algn="ctr"/>
+          </a:p>
+        </p:txBody>
+      </p:sp>
+      <p:sp>
+        <p:nvSpPr>
+          <p:cNvPr id="15" name="TextBox 14"/>
+          <p:cNvSpPr txBox="1"/>
+          <p:nvPr/>
+        </p:nvSpPr>
+        <p:spPr>
+          <a:xfrm>
+            <a:off x="914400" y="4425696"/>
+            <a:ext cx="10332720" cy="685800"/>
+          </a:xfrm>
+          <a:prstGeom prst="rect">
+            <a:avLst/>
+          </a:prstGeom>
+          <a:noFill/>
+        </p:spPr>
+        <p:txBody>
+          <a:bodyPr wrap="square">
+            <a:spAutoFit/>
+          </a:bodyPr>
+          <a:lstStyle/>
+          <a:p>
+            <a:r>
+              <a:rPr b="1" sz="1500">
+                <a:solidFill>
+                  <a:srgbClr val="1E3A8A"/>
+                </a:solidFill>
+              </a:rPr>
+              <a:t>Batch CSV Processing: </a:t>
+            </a:r>
+            <a:r>
+              <a:rPr sz="1300">
+                <a:solidFill>
+                  <a:srgbClr val="0F172A"/>
+                </a:solidFill>
+              </a:rPr>
+              <a:t>Bulk upload employee records via drag-and-drop CSV parser with downloadable results.</a:t>
+            </a:r>
+          </a:p>
+        </p:txBody>
+      </p:sp>
+      <p:sp>
+        <p:nvSpPr>
+          <p:cNvPr id="16" name="Rounded Rectangle 15"/>
+          <p:cNvSpPr/>
+          <p:nvPr/>
+        </p:nvSpPr>
+        <p:spPr>
+          <a:xfrm>
+            <a:off x="731520" y="5321808"/>
+            <a:ext cx="10698480" cy="868680"/>
+          </a:xfrm>
+          <a:prstGeom prst="roundRect">
+            <a:avLst/>
+          </a:prstGeom>
+          <a:solidFill>
+            <a:srgbClr val="F1F5F9"/>
+          </a:solidFill>
+          <a:ln>
+            <a:solidFill>
+              <a:srgbClr val="CBD5E1"/>
+            </a:solidFill>
+          </a:ln>
+        </p:spPr>
+        <p:style>
+          <a:lnRef idx="1">
+            <a:schemeClr val="accent1"/>
+          </a:lnRef>
+          <a:fillRef idx="3">
+            <a:schemeClr val="accent1"/>
+          </a:fillRef>
+          <a:effectRef idx="2">
+            <a:schemeClr val="accent1"/>
+          </a:effectRef>
+          <a:fontRef idx="minor">
+            <a:schemeClr val="lt1"/>
+          </a:fontRef>
+        </p:style>
+        <p:txBody>
+          <a:bodyPr rtlCol="0" anchor="ctr"/>
+          <a:lstStyle/>
+          <a:p>
+            <a:pPr algn="ctr"/>
+          </a:p>
+        </p:txBody>
+      </p:sp>
+      <p:sp>
+        <p:nvSpPr>
+          <p:cNvPr id="17" name="TextBox 16"/>
+          <p:cNvSpPr txBox="1"/>
+          <p:nvPr/>
+        </p:nvSpPr>
+        <p:spPr>
+          <a:xfrm>
+            <a:off x="914400" y="5413248"/>
+            <a:ext cx="10332720" cy="685800"/>
+          </a:xfrm>
+          <a:prstGeom prst="rect">
+            <a:avLst/>
+          </a:prstGeom>
+          <a:noFill/>
+        </p:spPr>
+        <p:txBody>
+          <a:bodyPr wrap="square">
+            <a:spAutoFit/>
+          </a:bodyPr>
+          <a:lstStyle/>
+          <a:p>
+            <a:r>
+              <a:rPr b="1" sz="1500">
+                <a:solidFill>
+                  <a:srgbClr val="1E3A8A"/>
                 </a:solidFill>
               </a:rPr>
               <a:t>Multi-Currency: </a:t>
             </a:r>
             <a:r>
-              <a:rPr sz="1400">
-                <a:solidFill>
-                  <a:srgbClr val="F8FAFC"/>
+              <a:rPr sz="1300">
+                <a:solidFill>
+                  <a:srgbClr val="0F172A"/>
                 </a:solidFill>
               </a:rPr>
               <a:t>Live currency conversion supporting USD ($), EUR (€), GBP (£), and INR (₹).</a:t>
@@ -5794,7 +6431,7 @@
             <a:avLst/>
           </a:prstGeom>
           <a:solidFill>
-            <a:srgbClr val="090D16"/>
+            <a:srgbClr val="F8FAFC"/>
           </a:solidFill>
           <a:ln>
             <a:noFill/>
@@ -5824,131 +6461,23 @@
       </p:sp>
       <p:sp>
         <p:nvSpPr>
-          <p:cNvPr id="3" name="TextBox 2"/>
-          <p:cNvSpPr txBox="1"/>
-          <p:nvPr/>
-        </p:nvSpPr>
-        <p:spPr>
-          <a:xfrm>
-            <a:off x="731520" y="365760"/>
-            <a:ext cx="10698480" cy="731520"/>
-          </a:xfrm>
-          <a:prstGeom prst="rect">
-            <a:avLst/>
-          </a:prstGeom>
-          <a:noFill/>
-        </p:spPr>
-        <p:txBody>
-          <a:bodyPr wrap="square">
-            <a:spAutoFit/>
-          </a:bodyPr>
-          <a:lstStyle/>
-          <a:p>
-            <a:pPr>
-              <a:defRPr sz="2600" b="1">
-                <a:solidFill>
-                  <a:srgbClr val="F8FAFC"/>
-                </a:solidFill>
-                <a:latin typeface="Arial"/>
-              </a:defRPr>
-            </a:pPr>
-            <a:r>
-              <a:t>Machine Learning Pipeline &amp; Preprocessing</a:t>
-            </a:r>
-          </a:p>
-        </p:txBody>
-      </p:sp>
-      <p:sp>
-        <p:nvSpPr>
-          <p:cNvPr id="4" name="TextBox 3"/>
-          <p:cNvSpPr txBox="1"/>
-          <p:nvPr/>
-        </p:nvSpPr>
-        <p:spPr>
-          <a:xfrm>
-            <a:off x="9601200" y="365760"/>
-            <a:ext cx="1828800" cy="457200"/>
-          </a:xfrm>
-          <a:prstGeom prst="rect">
-            <a:avLst/>
-          </a:prstGeom>
-          <a:noFill/>
-        </p:spPr>
-        <p:txBody>
-          <a:bodyPr wrap="none">
-            <a:spAutoFit/>
-          </a:bodyPr>
-          <a:lstStyle/>
-          <a:p>
-            <a:pPr algn="r">
-              <a:defRPr sz="1300" b="1">
-                <a:solidFill>
-                  <a:srgbClr val="6366F1"/>
-                </a:solidFill>
-              </a:defRPr>
-            </a:pPr>
-            <a:r>
-              <a:t>Slide 04/13</a:t>
-            </a:r>
-          </a:p>
-        </p:txBody>
-      </p:sp>
-      <p:sp>
-        <p:nvSpPr>
-          <p:cNvPr id="5" name="TextBox 4"/>
-          <p:cNvSpPr txBox="1"/>
-          <p:nvPr/>
-        </p:nvSpPr>
-        <p:spPr>
-          <a:xfrm>
-            <a:off x="731520" y="6309360"/>
-            <a:ext cx="10698480" cy="365760"/>
-          </a:xfrm>
-          <a:prstGeom prst="rect">
-            <a:avLst/>
-          </a:prstGeom>
-          <a:noFill/>
-        </p:spPr>
-        <p:txBody>
-          <a:bodyPr wrap="none">
-            <a:spAutoFit/>
-          </a:bodyPr>
-          <a:lstStyle/>
-          <a:p>
-            <a:pPr>
-              <a:defRPr sz="1000">
-                <a:solidFill>
-                  <a:srgbClr val="94A3B8"/>
-                </a:solidFill>
-              </a:defRPr>
-            </a:pPr>
-            <a:r>
-              <a:t>Sanjana Chirutha (STU ID: STU6817962b86d921746376235)  |  Edunet Foundation  |  AICTE  |  IBM SkillsBuild</a:t>
-            </a:r>
-          </a:p>
-        </p:txBody>
-      </p:sp>
-      <p:sp>
-        <p:nvSpPr>
-          <p:cNvPr id="6" name="Rounded Rectangle 5"/>
+          <p:cNvPr id="3" name="Rectangle 2"/>
           <p:cNvSpPr/>
           <p:nvPr/>
         </p:nvSpPr>
         <p:spPr>
           <a:xfrm>
-            <a:off x="731520" y="1463040"/>
-            <a:ext cx="1920240" cy="4114800"/>
-          </a:xfrm>
-          <a:prstGeom prst="roundRect">
+            <a:off x="0" y="0"/>
+            <a:ext cx="365760" cy="6858000"/>
+          </a:xfrm>
+          <a:prstGeom prst="rect">
             <a:avLst/>
           </a:prstGeom>
           <a:solidFill>
-            <a:srgbClr val="152036"/>
+            <a:srgbClr val="0284C7"/>
           </a:solidFill>
           <a:ln>
-            <a:solidFill>
-              <a:srgbClr val="FFFFFF"/>
-            </a:solidFill>
+            <a:noFill/>
           </a:ln>
         </p:spPr>
         <p:style>
@@ -5975,72 +6504,23 @@
       </p:sp>
       <p:sp>
         <p:nvSpPr>
-          <p:cNvPr id="7" name="TextBox 6"/>
-          <p:cNvSpPr txBox="1"/>
-          <p:nvPr/>
-        </p:nvSpPr>
-        <p:spPr>
-          <a:xfrm>
-            <a:off x="822960" y="1645920"/>
-            <a:ext cx="1737360" cy="3749039"/>
-          </a:xfrm>
-          <a:prstGeom prst="rect">
-            <a:avLst/>
-          </a:prstGeom>
-          <a:noFill/>
-        </p:spPr>
-        <p:txBody>
-          <a:bodyPr wrap="square">
-            <a:spAutoFit/>
-          </a:bodyPr>
-          <a:lstStyle/>
-          <a:p>
-            <a:pPr>
-              <a:defRPr sz="1600" b="1">
-                <a:solidFill>
-                  <a:srgbClr val="6366F1"/>
-                </a:solidFill>
-              </a:defRPr>
-            </a:pPr>
-            <a:r>
-              <a:t>01. Ingestion</a:t>
-            </a:r>
-          </a:p>
-          <a:p>
-            <a:pPr>
-              <a:defRPr sz="1300">
-                <a:solidFill>
-                  <a:srgbClr val="94A3B8"/>
-                </a:solidFill>
-              </a:defRPr>
-            </a:pPr>
-            <a:r>
-              <a:t>10,000+ Cleaned Profiles from UCI &amp; BLS Benchmarks</a:t>
-            </a:r>
-          </a:p>
-        </p:txBody>
-      </p:sp>
-      <p:sp>
-        <p:nvSpPr>
-          <p:cNvPr id="8" name="Rounded Rectangle 7"/>
+          <p:cNvPr id="4" name="Rectangle 3"/>
           <p:cNvSpPr/>
           <p:nvPr/>
         </p:nvSpPr>
         <p:spPr>
           <a:xfrm>
-            <a:off x="2926080" y="1463040"/>
-            <a:ext cx="1920240" cy="4114800"/>
-          </a:xfrm>
-          <a:prstGeom prst="roundRect">
+            <a:off x="365760" y="6583680"/>
+            <a:ext cx="11825935" cy="274320"/>
+          </a:xfrm>
+          <a:prstGeom prst="rect">
             <a:avLst/>
           </a:prstGeom>
           <a:solidFill>
-            <a:srgbClr val="152036"/>
+            <a:srgbClr val="1E3A8A"/>
           </a:solidFill>
           <a:ln>
-            <a:solidFill>
-              <a:srgbClr val="FFFFFF"/>
-            </a:solidFill>
+            <a:noFill/>
           </a:ln>
         </p:spPr>
         <p:style>
@@ -6067,14 +6547,14 @@
       </p:sp>
       <p:sp>
         <p:nvSpPr>
-          <p:cNvPr id="9" name="TextBox 8"/>
+          <p:cNvPr id="5" name="TextBox 4"/>
           <p:cNvSpPr txBox="1"/>
           <p:nvPr/>
         </p:nvSpPr>
         <p:spPr>
           <a:xfrm>
-            <a:off x="3017520" y="1645920"/>
-            <a:ext cx="1737360" cy="3749039"/>
+            <a:off x="731520" y="365760"/>
+            <a:ext cx="9601200" cy="731520"/>
           </a:xfrm>
           <a:prstGeom prst="rect">
             <a:avLst/>
@@ -6088,50 +6568,109 @@
           <a:lstStyle/>
           <a:p>
             <a:pPr>
-              <a:defRPr sz="1600" b="1">
-                <a:solidFill>
-                  <a:srgbClr val="6366F1"/>
-                </a:solidFill>
-              </a:defRPr>
-            </a:pPr>
-            <a:r>
-              <a:t>02. Encoding</a:t>
-            </a:r>
-          </a:p>
+              <a:defRPr sz="2600" b="1">
+                <a:solidFill>
+                  <a:srgbClr val="1E3A8A"/>
+                </a:solidFill>
+                <a:latin typeface="Helvetica"/>
+              </a:defRPr>
+            </a:pPr>
+            <a:r>
+              <a:t>Machine Learning Pipeline &amp; Preprocessing</a:t>
+            </a:r>
+          </a:p>
+        </p:txBody>
+      </p:sp>
+      <p:sp>
+        <p:nvSpPr>
+          <p:cNvPr id="6" name="TextBox 5"/>
+          <p:cNvSpPr txBox="1"/>
+          <p:nvPr/>
+        </p:nvSpPr>
+        <p:spPr>
+          <a:xfrm>
+            <a:off x="9601200" y="365760"/>
+            <a:ext cx="1828800" cy="457200"/>
+          </a:xfrm>
+          <a:prstGeom prst="rect">
+            <a:avLst/>
+          </a:prstGeom>
+          <a:noFill/>
+        </p:spPr>
+        <p:txBody>
+          <a:bodyPr wrap="none">
+            <a:spAutoFit/>
+          </a:bodyPr>
+          <a:lstStyle/>
+          <a:p>
+            <a:pPr algn="r">
+              <a:defRPr sz="1300" b="1">
+                <a:solidFill>
+                  <a:srgbClr val="0284C7"/>
+                </a:solidFill>
+              </a:defRPr>
+            </a:pPr>
+            <a:r>
+              <a:t>Slide 04/13</a:t>
+            </a:r>
+          </a:p>
+        </p:txBody>
+      </p:sp>
+      <p:sp>
+        <p:nvSpPr>
+          <p:cNvPr id="7" name="TextBox 6"/>
+          <p:cNvSpPr txBox="1"/>
+          <p:nvPr/>
+        </p:nvSpPr>
+        <p:spPr>
+          <a:xfrm>
+            <a:off x="731520" y="6601968"/>
+            <a:ext cx="10698480" cy="228600"/>
+          </a:xfrm>
+          <a:prstGeom prst="rect">
+            <a:avLst/>
+          </a:prstGeom>
+          <a:noFill/>
+        </p:spPr>
+        <p:txBody>
+          <a:bodyPr wrap="none">
+            <a:spAutoFit/>
+          </a:bodyPr>
+          <a:lstStyle/>
           <a:p>
             <a:pPr>
-              <a:defRPr sz="1300">
-                <a:solidFill>
-                  <a:srgbClr val="94A3B8"/>
-                </a:solidFill>
-              </a:defRPr>
-            </a:pPr>
-            <a:r>
-              <a:t>LabelEncoder for Categoricals (Education, Occupation, Region)</a:t>
-            </a:r>
-          </a:p>
-        </p:txBody>
-      </p:sp>
-      <p:sp>
-        <p:nvSpPr>
-          <p:cNvPr id="10" name="Rounded Rectangle 9"/>
+              <a:defRPr sz="1000">
+                <a:solidFill>
+                  <a:srgbClr val="FFFFFF"/>
+                </a:solidFill>
+              </a:defRPr>
+            </a:pPr>
+            <a:r>
+              <a:t>Sanjana Chirutha (STU ID: STU6817962b86d921746376235)  |  Edunet Foundation  |  AICTE  |  IBM SkillsBuild</a:t>
+            </a:r>
+          </a:p>
+        </p:txBody>
+      </p:sp>
+      <p:sp>
+        <p:nvSpPr>
+          <p:cNvPr id="8" name="Rounded Rectangle 7"/>
           <p:cNvSpPr/>
           <p:nvPr/>
         </p:nvSpPr>
         <p:spPr>
           <a:xfrm>
-            <a:off x="5120640" y="1463040"/>
-            <a:ext cx="1920240" cy="4114800"/>
+            <a:off x="731520" y="1463040"/>
+            <a:ext cx="1920240" cy="4572000"/>
           </a:xfrm>
           <a:prstGeom prst="roundRect">
             <a:avLst/>
           </a:prstGeom>
           <a:solidFill>
-            <a:srgbClr val="152036"/>
+            <a:srgbClr val="F1F5F9"/>
           </a:solidFill>
           <a:ln>
             <a:solidFill>
-              <a:srgbClr val="FFFFFF"/>
+              <a:srgbClr val="CBD5E1"/>
             </a:solidFill>
           </a:ln>
         </p:spPr>
@@ -6159,14 +6698,14 @@
       </p:sp>
       <p:sp>
         <p:nvSpPr>
-          <p:cNvPr id="11" name="TextBox 10"/>
+          <p:cNvPr id="9" name="TextBox 8"/>
           <p:cNvSpPr txBox="1"/>
           <p:nvPr/>
         </p:nvSpPr>
         <p:spPr>
           <a:xfrm>
-            <a:off x="5212079" y="1645920"/>
-            <a:ext cx="1737360" cy="3749039"/>
+            <a:off x="822960" y="1645920"/>
+            <a:ext cx="1737360" cy="4206240"/>
           </a:xfrm>
           <a:prstGeom prst="rect">
             <a:avLst/>
@@ -6180,50 +6719,50 @@
           <a:lstStyle/>
           <a:p>
             <a:pPr>
-              <a:defRPr sz="1600" b="1">
-                <a:solidFill>
-                  <a:srgbClr val="6366F1"/>
-                </a:solidFill>
-              </a:defRPr>
-            </a:pPr>
-            <a:r>
-              <a:t>03. Scaling</a:t>
+              <a:defRPr sz="1500" b="1">
+                <a:solidFill>
+                  <a:srgbClr val="1E3A8A"/>
+                </a:solidFill>
+              </a:defRPr>
+            </a:pPr>
+            <a:r>
+              <a:t>01. Ingestion</a:t>
             </a:r>
           </a:p>
           <a:p>
             <a:pPr>
-              <a:defRPr sz="1300">
-                <a:solidFill>
-                  <a:srgbClr val="94A3B8"/>
-                </a:solidFill>
-              </a:defRPr>
-            </a:pPr>
-            <a:r>
-              <a:t>MinMaxScaler for Numericals (Age, Experience, Hours)</a:t>
-            </a:r>
-          </a:p>
-        </p:txBody>
-      </p:sp>
-      <p:sp>
-        <p:nvSpPr>
-          <p:cNvPr id="12" name="Rounded Rectangle 11"/>
+              <a:defRPr sz="1200">
+                <a:solidFill>
+                  <a:srgbClr val="475569"/>
+                </a:solidFill>
+              </a:defRPr>
+            </a:pPr>
+            <a:r>
+              <a:t>10,000+ Cleaned Profiles from UCI &amp; BLS Benchmarks</a:t>
+            </a:r>
+          </a:p>
+        </p:txBody>
+      </p:sp>
+      <p:sp>
+        <p:nvSpPr>
+          <p:cNvPr id="10" name="Rounded Rectangle 9"/>
           <p:cNvSpPr/>
           <p:nvPr/>
         </p:nvSpPr>
         <p:spPr>
           <a:xfrm>
-            <a:off x="7315200" y="1463040"/>
-            <a:ext cx="1920240" cy="4114800"/>
+            <a:off x="2926080" y="1463040"/>
+            <a:ext cx="1920240" cy="4572000"/>
           </a:xfrm>
           <a:prstGeom prst="roundRect">
             <a:avLst/>
           </a:prstGeom>
           <a:solidFill>
-            <a:srgbClr val="152036"/>
+            <a:srgbClr val="F1F5F9"/>
           </a:solidFill>
           <a:ln>
             <a:solidFill>
-              <a:srgbClr val="FFFFFF"/>
+              <a:srgbClr val="CBD5E1"/>
             </a:solidFill>
           </a:ln>
         </p:spPr>
@@ -6251,14 +6790,14 @@
       </p:sp>
       <p:sp>
         <p:nvSpPr>
-          <p:cNvPr id="13" name="TextBox 12"/>
+          <p:cNvPr id="11" name="TextBox 10"/>
           <p:cNvSpPr txBox="1"/>
           <p:nvPr/>
         </p:nvSpPr>
         <p:spPr>
           <a:xfrm>
-            <a:off x="7406640" y="1645920"/>
-            <a:ext cx="1737360" cy="3749039"/>
+            <a:off x="3017520" y="1645920"/>
+            <a:ext cx="1737360" cy="4206240"/>
           </a:xfrm>
           <a:prstGeom prst="rect">
             <a:avLst/>
@@ -6272,50 +6811,50 @@
           <a:lstStyle/>
           <a:p>
             <a:pPr>
-              <a:defRPr sz="1600" b="1">
-                <a:solidFill>
-                  <a:srgbClr val="6366F1"/>
-                </a:solidFill>
-              </a:defRPr>
-            </a:pPr>
-            <a:r>
-              <a:t>04. Training</a:t>
+              <a:defRPr sz="1500" b="1">
+                <a:solidFill>
+                  <a:srgbClr val="1E3A8A"/>
+                </a:solidFill>
+              </a:defRPr>
+            </a:pPr>
+            <a:r>
+              <a:t>02. Encoding</a:t>
             </a:r>
           </a:p>
           <a:p>
             <a:pPr>
-              <a:defRPr sz="1300">
-                <a:solidFill>
-                  <a:srgbClr val="94A3B8"/>
-                </a:solidFill>
-              </a:defRPr>
-            </a:pPr>
-            <a:r>
-              <a:t>Gradient Boosting &amp; XGBoost Regressor</a:t>
-            </a:r>
-          </a:p>
-        </p:txBody>
-      </p:sp>
-      <p:sp>
-        <p:nvSpPr>
-          <p:cNvPr id="14" name="Rounded Rectangle 13"/>
+              <a:defRPr sz="1200">
+                <a:solidFill>
+                  <a:srgbClr val="475569"/>
+                </a:solidFill>
+              </a:defRPr>
+            </a:pPr>
+            <a:r>
+              <a:t>LabelEncoder for Categoricals (Education, Occupation, Region)</a:t>
+            </a:r>
+          </a:p>
+        </p:txBody>
+      </p:sp>
+      <p:sp>
+        <p:nvSpPr>
+          <p:cNvPr id="12" name="Rounded Rectangle 11"/>
           <p:cNvSpPr/>
           <p:nvPr/>
         </p:nvSpPr>
         <p:spPr>
           <a:xfrm>
-            <a:off x="9509760" y="1463040"/>
-            <a:ext cx="1920240" cy="4114800"/>
+            <a:off x="5120640" y="1463040"/>
+            <a:ext cx="1920240" cy="4572000"/>
           </a:xfrm>
           <a:prstGeom prst="roundRect">
             <a:avLst/>
           </a:prstGeom>
           <a:solidFill>
-            <a:srgbClr val="152036"/>
+            <a:srgbClr val="F1F5F9"/>
           </a:solidFill>
           <a:ln>
             <a:solidFill>
-              <a:srgbClr val="FFFFFF"/>
+              <a:srgbClr val="CBD5E1"/>
             </a:solidFill>
           </a:ln>
         </p:spPr>
@@ -6343,14 +6882,14 @@
       </p:sp>
       <p:sp>
         <p:nvSpPr>
-          <p:cNvPr id="15" name="TextBox 14"/>
+          <p:cNvPr id="13" name="TextBox 12"/>
           <p:cNvSpPr txBox="1"/>
           <p:nvPr/>
         </p:nvSpPr>
         <p:spPr>
           <a:xfrm>
-            <a:off x="9601200" y="1645920"/>
-            <a:ext cx="1737360" cy="3749039"/>
+            <a:off x="5212079" y="1645920"/>
+            <a:ext cx="1737360" cy="4206240"/>
           </a:xfrm>
           <a:prstGeom prst="rect">
             <a:avLst/>
@@ -6364,9 +6903,193 @@
           <a:lstStyle/>
           <a:p>
             <a:pPr>
-              <a:defRPr sz="1600" b="1">
-                <a:solidFill>
-                  <a:srgbClr val="6366F1"/>
+              <a:defRPr sz="1500" b="1">
+                <a:solidFill>
+                  <a:srgbClr val="1E3A8A"/>
+                </a:solidFill>
+              </a:defRPr>
+            </a:pPr>
+            <a:r>
+              <a:t>03. Scaling</a:t>
+            </a:r>
+          </a:p>
+          <a:p>
+            <a:pPr>
+              <a:defRPr sz="1200">
+                <a:solidFill>
+                  <a:srgbClr val="475569"/>
+                </a:solidFill>
+              </a:defRPr>
+            </a:pPr>
+            <a:r>
+              <a:t>MinMaxScaler for Numericals (Age, Experience, Hours)</a:t>
+            </a:r>
+          </a:p>
+        </p:txBody>
+      </p:sp>
+      <p:sp>
+        <p:nvSpPr>
+          <p:cNvPr id="14" name="Rounded Rectangle 13"/>
+          <p:cNvSpPr/>
+          <p:nvPr/>
+        </p:nvSpPr>
+        <p:spPr>
+          <a:xfrm>
+            <a:off x="7315200" y="1463040"/>
+            <a:ext cx="1920240" cy="4572000"/>
+          </a:xfrm>
+          <a:prstGeom prst="roundRect">
+            <a:avLst/>
+          </a:prstGeom>
+          <a:solidFill>
+            <a:srgbClr val="F1F5F9"/>
+          </a:solidFill>
+          <a:ln>
+            <a:solidFill>
+              <a:srgbClr val="CBD5E1"/>
+            </a:solidFill>
+          </a:ln>
+        </p:spPr>
+        <p:style>
+          <a:lnRef idx="1">
+            <a:schemeClr val="accent1"/>
+          </a:lnRef>
+          <a:fillRef idx="3">
+            <a:schemeClr val="accent1"/>
+          </a:fillRef>
+          <a:effectRef idx="2">
+            <a:schemeClr val="accent1"/>
+          </a:effectRef>
+          <a:fontRef idx="minor">
+            <a:schemeClr val="lt1"/>
+          </a:fontRef>
+        </p:style>
+        <p:txBody>
+          <a:bodyPr rtlCol="0" anchor="ctr"/>
+          <a:lstStyle/>
+          <a:p>
+            <a:pPr algn="ctr"/>
+          </a:p>
+        </p:txBody>
+      </p:sp>
+      <p:sp>
+        <p:nvSpPr>
+          <p:cNvPr id="15" name="TextBox 14"/>
+          <p:cNvSpPr txBox="1"/>
+          <p:nvPr/>
+        </p:nvSpPr>
+        <p:spPr>
+          <a:xfrm>
+            <a:off x="7406640" y="1645920"/>
+            <a:ext cx="1737360" cy="4206240"/>
+          </a:xfrm>
+          <a:prstGeom prst="rect">
+            <a:avLst/>
+          </a:prstGeom>
+          <a:noFill/>
+        </p:spPr>
+        <p:txBody>
+          <a:bodyPr wrap="square">
+            <a:spAutoFit/>
+          </a:bodyPr>
+          <a:lstStyle/>
+          <a:p>
+            <a:pPr>
+              <a:defRPr sz="1500" b="1">
+                <a:solidFill>
+                  <a:srgbClr val="1E3A8A"/>
+                </a:solidFill>
+              </a:defRPr>
+            </a:pPr>
+            <a:r>
+              <a:t>04. Training</a:t>
+            </a:r>
+          </a:p>
+          <a:p>
+            <a:pPr>
+              <a:defRPr sz="1200">
+                <a:solidFill>
+                  <a:srgbClr val="475569"/>
+                </a:solidFill>
+              </a:defRPr>
+            </a:pPr>
+            <a:r>
+              <a:t>Gradient Boosting &amp; XGBoost Regressor</a:t>
+            </a:r>
+          </a:p>
+        </p:txBody>
+      </p:sp>
+      <p:sp>
+        <p:nvSpPr>
+          <p:cNvPr id="16" name="Rounded Rectangle 15"/>
+          <p:cNvSpPr/>
+          <p:nvPr/>
+        </p:nvSpPr>
+        <p:spPr>
+          <a:xfrm>
+            <a:off x="9509760" y="1463040"/>
+            <a:ext cx="1920240" cy="4572000"/>
+          </a:xfrm>
+          <a:prstGeom prst="roundRect">
+            <a:avLst/>
+          </a:prstGeom>
+          <a:solidFill>
+            <a:srgbClr val="F1F5F9"/>
+          </a:solidFill>
+          <a:ln>
+            <a:solidFill>
+              <a:srgbClr val="CBD5E1"/>
+            </a:solidFill>
+          </a:ln>
+        </p:spPr>
+        <p:style>
+          <a:lnRef idx="1">
+            <a:schemeClr val="accent1"/>
+          </a:lnRef>
+          <a:fillRef idx="3">
+            <a:schemeClr val="accent1"/>
+          </a:fillRef>
+          <a:effectRef idx="2">
+            <a:schemeClr val="accent1"/>
+          </a:effectRef>
+          <a:fontRef idx="minor">
+            <a:schemeClr val="lt1"/>
+          </a:fontRef>
+        </p:style>
+        <p:txBody>
+          <a:bodyPr rtlCol="0" anchor="ctr"/>
+          <a:lstStyle/>
+          <a:p>
+            <a:pPr algn="ctr"/>
+          </a:p>
+        </p:txBody>
+      </p:sp>
+      <p:sp>
+        <p:nvSpPr>
+          <p:cNvPr id="17" name="TextBox 16"/>
+          <p:cNvSpPr txBox="1"/>
+          <p:nvPr/>
+        </p:nvSpPr>
+        <p:spPr>
+          <a:xfrm>
+            <a:off x="9601200" y="1645920"/>
+            <a:ext cx="1737360" cy="4206240"/>
+          </a:xfrm>
+          <a:prstGeom prst="rect">
+            <a:avLst/>
+          </a:prstGeom>
+          <a:noFill/>
+        </p:spPr>
+        <p:txBody>
+          <a:bodyPr wrap="square">
+            <a:spAutoFit/>
+          </a:bodyPr>
+          <a:lstStyle/>
+          <a:p>
+            <a:pPr>
+              <a:defRPr sz="1500" b="1">
+                <a:solidFill>
+                  <a:srgbClr val="1E3A8A"/>
                 </a:solidFill>
               </a:defRPr>
             </a:pPr>
@@ -6376,9 +7099,9 @@
           </a:p>
           <a:p>
             <a:pPr>
-              <a:defRPr sz="1300">
-                <a:solidFill>
-                  <a:srgbClr val="94A3B8"/>
+              <a:defRPr sz="1200">
+                <a:solidFill>
+                  <a:srgbClr val="475569"/>
                 </a:solidFill>
               </a:defRPr>
             </a:pPr>
@@ -6421,7 +7144,7 @@
             <a:avLst/>
           </a:prstGeom>
           <a:solidFill>
-            <a:srgbClr val="090D16"/>
+            <a:srgbClr val="F8FAFC"/>
           </a:solidFill>
           <a:ln>
             <a:noFill/>
@@ -6451,131 +7174,23 @@
       </p:sp>
       <p:sp>
         <p:nvSpPr>
-          <p:cNvPr id="3" name="TextBox 2"/>
-          <p:cNvSpPr txBox="1"/>
-          <p:nvPr/>
-        </p:nvSpPr>
-        <p:spPr>
-          <a:xfrm>
-            <a:off x="731520" y="365760"/>
-            <a:ext cx="10698480" cy="731520"/>
-          </a:xfrm>
-          <a:prstGeom prst="rect">
-            <a:avLst/>
-          </a:prstGeom>
-          <a:noFill/>
-        </p:spPr>
-        <p:txBody>
-          <a:bodyPr wrap="square">
-            <a:spAutoFit/>
-          </a:bodyPr>
-          <a:lstStyle/>
-          <a:p>
-            <a:pPr>
-              <a:defRPr sz="2600" b="1">
-                <a:solidFill>
-                  <a:srgbClr val="F8FAFC"/>
-                </a:solidFill>
-                <a:latin typeface="Arial"/>
-              </a:defRPr>
-            </a:pPr>
-            <a:r>
-              <a:t>Model Performance &amp; Quantitative Results</a:t>
-            </a:r>
-          </a:p>
-        </p:txBody>
-      </p:sp>
-      <p:sp>
-        <p:nvSpPr>
-          <p:cNvPr id="4" name="TextBox 3"/>
-          <p:cNvSpPr txBox="1"/>
-          <p:nvPr/>
-        </p:nvSpPr>
-        <p:spPr>
-          <a:xfrm>
-            <a:off x="9601200" y="365760"/>
-            <a:ext cx="1828800" cy="457200"/>
-          </a:xfrm>
-          <a:prstGeom prst="rect">
-            <a:avLst/>
-          </a:prstGeom>
-          <a:noFill/>
-        </p:spPr>
-        <p:txBody>
-          <a:bodyPr wrap="none">
-            <a:spAutoFit/>
-          </a:bodyPr>
-          <a:lstStyle/>
-          <a:p>
-            <a:pPr algn="r">
-              <a:defRPr sz="1300" b="1">
-                <a:solidFill>
-                  <a:srgbClr val="6366F1"/>
-                </a:solidFill>
-              </a:defRPr>
-            </a:pPr>
-            <a:r>
-              <a:t>Slide 05/13</a:t>
-            </a:r>
-          </a:p>
-        </p:txBody>
-      </p:sp>
-      <p:sp>
-        <p:nvSpPr>
-          <p:cNvPr id="5" name="TextBox 4"/>
-          <p:cNvSpPr txBox="1"/>
-          <p:nvPr/>
-        </p:nvSpPr>
-        <p:spPr>
-          <a:xfrm>
-            <a:off x="731520" y="6309360"/>
-            <a:ext cx="10698480" cy="365760"/>
-          </a:xfrm>
-          <a:prstGeom prst="rect">
-            <a:avLst/>
-          </a:prstGeom>
-          <a:noFill/>
-        </p:spPr>
-        <p:txBody>
-          <a:bodyPr wrap="none">
-            <a:spAutoFit/>
-          </a:bodyPr>
-          <a:lstStyle/>
-          <a:p>
-            <a:pPr>
-              <a:defRPr sz="1000">
-                <a:solidFill>
-                  <a:srgbClr val="94A3B8"/>
-                </a:solidFill>
-              </a:defRPr>
-            </a:pPr>
-            <a:r>
-              <a:t>Sanjana Chirutha (STU ID: STU6817962b86d921746376235)  |  Edunet Foundation  |  AICTE  |  IBM SkillsBuild</a:t>
-            </a:r>
-          </a:p>
-        </p:txBody>
-      </p:sp>
-      <p:sp>
-        <p:nvSpPr>
-          <p:cNvPr id="6" name="Rounded Rectangle 5"/>
+          <p:cNvPr id="3" name="Rectangle 2"/>
           <p:cNvSpPr/>
           <p:nvPr/>
         </p:nvSpPr>
         <p:spPr>
           <a:xfrm>
-            <a:off x="731520" y="1463040"/>
-            <a:ext cx="5212080" cy="1920240"/>
-          </a:xfrm>
-          <a:prstGeom prst="roundRect">
+            <a:off x="0" y="0"/>
+            <a:ext cx="365760" cy="6858000"/>
+          </a:xfrm>
+          <a:prstGeom prst="rect">
             <a:avLst/>
           </a:prstGeom>
           <a:solidFill>
-            <a:srgbClr val="152036"/>
+            <a:srgbClr val="0284C7"/>
           </a:solidFill>
           <a:ln>
-            <a:solidFill>
-              <a:srgbClr val="FFFFFF"/>
-            </a:solidFill>
+            <a:noFill/>
           </a:ln>
         </p:spPr>
         <p:style>
@@ -6602,72 +7217,23 @@
       </p:sp>
       <p:sp>
         <p:nvSpPr>
-          <p:cNvPr id="7" name="TextBox 6"/>
-          <p:cNvSpPr txBox="1"/>
-          <p:nvPr/>
-        </p:nvSpPr>
-        <p:spPr>
-          <a:xfrm>
-            <a:off x="914400" y="1737360"/>
-            <a:ext cx="4846320" cy="1371600"/>
-          </a:xfrm>
-          <a:prstGeom prst="rect">
-            <a:avLst/>
-          </a:prstGeom>
-          <a:noFill/>
-        </p:spPr>
-        <p:txBody>
-          <a:bodyPr wrap="none">
-            <a:spAutoFit/>
-          </a:bodyPr>
-          <a:lstStyle/>
-          <a:p>
-            <a:pPr algn="ctr">
-              <a:defRPr sz="3600" b="1">
-                <a:solidFill>
-                  <a:srgbClr val="10B981"/>
-                </a:solidFill>
-              </a:defRPr>
-            </a:pPr>
-            <a:r>
-              <a:t>98.00%</a:t>
-            </a:r>
-          </a:p>
-          <a:p>
-            <a:pPr algn="ctr">
-              <a:defRPr sz="1600">
-                <a:solidFill>
-                  <a:srgbClr val="F8FAFC"/>
-                </a:solidFill>
-              </a:defRPr>
-            </a:pPr>
-            <a:r>
-              <a:t>Model Accuracy (R² Score)</a:t>
-            </a:r>
-          </a:p>
-        </p:txBody>
-      </p:sp>
-      <p:sp>
-        <p:nvSpPr>
-          <p:cNvPr id="8" name="Rounded Rectangle 7"/>
+          <p:cNvPr id="4" name="Rectangle 3"/>
           <p:cNvSpPr/>
           <p:nvPr/>
         </p:nvSpPr>
         <p:spPr>
           <a:xfrm>
-            <a:off x="6217920" y="1463040"/>
-            <a:ext cx="5212080" cy="1920240"/>
-          </a:xfrm>
-          <a:prstGeom prst="roundRect">
+            <a:off x="365760" y="6583680"/>
+            <a:ext cx="11825935" cy="274320"/>
+          </a:xfrm>
+          <a:prstGeom prst="rect">
             <a:avLst/>
           </a:prstGeom>
           <a:solidFill>
-            <a:srgbClr val="152036"/>
+            <a:srgbClr val="1E3A8A"/>
           </a:solidFill>
           <a:ln>
-            <a:solidFill>
-              <a:srgbClr val="FFFFFF"/>
-            </a:solidFill>
+            <a:noFill/>
           </a:ln>
         </p:spPr>
         <p:style>
@@ -6694,14 +7260,50 @@
       </p:sp>
       <p:sp>
         <p:nvSpPr>
-          <p:cNvPr id="9" name="TextBox 8"/>
+          <p:cNvPr id="5" name="TextBox 4"/>
           <p:cNvSpPr txBox="1"/>
           <p:nvPr/>
         </p:nvSpPr>
         <p:spPr>
           <a:xfrm>
-            <a:off x="6400800" y="1737360"/>
-            <a:ext cx="4846320" cy="1371600"/>
+            <a:off x="731520" y="365760"/>
+            <a:ext cx="9601200" cy="731520"/>
+          </a:xfrm>
+          <a:prstGeom prst="rect">
+            <a:avLst/>
+          </a:prstGeom>
+          <a:noFill/>
+        </p:spPr>
+        <p:txBody>
+          <a:bodyPr wrap="square">
+            <a:spAutoFit/>
+          </a:bodyPr>
+          <a:lstStyle/>
+          <a:p>
+            <a:pPr>
+              <a:defRPr sz="2600" b="1">
+                <a:solidFill>
+                  <a:srgbClr val="1E3A8A"/>
+                </a:solidFill>
+                <a:latin typeface="Helvetica"/>
+              </a:defRPr>
+            </a:pPr>
+            <a:r>
+              <a:t>Model Performance &amp; Quantitative Results</a:t>
+            </a:r>
+          </a:p>
+        </p:txBody>
+      </p:sp>
+      <p:sp>
+        <p:nvSpPr>
+          <p:cNvPr id="6" name="TextBox 5"/>
+          <p:cNvSpPr txBox="1"/>
+          <p:nvPr/>
+        </p:nvSpPr>
+        <p:spPr>
+          <a:xfrm>
+            <a:off x="9601200" y="365760"/>
+            <a:ext cx="1828800" cy="457200"/>
           </a:xfrm>
           <a:prstGeom prst="rect">
             <a:avLst/>
@@ -6714,51 +7316,74 @@
           </a:bodyPr>
           <a:lstStyle/>
           <a:p>
-            <a:pPr algn="ctr">
-              <a:defRPr sz="3600" b="1">
-                <a:solidFill>
-                  <a:srgbClr val="10B981"/>
-                </a:solidFill>
-              </a:defRPr>
-            </a:pPr>
-            <a:r>
-              <a:t>$3,523.39</a:t>
-            </a:r>
-          </a:p>
-          <a:p>
-            <a:pPr algn="ctr">
-              <a:defRPr sz="1600">
-                <a:solidFill>
-                  <a:srgbClr val="F8FAFC"/>
-                </a:solidFill>
-              </a:defRPr>
-            </a:pPr>
-            <a:r>
-              <a:t>Root Mean Squared Error (RMSE)</a:t>
-            </a:r>
-          </a:p>
-        </p:txBody>
-      </p:sp>
-      <p:sp>
-        <p:nvSpPr>
-          <p:cNvPr id="10" name="Rounded Rectangle 9"/>
+            <a:pPr algn="r">
+              <a:defRPr sz="1300" b="1">
+                <a:solidFill>
+                  <a:srgbClr val="0284C7"/>
+                </a:solidFill>
+              </a:defRPr>
+            </a:pPr>
+            <a:r>
+              <a:t>Slide 05/13</a:t>
+            </a:r>
+          </a:p>
+        </p:txBody>
+      </p:sp>
+      <p:sp>
+        <p:nvSpPr>
+          <p:cNvPr id="7" name="TextBox 6"/>
+          <p:cNvSpPr txBox="1"/>
+          <p:nvPr/>
+        </p:nvSpPr>
+        <p:spPr>
+          <a:xfrm>
+            <a:off x="731520" y="6601968"/>
+            <a:ext cx="10698480" cy="228600"/>
+          </a:xfrm>
+          <a:prstGeom prst="rect">
+            <a:avLst/>
+          </a:prstGeom>
+          <a:noFill/>
+        </p:spPr>
+        <p:txBody>
+          <a:bodyPr wrap="none">
+            <a:spAutoFit/>
+          </a:bodyPr>
+          <a:lstStyle/>
+          <a:p>
+            <a:pPr>
+              <a:defRPr sz="1000">
+                <a:solidFill>
+                  <a:srgbClr val="FFFFFF"/>
+                </a:solidFill>
+              </a:defRPr>
+            </a:pPr>
+            <a:r>
+              <a:t>Sanjana Chirutha (STU ID: STU6817962b86d921746376235)  |  Edunet Foundation  |  AICTE  |  IBM SkillsBuild</a:t>
+            </a:r>
+          </a:p>
+        </p:txBody>
+      </p:sp>
+      <p:sp>
+        <p:nvSpPr>
+          <p:cNvPr id="8" name="Rounded Rectangle 7"/>
           <p:cNvSpPr/>
           <p:nvPr/>
         </p:nvSpPr>
         <p:spPr>
           <a:xfrm>
-            <a:off x="731520" y="3749039"/>
-            <a:ext cx="5212080" cy="1920240"/>
+            <a:off x="731520" y="1463040"/>
+            <a:ext cx="5212080" cy="2011680"/>
           </a:xfrm>
           <a:prstGeom prst="roundRect">
             <a:avLst/>
           </a:prstGeom>
           <a:solidFill>
-            <a:srgbClr val="152036"/>
+            <a:srgbClr val="F1F5F9"/>
           </a:solidFill>
           <a:ln>
             <a:solidFill>
-              <a:srgbClr val="FFFFFF"/>
+              <a:srgbClr val="CBD5E1"/>
             </a:solidFill>
           </a:ln>
         </p:spPr>
@@ -6786,14 +7411,14 @@
       </p:sp>
       <p:sp>
         <p:nvSpPr>
-          <p:cNvPr id="11" name="TextBox 10"/>
+          <p:cNvPr id="9" name="TextBox 8"/>
           <p:cNvSpPr txBox="1"/>
           <p:nvPr/>
         </p:nvSpPr>
         <p:spPr>
           <a:xfrm>
-            <a:off x="914400" y="4023359"/>
-            <a:ext cx="4846320" cy="1371600"/>
+            <a:off x="914400" y="1737360"/>
+            <a:ext cx="4846320" cy="1463040"/>
           </a:xfrm>
           <a:prstGeom prst="rect">
             <a:avLst/>
@@ -6809,48 +7434,48 @@
             <a:pPr algn="ctr">
               <a:defRPr sz="3600" b="1">
                 <a:solidFill>
-                  <a:srgbClr val="10B981"/>
-                </a:solidFill>
-              </a:defRPr>
-            </a:pPr>
-            <a:r>
-              <a:t>&lt; 15 ms</a:t>
+                  <a:srgbClr val="16A34A"/>
+                </a:solidFill>
+              </a:defRPr>
+            </a:pPr>
+            <a:r>
+              <a:t>98.00%</a:t>
             </a:r>
           </a:p>
           <a:p>
             <a:pPr algn="ctr">
-              <a:defRPr sz="1600">
-                <a:solidFill>
-                  <a:srgbClr val="F8FAFC"/>
-                </a:solidFill>
-              </a:defRPr>
-            </a:pPr>
-            <a:r>
-              <a:t>Inference Latency</a:t>
-            </a:r>
-          </a:p>
-        </p:txBody>
-      </p:sp>
-      <p:sp>
-        <p:nvSpPr>
-          <p:cNvPr id="12" name="Rounded Rectangle 11"/>
+              <a:defRPr sz="1500">
+                <a:solidFill>
+                  <a:srgbClr val="0F172A"/>
+                </a:solidFill>
+              </a:defRPr>
+            </a:pPr>
+            <a:r>
+              <a:t>Model Accuracy (R² Score)</a:t>
+            </a:r>
+          </a:p>
+        </p:txBody>
+      </p:sp>
+      <p:sp>
+        <p:nvSpPr>
+          <p:cNvPr id="10" name="Rounded Rectangle 9"/>
           <p:cNvSpPr/>
           <p:nvPr/>
         </p:nvSpPr>
         <p:spPr>
           <a:xfrm>
-            <a:off x="6217920" y="3749039"/>
-            <a:ext cx="5212080" cy="1920240"/>
+            <a:off x="6217920" y="1463040"/>
+            <a:ext cx="5212080" cy="2011680"/>
           </a:xfrm>
           <a:prstGeom prst="roundRect">
             <a:avLst/>
           </a:prstGeom>
           <a:solidFill>
-            <a:srgbClr val="152036"/>
+            <a:srgbClr val="F1F5F9"/>
           </a:solidFill>
           <a:ln>
             <a:solidFill>
-              <a:srgbClr val="FFFFFF"/>
+              <a:srgbClr val="CBD5E1"/>
             </a:solidFill>
           </a:ln>
         </p:spPr>
@@ -6878,14 +7503,14 @@
       </p:sp>
       <p:sp>
         <p:nvSpPr>
-          <p:cNvPr id="13" name="TextBox 12"/>
+          <p:cNvPr id="11" name="TextBox 10"/>
           <p:cNvSpPr txBox="1"/>
           <p:nvPr/>
         </p:nvSpPr>
         <p:spPr>
           <a:xfrm>
-            <a:off x="6400800" y="4023359"/>
-            <a:ext cx="4846320" cy="1371600"/>
+            <a:off x="6400800" y="1737360"/>
+            <a:ext cx="4846320" cy="1463040"/>
           </a:xfrm>
           <a:prstGeom prst="rect">
             <a:avLst/>
@@ -6901,7 +7526,191 @@
             <a:pPr algn="ctr">
               <a:defRPr sz="3600" b="1">
                 <a:solidFill>
-                  <a:srgbClr val="10B981"/>
+                  <a:srgbClr val="16A34A"/>
+                </a:solidFill>
+              </a:defRPr>
+            </a:pPr>
+            <a:r>
+              <a:t>$3,523.39</a:t>
+            </a:r>
+          </a:p>
+          <a:p>
+            <a:pPr algn="ctr">
+              <a:defRPr sz="1500">
+                <a:solidFill>
+                  <a:srgbClr val="0F172A"/>
+                </a:solidFill>
+              </a:defRPr>
+            </a:pPr>
+            <a:r>
+              <a:t>Root Mean Squared Error (RMSE)</a:t>
+            </a:r>
+          </a:p>
+        </p:txBody>
+      </p:sp>
+      <p:sp>
+        <p:nvSpPr>
+          <p:cNvPr id="12" name="Rounded Rectangle 11"/>
+          <p:cNvSpPr/>
+          <p:nvPr/>
+        </p:nvSpPr>
+        <p:spPr>
+          <a:xfrm>
+            <a:off x="731520" y="3840480"/>
+            <a:ext cx="5212080" cy="2011680"/>
+          </a:xfrm>
+          <a:prstGeom prst="roundRect">
+            <a:avLst/>
+          </a:prstGeom>
+          <a:solidFill>
+            <a:srgbClr val="F1F5F9"/>
+          </a:solidFill>
+          <a:ln>
+            <a:solidFill>
+              <a:srgbClr val="CBD5E1"/>
+            </a:solidFill>
+          </a:ln>
+        </p:spPr>
+        <p:style>
+          <a:lnRef idx="1">
+            <a:schemeClr val="accent1"/>
+          </a:lnRef>
+          <a:fillRef idx="3">
+            <a:schemeClr val="accent1"/>
+          </a:fillRef>
+          <a:effectRef idx="2">
+            <a:schemeClr val="accent1"/>
+          </a:effectRef>
+          <a:fontRef idx="minor">
+            <a:schemeClr val="lt1"/>
+          </a:fontRef>
+        </p:style>
+        <p:txBody>
+          <a:bodyPr rtlCol="0" anchor="ctr"/>
+          <a:lstStyle/>
+          <a:p>
+            <a:pPr algn="ctr"/>
+          </a:p>
+        </p:txBody>
+      </p:sp>
+      <p:sp>
+        <p:nvSpPr>
+          <p:cNvPr id="13" name="TextBox 12"/>
+          <p:cNvSpPr txBox="1"/>
+          <p:nvPr/>
+        </p:nvSpPr>
+        <p:spPr>
+          <a:xfrm>
+            <a:off x="914400" y="4114800"/>
+            <a:ext cx="4846320" cy="1463040"/>
+          </a:xfrm>
+          <a:prstGeom prst="rect">
+            <a:avLst/>
+          </a:prstGeom>
+          <a:noFill/>
+        </p:spPr>
+        <p:txBody>
+          <a:bodyPr wrap="none">
+            <a:spAutoFit/>
+          </a:bodyPr>
+          <a:lstStyle/>
+          <a:p>
+            <a:pPr algn="ctr">
+              <a:defRPr sz="3600" b="1">
+                <a:solidFill>
+                  <a:srgbClr val="16A34A"/>
+                </a:solidFill>
+              </a:defRPr>
+            </a:pPr>
+            <a:r>
+              <a:t>&lt; 15 ms</a:t>
+            </a:r>
+          </a:p>
+          <a:p>
+            <a:pPr algn="ctr">
+              <a:defRPr sz="1500">
+                <a:solidFill>
+                  <a:srgbClr val="0F172A"/>
+                </a:solidFill>
+              </a:defRPr>
+            </a:pPr>
+            <a:r>
+              <a:t>Inference Latency</a:t>
+            </a:r>
+          </a:p>
+        </p:txBody>
+      </p:sp>
+      <p:sp>
+        <p:nvSpPr>
+          <p:cNvPr id="14" name="Rounded Rectangle 13"/>
+          <p:cNvSpPr/>
+          <p:nvPr/>
+        </p:nvSpPr>
+        <p:spPr>
+          <a:xfrm>
+            <a:off x="6217920" y="3840480"/>
+            <a:ext cx="5212080" cy="2011680"/>
+          </a:xfrm>
+          <a:prstGeom prst="roundRect">
+            <a:avLst/>
+          </a:prstGeom>
+          <a:solidFill>
+            <a:srgbClr val="F1F5F9"/>
+          </a:solidFill>
+          <a:ln>
+            <a:solidFill>
+              <a:srgbClr val="CBD5E1"/>
+            </a:solidFill>
+          </a:ln>
+        </p:spPr>
+        <p:style>
+          <a:lnRef idx="1">
+            <a:schemeClr val="accent1"/>
+          </a:lnRef>
+          <a:fillRef idx="3">
+            <a:schemeClr val="accent1"/>
+          </a:fillRef>
+          <a:effectRef idx="2">
+            <a:schemeClr val="accent1"/>
+          </a:effectRef>
+          <a:fontRef idx="minor">
+            <a:schemeClr val="lt1"/>
+          </a:fontRef>
+        </p:style>
+        <p:txBody>
+          <a:bodyPr rtlCol="0" anchor="ctr"/>
+          <a:lstStyle/>
+          <a:p>
+            <a:pPr algn="ctr"/>
+          </a:p>
+        </p:txBody>
+      </p:sp>
+      <p:sp>
+        <p:nvSpPr>
+          <p:cNvPr id="15" name="TextBox 14"/>
+          <p:cNvSpPr txBox="1"/>
+          <p:nvPr/>
+        </p:nvSpPr>
+        <p:spPr>
+          <a:xfrm>
+            <a:off x="6400800" y="4114800"/>
+            <a:ext cx="4846320" cy="1463040"/>
+          </a:xfrm>
+          <a:prstGeom prst="rect">
+            <a:avLst/>
+          </a:prstGeom>
+          <a:noFill/>
+        </p:spPr>
+        <p:txBody>
+          <a:bodyPr wrap="none">
+            <a:spAutoFit/>
+          </a:bodyPr>
+          <a:lstStyle/>
+          <a:p>
+            <a:pPr algn="ctr">
+              <a:defRPr sz="3600" b="1">
+                <a:solidFill>
+                  <a:srgbClr val="16A34A"/>
                 </a:solidFill>
               </a:defRPr>
             </a:pPr>
@@ -6911,9 +7720,9 @@
           </a:p>
           <a:p>
             <a:pPr algn="ctr">
-              <a:defRPr sz="1600">
-                <a:solidFill>
-                  <a:srgbClr val="F8FAFC"/>
+              <a:defRPr sz="1500">
+                <a:solidFill>
+                  <a:srgbClr val="0F172A"/>
                 </a:solidFill>
               </a:defRPr>
             </a:pPr>
@@ -6956,7 +7765,7 @@
             <a:avLst/>
           </a:prstGeom>
           <a:solidFill>
-            <a:srgbClr val="090D16"/>
+            <a:srgbClr val="F8FAFC"/>
           </a:solidFill>
           <a:ln>
             <a:noFill/>
@@ -6986,131 +7795,23 @@
       </p:sp>
       <p:sp>
         <p:nvSpPr>
-          <p:cNvPr id="3" name="TextBox 2"/>
-          <p:cNvSpPr txBox="1"/>
-          <p:nvPr/>
-        </p:nvSpPr>
-        <p:spPr>
-          <a:xfrm>
-            <a:off x="731520" y="365760"/>
-            <a:ext cx="10698480" cy="731520"/>
-          </a:xfrm>
-          <a:prstGeom prst="rect">
-            <a:avLst/>
-          </a:prstGeom>
-          <a:noFill/>
-        </p:spPr>
-        <p:txBody>
-          <a:bodyPr wrap="square">
-            <a:spAutoFit/>
-          </a:bodyPr>
-          <a:lstStyle/>
-          <a:p>
-            <a:pPr>
-              <a:defRPr sz="2600" b="1">
-                <a:solidFill>
-                  <a:srgbClr val="F8FAFC"/>
-                </a:solidFill>
-                <a:latin typeface="Arial"/>
-              </a:defRPr>
-            </a:pPr>
-            <a:r>
-              <a:t>Live System Test Results &amp; Output Showcase</a:t>
-            </a:r>
-          </a:p>
-        </p:txBody>
-      </p:sp>
-      <p:sp>
-        <p:nvSpPr>
-          <p:cNvPr id="4" name="TextBox 3"/>
-          <p:cNvSpPr txBox="1"/>
-          <p:nvPr/>
-        </p:nvSpPr>
-        <p:spPr>
-          <a:xfrm>
-            <a:off x="9601200" y="365760"/>
-            <a:ext cx="1828800" cy="457200"/>
-          </a:xfrm>
-          <a:prstGeom prst="rect">
-            <a:avLst/>
-          </a:prstGeom>
-          <a:noFill/>
-        </p:spPr>
-        <p:txBody>
-          <a:bodyPr wrap="none">
-            <a:spAutoFit/>
-          </a:bodyPr>
-          <a:lstStyle/>
-          <a:p>
-            <a:pPr algn="r">
-              <a:defRPr sz="1300" b="1">
-                <a:solidFill>
-                  <a:srgbClr val="6366F1"/>
-                </a:solidFill>
-              </a:defRPr>
-            </a:pPr>
-            <a:r>
-              <a:t>Slide 06/13</a:t>
-            </a:r>
-          </a:p>
-        </p:txBody>
-      </p:sp>
-      <p:sp>
-        <p:nvSpPr>
-          <p:cNvPr id="5" name="TextBox 4"/>
-          <p:cNvSpPr txBox="1"/>
-          <p:nvPr/>
-        </p:nvSpPr>
-        <p:spPr>
-          <a:xfrm>
-            <a:off x="731520" y="6309360"/>
-            <a:ext cx="10698480" cy="365760"/>
-          </a:xfrm>
-          <a:prstGeom prst="rect">
-            <a:avLst/>
-          </a:prstGeom>
-          <a:noFill/>
-        </p:spPr>
-        <p:txBody>
-          <a:bodyPr wrap="none">
-            <a:spAutoFit/>
-          </a:bodyPr>
-          <a:lstStyle/>
-          <a:p>
-            <a:pPr>
-              <a:defRPr sz="1000">
-                <a:solidFill>
-                  <a:srgbClr val="94A3B8"/>
-                </a:solidFill>
-              </a:defRPr>
-            </a:pPr>
-            <a:r>
-              <a:t>Sanjana Chirutha (STU ID: STU6817962b86d921746376235)  |  Edunet Foundation  |  AICTE  |  IBM SkillsBuild</a:t>
-            </a:r>
-          </a:p>
-        </p:txBody>
-      </p:sp>
-      <p:sp>
-        <p:nvSpPr>
-          <p:cNvPr id="6" name="Rounded Rectangle 5"/>
+          <p:cNvPr id="3" name="Rectangle 2"/>
           <p:cNvSpPr/>
           <p:nvPr/>
         </p:nvSpPr>
         <p:spPr>
           <a:xfrm>
-            <a:off x="731520" y="1371600"/>
-            <a:ext cx="10698480" cy="1645920"/>
-          </a:xfrm>
-          <a:prstGeom prst="roundRect">
+            <a:off x="0" y="0"/>
+            <a:ext cx="365760" cy="6858000"/>
+          </a:xfrm>
+          <a:prstGeom prst="rect">
             <a:avLst/>
           </a:prstGeom>
           <a:solidFill>
-            <a:srgbClr val="1E293B"/>
+            <a:srgbClr val="0284C7"/>
           </a:solidFill>
           <a:ln>
-            <a:solidFill>
-              <a:srgbClr val="FFFFFF"/>
-            </a:solidFill>
+            <a:noFill/>
           </a:ln>
         </p:spPr>
         <p:style>
@@ -7137,72 +7838,23 @@
       </p:sp>
       <p:sp>
         <p:nvSpPr>
-          <p:cNvPr id="7" name="TextBox 6"/>
-          <p:cNvSpPr txBox="1"/>
-          <p:nvPr/>
-        </p:nvSpPr>
-        <p:spPr>
-          <a:xfrm>
-            <a:off x="914400" y="1554480"/>
-            <a:ext cx="10332720" cy="1280160"/>
-          </a:xfrm>
-          <a:prstGeom prst="rect">
-            <a:avLst/>
-          </a:prstGeom>
-          <a:noFill/>
-        </p:spPr>
-        <p:txBody>
-          <a:bodyPr wrap="square">
-            <a:spAutoFit/>
-          </a:bodyPr>
-          <a:lstStyle/>
-          <a:p>
-            <a:pPr algn="ctr">
-              <a:defRPr sz="2600" b="1">
-                <a:solidFill>
-                  <a:srgbClr val="10B981"/>
-                </a:solidFill>
-              </a:defRPr>
-            </a:pPr>
-            <a:r>
-              <a:t>Candidate Annual Salary Prediction:  ₹ 13,555,746 / yr</a:t>
-            </a:r>
-          </a:p>
-          <a:p>
-            <a:pPr algn="ctr">
-              <a:defRPr sz="1600">
-                <a:solidFill>
-                  <a:srgbClr val="F8FAFC"/>
-                </a:solidFill>
-              </a:defRPr>
-            </a:pPr>
-            <a:r>
-              <a:t>Monthly Take-Home: ₹ 1,129,646 / mo   |   Hourly Rate: ₹ 6,517.19 / hr   |   Earning Percentile: Top 21%</a:t>
-            </a:r>
-          </a:p>
-        </p:txBody>
-      </p:sp>
-      <p:sp>
-        <p:nvSpPr>
-          <p:cNvPr id="8" name="Rounded Rectangle 7"/>
+          <p:cNvPr id="4" name="Rectangle 3"/>
           <p:cNvSpPr/>
           <p:nvPr/>
         </p:nvSpPr>
         <p:spPr>
           <a:xfrm>
-            <a:off x="731520" y="3291840"/>
-            <a:ext cx="5120640" cy="2560320"/>
-          </a:xfrm>
-          <a:prstGeom prst="roundRect">
+            <a:off x="365760" y="6583680"/>
+            <a:ext cx="11825935" cy="274320"/>
+          </a:xfrm>
+          <a:prstGeom prst="rect">
             <a:avLst/>
           </a:prstGeom>
           <a:solidFill>
-            <a:srgbClr val="152036"/>
+            <a:srgbClr val="1E3A8A"/>
           </a:solidFill>
           <a:ln>
-            <a:solidFill>
-              <a:srgbClr val="FFFFFF"/>
-            </a:solidFill>
+            <a:noFill/>
           </a:ln>
         </p:spPr>
         <p:style>
@@ -7229,14 +7881,14 @@
       </p:sp>
       <p:sp>
         <p:nvSpPr>
-          <p:cNvPr id="9" name="TextBox 8"/>
+          <p:cNvPr id="5" name="TextBox 4"/>
           <p:cNvSpPr txBox="1"/>
           <p:nvPr/>
         </p:nvSpPr>
         <p:spPr>
           <a:xfrm>
-            <a:off x="914400" y="3474720"/>
-            <a:ext cx="4754880" cy="2194560"/>
+            <a:off x="731520" y="365760"/>
+            <a:ext cx="9601200" cy="731520"/>
           </a:xfrm>
           <a:prstGeom prst="rect">
             <a:avLst/>
@@ -7250,98 +7902,109 @@
           <a:lstStyle/>
           <a:p>
             <a:pPr>
-              <a:defRPr sz="1800" b="1">
-                <a:solidFill>
-                  <a:srgbClr val="6366F1"/>
-                </a:solidFill>
-              </a:defRPr>
-            </a:pPr>
-            <a:r>
-              <a:t>Test Profile Parameters</a:t>
-            </a:r>
-          </a:p>
+              <a:defRPr sz="2600" b="1">
+                <a:solidFill>
+                  <a:srgbClr val="1E3A8A"/>
+                </a:solidFill>
+                <a:latin typeface="Helvetica"/>
+              </a:defRPr>
+            </a:pPr>
+            <a:r>
+              <a:t>Live System Test Results &amp; Output Showcase</a:t>
+            </a:r>
+          </a:p>
+        </p:txBody>
+      </p:sp>
+      <p:sp>
+        <p:nvSpPr>
+          <p:cNvPr id="6" name="TextBox 5"/>
+          <p:cNvSpPr txBox="1"/>
+          <p:nvPr/>
+        </p:nvSpPr>
+        <p:spPr>
+          <a:xfrm>
+            <a:off x="9601200" y="365760"/>
+            <a:ext cx="1828800" cy="457200"/>
+          </a:xfrm>
+          <a:prstGeom prst="rect">
+            <a:avLst/>
+          </a:prstGeom>
+          <a:noFill/>
+        </p:spPr>
+        <p:txBody>
+          <a:bodyPr wrap="none">
+            <a:spAutoFit/>
+          </a:bodyPr>
+          <a:lstStyle/>
+          <a:p>
+            <a:pPr algn="r">
+              <a:defRPr sz="1300" b="1">
+                <a:solidFill>
+                  <a:srgbClr val="0284C7"/>
+                </a:solidFill>
+              </a:defRPr>
+            </a:pPr>
+            <a:r>
+              <a:t>Slide 06/13</a:t>
+            </a:r>
+          </a:p>
+        </p:txBody>
+      </p:sp>
+      <p:sp>
+        <p:nvSpPr>
+          <p:cNvPr id="7" name="TextBox 6"/>
+          <p:cNvSpPr txBox="1"/>
+          <p:nvPr/>
+        </p:nvSpPr>
+        <p:spPr>
+          <a:xfrm>
+            <a:off x="731520" y="6601968"/>
+            <a:ext cx="10698480" cy="228600"/>
+          </a:xfrm>
+          <a:prstGeom prst="rect">
+            <a:avLst/>
+          </a:prstGeom>
+          <a:noFill/>
+        </p:spPr>
+        <p:txBody>
+          <a:bodyPr wrap="none">
+            <a:spAutoFit/>
+          </a:bodyPr>
+          <a:lstStyle/>
           <a:p>
             <a:pPr>
-              <a:defRPr sz="1300">
-                <a:solidFill>
-                  <a:srgbClr val="94A3B8"/>
-                </a:solidFill>
-              </a:defRPr>
-            </a:pPr>
-            <a:r>
-              <a:t>• Age / Exp: 20 yrs old | 2 yrs Work Experience</a:t>
-            </a:r>
-          </a:p>
-          <a:p>
-            <a:pPr>
-              <a:defRPr sz="1300">
-                <a:solidFill>
-                  <a:srgbClr val="94A3B8"/>
-                </a:solidFill>
-              </a:defRPr>
-            </a:pPr>
-            <a:r>
-              <a:t>• Education: Master's Degree</a:t>
-            </a:r>
-          </a:p>
-          <a:p>
-            <a:pPr>
-              <a:defRPr sz="1300">
-                <a:solidFill>
-                  <a:srgbClr val="94A3B8"/>
-                </a:solidFill>
-              </a:defRPr>
-            </a:pPr>
-            <a:r>
-              <a:t>• Occupation: Data Science &amp; AI / ML</a:t>
-            </a:r>
-          </a:p>
-          <a:p>
-            <a:pPr>
-              <a:defRPr sz="1300">
-                <a:solidFill>
-                  <a:srgbClr val="94A3B8"/>
-                </a:solidFill>
-              </a:defRPr>
-            </a:pPr>
-            <a:r>
-              <a:t>• Work Mode / Size: Fully Remote | Mid-Size</a:t>
-            </a:r>
-          </a:p>
-          <a:p>
-            <a:pPr>
-              <a:defRPr sz="1300">
-                <a:solidFill>
-                  <a:srgbClr val="94A3B8"/>
-                </a:solidFill>
-              </a:defRPr>
-            </a:pPr>
-            <a:r>
-              <a:t>• Market Benchmark: Global Remote Benchmark</a:t>
-            </a:r>
-          </a:p>
-        </p:txBody>
-      </p:sp>
-      <p:sp>
-        <p:nvSpPr>
-          <p:cNvPr id="10" name="Rounded Rectangle 9"/>
+              <a:defRPr sz="1000">
+                <a:solidFill>
+                  <a:srgbClr val="FFFFFF"/>
+                </a:solidFill>
+              </a:defRPr>
+            </a:pPr>
+            <a:r>
+              <a:t>Sanjana Chirutha (STU ID: STU6817962b86d921746376235)  |  Edunet Foundation  |  AICTE  |  IBM SkillsBuild</a:t>
+            </a:r>
+          </a:p>
+        </p:txBody>
+      </p:sp>
+      <p:sp>
+        <p:nvSpPr>
+          <p:cNvPr id="8" name="Rounded Rectangle 7"/>
           <p:cNvSpPr/>
           <p:nvPr/>
         </p:nvSpPr>
         <p:spPr>
           <a:xfrm>
-            <a:off x="6217920" y="3291840"/>
-            <a:ext cx="5212080" cy="2560320"/>
+            <a:off x="731520" y="1371600"/>
+            <a:ext cx="10698480" cy="1645920"/>
           </a:xfrm>
           <a:prstGeom prst="roundRect">
             <a:avLst/>
           </a:prstGeom>
           <a:solidFill>
-            <a:srgbClr val="152036"/>
+            <a:srgbClr val="E0F2FE"/>
           </a:solidFill>
           <a:ln>
             <a:solidFill>
-              <a:srgbClr val="FFFFFF"/>
+              <a:srgbClr val="CBD5E1"/>
             </a:solidFill>
           </a:ln>
         </p:spPr>
@@ -7369,14 +8032,14 @@
       </p:sp>
       <p:sp>
         <p:nvSpPr>
-          <p:cNvPr id="11" name="TextBox 10"/>
+          <p:cNvPr id="9" name="TextBox 8"/>
           <p:cNvSpPr txBox="1"/>
           <p:nvPr/>
         </p:nvSpPr>
         <p:spPr>
           <a:xfrm>
-            <a:off x="6400800" y="3474720"/>
-            <a:ext cx="4846320" cy="2194560"/>
+            <a:off x="914400" y="1554480"/>
+            <a:ext cx="10332720" cy="1280160"/>
           </a:xfrm>
           <a:prstGeom prst="rect">
             <a:avLst/>
@@ -7389,70 +8052,302 @@
           </a:bodyPr>
           <a:lstStyle/>
           <a:p>
+            <a:pPr algn="ctr">
+              <a:defRPr sz="2400" b="1">
+                <a:solidFill>
+                  <a:srgbClr val="1E3A8A"/>
+                </a:solidFill>
+              </a:defRPr>
+            </a:pPr>
+            <a:r>
+              <a:t>Candidate Annual Salary Prediction:  ₹ 13,555,746 / yr</a:t>
+            </a:r>
+          </a:p>
+          <a:p>
+            <a:pPr algn="ctr">
+              <a:defRPr sz="1500">
+                <a:solidFill>
+                  <a:srgbClr val="0F172A"/>
+                </a:solidFill>
+              </a:defRPr>
+            </a:pPr>
+            <a:r>
+              <a:t>Monthly Take-Home: ₹ 1,129,646 / mo   |   Hourly Rate: ₹ 6,517.19 / hr   |   Earning Percentile: Top 21%</a:t>
+            </a:r>
+          </a:p>
+        </p:txBody>
+      </p:sp>
+      <p:sp>
+        <p:nvSpPr>
+          <p:cNvPr id="10" name="Rounded Rectangle 9"/>
+          <p:cNvSpPr/>
+          <p:nvPr/>
+        </p:nvSpPr>
+        <p:spPr>
+          <a:xfrm>
+            <a:off x="731520" y="3291840"/>
+            <a:ext cx="5120640" cy="2743200"/>
+          </a:xfrm>
+          <a:prstGeom prst="roundRect">
+            <a:avLst/>
+          </a:prstGeom>
+          <a:solidFill>
+            <a:srgbClr val="F1F5F9"/>
+          </a:solidFill>
+          <a:ln>
+            <a:solidFill>
+              <a:srgbClr val="CBD5E1"/>
+            </a:solidFill>
+          </a:ln>
+        </p:spPr>
+        <p:style>
+          <a:lnRef idx="1">
+            <a:schemeClr val="accent1"/>
+          </a:lnRef>
+          <a:fillRef idx="3">
+            <a:schemeClr val="accent1"/>
+          </a:fillRef>
+          <a:effectRef idx="2">
+            <a:schemeClr val="accent1"/>
+          </a:effectRef>
+          <a:fontRef idx="minor">
+            <a:schemeClr val="lt1"/>
+          </a:fontRef>
+        </p:style>
+        <p:txBody>
+          <a:bodyPr rtlCol="0" anchor="ctr"/>
+          <a:lstStyle/>
+          <a:p>
+            <a:pPr algn="ctr"/>
+          </a:p>
+        </p:txBody>
+      </p:sp>
+      <p:sp>
+        <p:nvSpPr>
+          <p:cNvPr id="11" name="TextBox 10"/>
+          <p:cNvSpPr txBox="1"/>
+          <p:nvPr/>
+        </p:nvSpPr>
+        <p:spPr>
+          <a:xfrm>
+            <a:off x="914400" y="3474720"/>
+            <a:ext cx="4754880" cy="2377440"/>
+          </a:xfrm>
+          <a:prstGeom prst="rect">
+            <a:avLst/>
+          </a:prstGeom>
+          <a:noFill/>
+        </p:spPr>
+        <p:txBody>
+          <a:bodyPr wrap="square">
+            <a:spAutoFit/>
+          </a:bodyPr>
+          <a:lstStyle/>
+          <a:p>
             <a:pPr>
-              <a:defRPr sz="1800" b="1">
-                <a:solidFill>
-                  <a:srgbClr val="6366F1"/>
-                </a:solidFill>
-              </a:defRPr>
-            </a:pPr>
-            <a:r>
-              <a:t>Model Confidence &amp; Impact Drivers</a:t>
+              <a:defRPr sz="1700" b="1">
+                <a:solidFill>
+                  <a:srgbClr val="1E3A8A"/>
+                </a:solidFill>
+              </a:defRPr>
+            </a:pPr>
+            <a:r>
+              <a:t>Test Profile Parameters</a:t>
             </a:r>
           </a:p>
           <a:p>
             <a:pPr>
               <a:defRPr sz="1300">
                 <a:solidFill>
-                  <a:srgbClr val="94A3B8"/>
-                </a:solidFill>
-              </a:defRPr>
-            </a:pPr>
-            <a:r>
-              <a:t>• 95% Confidence Min: ₹ 11,115,712</a:t>
+                  <a:srgbClr val="475569"/>
+                </a:solidFill>
+              </a:defRPr>
+            </a:pPr>
+            <a:r>
+              <a:t>• Age / Exp: 20 yrs old | 2 yrs Work Experience</a:t>
             </a:r>
           </a:p>
           <a:p>
             <a:pPr>
               <a:defRPr sz="1300">
                 <a:solidFill>
-                  <a:srgbClr val="94A3B8"/>
-                </a:solidFill>
-              </a:defRPr>
-            </a:pPr>
-            <a:r>
-              <a:t>• 95% Confidence Max: ₹ 16,538,010</a:t>
+                  <a:srgbClr val="475569"/>
+                </a:solidFill>
+              </a:defRPr>
+            </a:pPr>
+            <a:r>
+              <a:t>• Education: Master's Degree</a:t>
             </a:r>
           </a:p>
           <a:p>
             <a:pPr>
               <a:defRPr sz="1300">
                 <a:solidFill>
-                  <a:srgbClr val="94A3B8"/>
-                </a:solidFill>
-              </a:defRPr>
-            </a:pPr>
-            <a:r>
-              <a:t>• Primary Key Driver: Occupation Level (+₹ 4,008,000)</a:t>
+                  <a:srgbClr val="475569"/>
+                </a:solidFill>
+              </a:defRPr>
+            </a:pPr>
+            <a:r>
+              <a:t>• Occupation: Data Science &amp; AI / ML</a:t>
             </a:r>
           </a:p>
           <a:p>
             <a:pPr>
               <a:defRPr sz="1300">
                 <a:solidFill>
-                  <a:srgbClr val="94A3B8"/>
-                </a:solidFill>
-              </a:defRPr>
-            </a:pPr>
-            <a:r>
-              <a:t>• Experience Trajectory: Non-linear logarithmic growth curve</a:t>
+                  <a:srgbClr val="475569"/>
+                </a:solidFill>
+              </a:defRPr>
+            </a:pPr>
+            <a:r>
+              <a:t>• Work Mode / Size: Fully Remote | Mid-Size</a:t>
             </a:r>
           </a:p>
           <a:p>
             <a:pPr>
               <a:defRPr sz="1300">
                 <a:solidFill>
-                  <a:srgbClr val="94A3B8"/>
+                  <a:srgbClr val="475569"/>
+                </a:solidFill>
+              </a:defRPr>
+            </a:pPr>
+            <a:r>
+              <a:t>• Market Benchmark: Global Remote Benchmark</a:t>
+            </a:r>
+          </a:p>
+        </p:txBody>
+      </p:sp>
+      <p:sp>
+        <p:nvSpPr>
+          <p:cNvPr id="12" name="Rounded Rectangle 11"/>
+          <p:cNvSpPr/>
+          <p:nvPr/>
+        </p:nvSpPr>
+        <p:spPr>
+          <a:xfrm>
+            <a:off x="6217920" y="3291840"/>
+            <a:ext cx="5212080" cy="2743200"/>
+          </a:xfrm>
+          <a:prstGeom prst="roundRect">
+            <a:avLst/>
+          </a:prstGeom>
+          <a:solidFill>
+            <a:srgbClr val="F1F5F9"/>
+          </a:solidFill>
+          <a:ln>
+            <a:solidFill>
+              <a:srgbClr val="CBD5E1"/>
+            </a:solidFill>
+          </a:ln>
+        </p:spPr>
+        <p:style>
+          <a:lnRef idx="1">
+            <a:schemeClr val="accent1"/>
+          </a:lnRef>
+          <a:fillRef idx="3">
+            <a:schemeClr val="accent1"/>
+          </a:fillRef>
+          <a:effectRef idx="2">
+            <a:schemeClr val="accent1"/>
+          </a:effectRef>
+          <a:fontRef idx="minor">
+            <a:schemeClr val="lt1"/>
+          </a:fontRef>
+        </p:style>
+        <p:txBody>
+          <a:bodyPr rtlCol="0" anchor="ctr"/>
+          <a:lstStyle/>
+          <a:p>
+            <a:pPr algn="ctr"/>
+          </a:p>
+        </p:txBody>
+      </p:sp>
+      <p:sp>
+        <p:nvSpPr>
+          <p:cNvPr id="13" name="TextBox 12"/>
+          <p:cNvSpPr txBox="1"/>
+          <p:nvPr/>
+        </p:nvSpPr>
+        <p:spPr>
+          <a:xfrm>
+            <a:off x="6400800" y="3474720"/>
+            <a:ext cx="4846320" cy="2377440"/>
+          </a:xfrm>
+          <a:prstGeom prst="rect">
+            <a:avLst/>
+          </a:prstGeom>
+          <a:noFill/>
+        </p:spPr>
+        <p:txBody>
+          <a:bodyPr wrap="square">
+            <a:spAutoFit/>
+          </a:bodyPr>
+          <a:lstStyle/>
+          <a:p>
+            <a:pPr>
+              <a:defRPr sz="1700" b="1">
+                <a:solidFill>
+                  <a:srgbClr val="1E3A8A"/>
+                </a:solidFill>
+              </a:defRPr>
+            </a:pPr>
+            <a:r>
+              <a:t>Model Confidence &amp; Impact Drivers</a:t>
+            </a:r>
+          </a:p>
+          <a:p>
+            <a:pPr>
+              <a:defRPr sz="1300">
+                <a:solidFill>
+                  <a:srgbClr val="475569"/>
+                </a:solidFill>
+              </a:defRPr>
+            </a:pPr>
+            <a:r>
+              <a:t>• 95% Confidence Min: ₹ 11,115,712</a:t>
+            </a:r>
+          </a:p>
+          <a:p>
+            <a:pPr>
+              <a:defRPr sz="1300">
+                <a:solidFill>
+                  <a:srgbClr val="475569"/>
+                </a:solidFill>
+              </a:defRPr>
+            </a:pPr>
+            <a:r>
+              <a:t>• 95% Confidence Max: ₹ 16,538,010</a:t>
+            </a:r>
+          </a:p>
+          <a:p>
+            <a:pPr>
+              <a:defRPr sz="1300">
+                <a:solidFill>
+                  <a:srgbClr val="475569"/>
+                </a:solidFill>
+              </a:defRPr>
+            </a:pPr>
+            <a:r>
+              <a:t>• Primary Key Driver: Occupation Level (+₹ 4,008,000)</a:t>
+            </a:r>
+          </a:p>
+          <a:p>
+            <a:pPr>
+              <a:defRPr sz="1300">
+                <a:solidFill>
+                  <a:srgbClr val="475569"/>
+                </a:solidFill>
+              </a:defRPr>
+            </a:pPr>
+            <a:r>
+              <a:t>• Experience Trajectory: Non-linear logarithmic growth curve</a:t>
+            </a:r>
+          </a:p>
+          <a:p>
+            <a:pPr>
+              <a:defRPr sz="1300">
+                <a:solidFill>
+                  <a:srgbClr val="475569"/>
                 </a:solidFill>
               </a:defRPr>
             </a:pPr>
@@ -7495,7 +8390,7 @@
             <a:avLst/>
           </a:prstGeom>
           <a:solidFill>
-            <a:srgbClr val="090D16"/>
+            <a:srgbClr val="F8FAFC"/>
           </a:solidFill>
           <a:ln>
             <a:noFill/>
@@ -7525,131 +8420,23 @@
       </p:sp>
       <p:sp>
         <p:nvSpPr>
-          <p:cNvPr id="3" name="TextBox 2"/>
-          <p:cNvSpPr txBox="1"/>
-          <p:nvPr/>
-        </p:nvSpPr>
-        <p:spPr>
-          <a:xfrm>
-            <a:off x="731520" y="365760"/>
-            <a:ext cx="10698480" cy="731520"/>
-          </a:xfrm>
-          <a:prstGeom prst="rect">
-            <a:avLst/>
-          </a:prstGeom>
-          <a:noFill/>
-        </p:spPr>
-        <p:txBody>
-          <a:bodyPr wrap="square">
-            <a:spAutoFit/>
-          </a:bodyPr>
-          <a:lstStyle/>
-          <a:p>
-            <a:pPr>
-              <a:defRPr sz="2600" b="1">
-                <a:solidFill>
-                  <a:srgbClr val="F8FAFC"/>
-                </a:solidFill>
-                <a:latin typeface="Arial"/>
-              </a:defRPr>
-            </a:pPr>
-            <a:r>
-              <a:t>Explainable AI &amp; SHAP Feature Attribution</a:t>
-            </a:r>
-          </a:p>
-        </p:txBody>
-      </p:sp>
-      <p:sp>
-        <p:nvSpPr>
-          <p:cNvPr id="4" name="TextBox 3"/>
-          <p:cNvSpPr txBox="1"/>
-          <p:nvPr/>
-        </p:nvSpPr>
-        <p:spPr>
-          <a:xfrm>
-            <a:off x="9601200" y="365760"/>
-            <a:ext cx="1828800" cy="457200"/>
-          </a:xfrm>
-          <a:prstGeom prst="rect">
-            <a:avLst/>
-          </a:prstGeom>
-          <a:noFill/>
-        </p:spPr>
-        <p:txBody>
-          <a:bodyPr wrap="none">
-            <a:spAutoFit/>
-          </a:bodyPr>
-          <a:lstStyle/>
-          <a:p>
-            <a:pPr algn="r">
-              <a:defRPr sz="1300" b="1">
-                <a:solidFill>
-                  <a:srgbClr val="6366F1"/>
-                </a:solidFill>
-              </a:defRPr>
-            </a:pPr>
-            <a:r>
-              <a:t>Slide 07/13</a:t>
-            </a:r>
-          </a:p>
-        </p:txBody>
-      </p:sp>
-      <p:sp>
-        <p:nvSpPr>
-          <p:cNvPr id="5" name="TextBox 4"/>
-          <p:cNvSpPr txBox="1"/>
-          <p:nvPr/>
-        </p:nvSpPr>
-        <p:spPr>
-          <a:xfrm>
-            <a:off x="731520" y="6309360"/>
-            <a:ext cx="10698480" cy="365760"/>
-          </a:xfrm>
-          <a:prstGeom prst="rect">
-            <a:avLst/>
-          </a:prstGeom>
-          <a:noFill/>
-        </p:spPr>
-        <p:txBody>
-          <a:bodyPr wrap="none">
-            <a:spAutoFit/>
-          </a:bodyPr>
-          <a:lstStyle/>
-          <a:p>
-            <a:pPr>
-              <a:defRPr sz="1000">
-                <a:solidFill>
-                  <a:srgbClr val="94A3B8"/>
-                </a:solidFill>
-              </a:defRPr>
-            </a:pPr>
-            <a:r>
-              <a:t>Sanjana Chirutha (STU ID: STU6817962b86d921746376235)  |  Edunet Foundation  |  AICTE  |  IBM SkillsBuild</a:t>
-            </a:r>
-          </a:p>
-        </p:txBody>
-      </p:sp>
-      <p:sp>
-        <p:nvSpPr>
-          <p:cNvPr id="6" name="Rounded Rectangle 5"/>
+          <p:cNvPr id="3" name="Rectangle 2"/>
           <p:cNvSpPr/>
           <p:nvPr/>
         </p:nvSpPr>
         <p:spPr>
           <a:xfrm>
-            <a:off x="731520" y="1371600"/>
-            <a:ext cx="10698480" cy="4389120"/>
-          </a:xfrm>
-          <a:prstGeom prst="roundRect">
+            <a:off x="0" y="0"/>
+            <a:ext cx="365760" cy="6858000"/>
+          </a:xfrm>
+          <a:prstGeom prst="rect">
             <a:avLst/>
           </a:prstGeom>
           <a:solidFill>
-            <a:srgbClr val="152036"/>
+            <a:srgbClr val="0284C7"/>
           </a:solidFill>
           <a:ln>
-            <a:solidFill>
-              <a:srgbClr val="FFFFFF"/>
-            </a:solidFill>
+            <a:noFill/>
           </a:ln>
         </p:spPr>
         <p:style>
@@ -7676,14 +8463,57 @@
       </p:sp>
       <p:sp>
         <p:nvSpPr>
-          <p:cNvPr id="7" name="TextBox 6"/>
+          <p:cNvPr id="4" name="Rectangle 3"/>
+          <p:cNvSpPr/>
+          <p:nvPr/>
+        </p:nvSpPr>
+        <p:spPr>
+          <a:xfrm>
+            <a:off x="365760" y="6583680"/>
+            <a:ext cx="11825935" cy="274320"/>
+          </a:xfrm>
+          <a:prstGeom prst="rect">
+            <a:avLst/>
+          </a:prstGeom>
+          <a:solidFill>
+            <a:srgbClr val="1E3A8A"/>
+          </a:solidFill>
+          <a:ln>
+            <a:noFill/>
+          </a:ln>
+        </p:spPr>
+        <p:style>
+          <a:lnRef idx="1">
+            <a:schemeClr val="accent1"/>
+          </a:lnRef>
+          <a:fillRef idx="3">
+            <a:schemeClr val="accent1"/>
+          </a:fillRef>
+          <a:effectRef idx="2">
+            <a:schemeClr val="accent1"/>
+          </a:effectRef>
+          <a:fontRef idx="minor">
+            <a:schemeClr val="lt1"/>
+          </a:fontRef>
+        </p:style>
+        <p:txBody>
+          <a:bodyPr rtlCol="0" anchor="ctr"/>
+          <a:lstStyle/>
+          <a:p>
+            <a:pPr algn="ctr"/>
+          </a:p>
+        </p:txBody>
+      </p:sp>
+      <p:sp>
+        <p:nvSpPr>
+          <p:cNvPr id="5" name="TextBox 4"/>
           <p:cNvSpPr txBox="1"/>
           <p:nvPr/>
         </p:nvSpPr>
         <p:spPr>
           <a:xfrm>
-            <a:off x="1005840" y="1554480"/>
-            <a:ext cx="10149840" cy="4023360"/>
+            <a:off x="731520" y="365760"/>
+            <a:ext cx="9601200" cy="731520"/>
           </a:xfrm>
           <a:prstGeom prst="rect">
             <a:avLst/>
@@ -7697,9 +8527,160 @@
           <a:lstStyle/>
           <a:p>
             <a:pPr>
+              <a:defRPr sz="2600" b="1">
+                <a:solidFill>
+                  <a:srgbClr val="1E3A8A"/>
+                </a:solidFill>
+                <a:latin typeface="Helvetica"/>
+              </a:defRPr>
+            </a:pPr>
+            <a:r>
+              <a:t>Explainable AI &amp; SHAP Feature Attribution</a:t>
+            </a:r>
+          </a:p>
+        </p:txBody>
+      </p:sp>
+      <p:sp>
+        <p:nvSpPr>
+          <p:cNvPr id="6" name="TextBox 5"/>
+          <p:cNvSpPr txBox="1"/>
+          <p:nvPr/>
+        </p:nvSpPr>
+        <p:spPr>
+          <a:xfrm>
+            <a:off x="9601200" y="365760"/>
+            <a:ext cx="1828800" cy="457200"/>
+          </a:xfrm>
+          <a:prstGeom prst="rect">
+            <a:avLst/>
+          </a:prstGeom>
+          <a:noFill/>
+        </p:spPr>
+        <p:txBody>
+          <a:bodyPr wrap="none">
+            <a:spAutoFit/>
+          </a:bodyPr>
+          <a:lstStyle/>
+          <a:p>
+            <a:pPr algn="r">
+              <a:defRPr sz="1300" b="1">
+                <a:solidFill>
+                  <a:srgbClr val="0284C7"/>
+                </a:solidFill>
+              </a:defRPr>
+            </a:pPr>
+            <a:r>
+              <a:t>Slide 07/13</a:t>
+            </a:r>
+          </a:p>
+        </p:txBody>
+      </p:sp>
+      <p:sp>
+        <p:nvSpPr>
+          <p:cNvPr id="7" name="TextBox 6"/>
+          <p:cNvSpPr txBox="1"/>
+          <p:nvPr/>
+        </p:nvSpPr>
+        <p:spPr>
+          <a:xfrm>
+            <a:off x="731520" y="6601968"/>
+            <a:ext cx="10698480" cy="228600"/>
+          </a:xfrm>
+          <a:prstGeom prst="rect">
+            <a:avLst/>
+          </a:prstGeom>
+          <a:noFill/>
+        </p:spPr>
+        <p:txBody>
+          <a:bodyPr wrap="none">
+            <a:spAutoFit/>
+          </a:bodyPr>
+          <a:lstStyle/>
+          <a:p>
+            <a:pPr>
+              <a:defRPr sz="1000">
+                <a:solidFill>
+                  <a:srgbClr val="FFFFFF"/>
+                </a:solidFill>
+              </a:defRPr>
+            </a:pPr>
+            <a:r>
+              <a:t>Sanjana Chirutha (STU ID: STU6817962b86d921746376235)  |  Edunet Foundation  |  AICTE  |  IBM SkillsBuild</a:t>
+            </a:r>
+          </a:p>
+        </p:txBody>
+      </p:sp>
+      <p:sp>
+        <p:nvSpPr>
+          <p:cNvPr id="8" name="Rounded Rectangle 7"/>
+          <p:cNvSpPr/>
+          <p:nvPr/>
+        </p:nvSpPr>
+        <p:spPr>
+          <a:xfrm>
+            <a:off x="731520" y="1371600"/>
+            <a:ext cx="10698480" cy="4754880"/>
+          </a:xfrm>
+          <a:prstGeom prst="roundRect">
+            <a:avLst/>
+          </a:prstGeom>
+          <a:solidFill>
+            <a:srgbClr val="F1F5F9"/>
+          </a:solidFill>
+          <a:ln>
+            <a:solidFill>
+              <a:srgbClr val="CBD5E1"/>
+            </a:solidFill>
+          </a:ln>
+        </p:spPr>
+        <p:style>
+          <a:lnRef idx="1">
+            <a:schemeClr val="accent1"/>
+          </a:lnRef>
+          <a:fillRef idx="3">
+            <a:schemeClr val="accent1"/>
+          </a:fillRef>
+          <a:effectRef idx="2">
+            <a:schemeClr val="accent1"/>
+          </a:effectRef>
+          <a:fontRef idx="minor">
+            <a:schemeClr val="lt1"/>
+          </a:fontRef>
+        </p:style>
+        <p:txBody>
+          <a:bodyPr rtlCol="0" anchor="ctr"/>
+          <a:lstStyle/>
+          <a:p>
+            <a:pPr algn="ctr"/>
+          </a:p>
+        </p:txBody>
+      </p:sp>
+      <p:sp>
+        <p:nvSpPr>
+          <p:cNvPr id="9" name="TextBox 8"/>
+          <p:cNvSpPr txBox="1"/>
+          <p:nvPr/>
+        </p:nvSpPr>
+        <p:spPr>
+          <a:xfrm>
+            <a:off x="1005840" y="1554480"/>
+            <a:ext cx="10149840" cy="4389120"/>
+          </a:xfrm>
+          <a:prstGeom prst="rect">
+            <a:avLst/>
+          </a:prstGeom>
+          <a:noFill/>
+        </p:spPr>
+        <p:txBody>
+          <a:bodyPr wrap="square">
+            <a:spAutoFit/>
+          </a:bodyPr>
+          <a:lstStyle/>
+          <a:p>
+            <a:pPr>
               <a:defRPr sz="2000" b="1">
                 <a:solidFill>
-                  <a:srgbClr val="10B981"/>
+                  <a:srgbClr val="1E3A8A"/>
                 </a:solidFill>
               </a:defRPr>
             </a:pPr>
@@ -7709,9 +8690,9 @@
           </a:p>
           <a:p>
             <a:pPr>
-              <a:defRPr sz="1500">
-                <a:solidFill>
-                  <a:srgbClr val="F8FAFC"/>
+              <a:defRPr sz="1400">
+                <a:solidFill>
+                  <a:srgbClr val="0F172A"/>
                 </a:solidFill>
               </a:defRPr>
             </a:pPr>
@@ -7721,9 +8702,9 @@
           </a:p>
           <a:p>
             <a:pPr>
-              <a:defRPr sz="1500">
-                <a:solidFill>
-                  <a:srgbClr val="F8FAFC"/>
+              <a:defRPr sz="1400">
+                <a:solidFill>
+                  <a:srgbClr val="0F172A"/>
                 </a:solidFill>
               </a:defRPr>
             </a:pPr>
@@ -7733,9 +8714,9 @@
           </a:p>
           <a:p>
             <a:pPr>
-              <a:defRPr sz="1500">
-                <a:solidFill>
-                  <a:srgbClr val="F8FAFC"/>
+              <a:defRPr sz="1400">
+                <a:solidFill>
+                  <a:srgbClr val="0F172A"/>
                 </a:solidFill>
               </a:defRPr>
             </a:pPr>
@@ -7745,9 +8726,9 @@
           </a:p>
           <a:p>
             <a:pPr>
-              <a:defRPr sz="1500">
-                <a:solidFill>
-                  <a:srgbClr val="F8FAFC"/>
+              <a:defRPr sz="1400">
+                <a:solidFill>
+                  <a:srgbClr val="0F172A"/>
                 </a:solidFill>
               </a:defRPr>
             </a:pPr>
@@ -7757,9 +8738,9 @@
           </a:p>
           <a:p>
             <a:pPr>
-              <a:defRPr sz="1500">
-                <a:solidFill>
-                  <a:srgbClr val="F8FAFC"/>
+              <a:defRPr sz="1400">
+                <a:solidFill>
+                  <a:srgbClr val="0F172A"/>
                 </a:solidFill>
               </a:defRPr>
             </a:pPr>
@@ -7802,7 +8783,7 @@
             <a:avLst/>
           </a:prstGeom>
           <a:solidFill>
-            <a:srgbClr val="090D16"/>
+            <a:srgbClr val="F8FAFC"/>
           </a:solidFill>
           <a:ln>
             <a:noFill/>
@@ -7832,131 +8813,23 @@
       </p:sp>
       <p:sp>
         <p:nvSpPr>
-          <p:cNvPr id="3" name="TextBox 2"/>
-          <p:cNvSpPr txBox="1"/>
-          <p:nvPr/>
-        </p:nvSpPr>
-        <p:spPr>
-          <a:xfrm>
-            <a:off x="731520" y="365760"/>
-            <a:ext cx="10698480" cy="731520"/>
-          </a:xfrm>
-          <a:prstGeom prst="rect">
-            <a:avLst/>
-          </a:prstGeom>
-          <a:noFill/>
-        </p:spPr>
-        <p:txBody>
-          <a:bodyPr wrap="square">
-            <a:spAutoFit/>
-          </a:bodyPr>
-          <a:lstStyle/>
-          <a:p>
-            <a:pPr>
-              <a:defRPr sz="2600" b="1">
-                <a:solidFill>
-                  <a:srgbClr val="F8FAFC"/>
-                </a:solidFill>
-                <a:latin typeface="Arial"/>
-              </a:defRPr>
-            </a:pPr>
-            <a:r>
-              <a:t>Technology Stack &amp; Architecture Matrix</a:t>
-            </a:r>
-          </a:p>
-        </p:txBody>
-      </p:sp>
-      <p:sp>
-        <p:nvSpPr>
-          <p:cNvPr id="4" name="TextBox 3"/>
-          <p:cNvSpPr txBox="1"/>
-          <p:nvPr/>
-        </p:nvSpPr>
-        <p:spPr>
-          <a:xfrm>
-            <a:off x="9601200" y="365760"/>
-            <a:ext cx="1828800" cy="457200"/>
-          </a:xfrm>
-          <a:prstGeom prst="rect">
-            <a:avLst/>
-          </a:prstGeom>
-          <a:noFill/>
-        </p:spPr>
-        <p:txBody>
-          <a:bodyPr wrap="none">
-            <a:spAutoFit/>
-          </a:bodyPr>
-          <a:lstStyle/>
-          <a:p>
-            <a:pPr algn="r">
-              <a:defRPr sz="1300" b="1">
-                <a:solidFill>
-                  <a:srgbClr val="6366F1"/>
-                </a:solidFill>
-              </a:defRPr>
-            </a:pPr>
-            <a:r>
-              <a:t>Slide 08/13</a:t>
-            </a:r>
-          </a:p>
-        </p:txBody>
-      </p:sp>
-      <p:sp>
-        <p:nvSpPr>
-          <p:cNvPr id="5" name="TextBox 4"/>
-          <p:cNvSpPr txBox="1"/>
-          <p:nvPr/>
-        </p:nvSpPr>
-        <p:spPr>
-          <a:xfrm>
-            <a:off x="731520" y="6309360"/>
-            <a:ext cx="10698480" cy="365760"/>
-          </a:xfrm>
-          <a:prstGeom prst="rect">
-            <a:avLst/>
-          </a:prstGeom>
-          <a:noFill/>
-        </p:spPr>
-        <p:txBody>
-          <a:bodyPr wrap="none">
-            <a:spAutoFit/>
-          </a:bodyPr>
-          <a:lstStyle/>
-          <a:p>
-            <a:pPr>
-              <a:defRPr sz="1000">
-                <a:solidFill>
-                  <a:srgbClr val="94A3B8"/>
-                </a:solidFill>
-              </a:defRPr>
-            </a:pPr>
-            <a:r>
-              <a:t>Sanjana Chirutha (STU ID: STU6817962b86d921746376235)  |  Edunet Foundation  |  AICTE  |  IBM SkillsBuild</a:t>
-            </a:r>
-          </a:p>
-        </p:txBody>
-      </p:sp>
-      <p:sp>
-        <p:nvSpPr>
-          <p:cNvPr id="6" name="Rounded Rectangle 5"/>
+          <p:cNvPr id="3" name="Rectangle 2"/>
           <p:cNvSpPr/>
           <p:nvPr/>
         </p:nvSpPr>
         <p:spPr>
           <a:xfrm>
-            <a:off x="731520" y="1463040"/>
-            <a:ext cx="10698480" cy="1280160"/>
-          </a:xfrm>
-          <a:prstGeom prst="roundRect">
+            <a:off x="0" y="0"/>
+            <a:ext cx="365760" cy="6858000"/>
+          </a:xfrm>
+          <a:prstGeom prst="rect">
             <a:avLst/>
           </a:prstGeom>
           <a:solidFill>
-            <a:srgbClr val="152036"/>
+            <a:srgbClr val="0284C7"/>
           </a:solidFill>
           <a:ln>
-            <a:solidFill>
-              <a:srgbClr val="FFFFFF"/>
-            </a:solidFill>
+            <a:noFill/>
           </a:ln>
         </p:spPr>
         <p:style>
@@ -7983,72 +8856,23 @@
       </p:sp>
       <p:sp>
         <p:nvSpPr>
-          <p:cNvPr id="7" name="TextBox 6"/>
-          <p:cNvSpPr txBox="1"/>
-          <p:nvPr/>
-        </p:nvSpPr>
-        <p:spPr>
-          <a:xfrm>
-            <a:off x="1005840" y="1645920"/>
-            <a:ext cx="10149840" cy="914400"/>
-          </a:xfrm>
-          <a:prstGeom prst="rect">
-            <a:avLst/>
-          </a:prstGeom>
-          <a:noFill/>
-        </p:spPr>
-        <p:txBody>
-          <a:bodyPr wrap="square">
-            <a:spAutoFit/>
-          </a:bodyPr>
-          <a:lstStyle/>
-          <a:p>
-            <a:pPr>
-              <a:defRPr sz="2000" b="1">
-                <a:solidFill>
-                  <a:srgbClr val="6366F1"/>
-                </a:solidFill>
-              </a:defRPr>
-            </a:pPr>
-            <a:r>
-              <a:t>Machine Learning</a:t>
-            </a:r>
-          </a:p>
-          <a:p>
-            <a:pPr>
-              <a:defRPr sz="1500">
-                <a:solidFill>
-                  <a:srgbClr val="F8FAFC"/>
-                </a:solidFill>
-              </a:defRPr>
-            </a:pPr>
-            <a:r>
-              <a:t>Python 3.12, Scikit-Learn, XGBoost, Pandas, NumPy, Joblib</a:t>
-            </a:r>
-          </a:p>
-        </p:txBody>
-      </p:sp>
-      <p:sp>
-        <p:nvSpPr>
-          <p:cNvPr id="8" name="Rounded Rectangle 7"/>
+          <p:cNvPr id="4" name="Rectangle 3"/>
           <p:cNvSpPr/>
           <p:nvPr/>
         </p:nvSpPr>
         <p:spPr>
           <a:xfrm>
-            <a:off x="731520" y="2971800"/>
-            <a:ext cx="10698480" cy="1280160"/>
-          </a:xfrm>
-          <a:prstGeom prst="roundRect">
+            <a:off x="365760" y="6583680"/>
+            <a:ext cx="11825935" cy="274320"/>
+          </a:xfrm>
+          <a:prstGeom prst="rect">
             <a:avLst/>
           </a:prstGeom>
           <a:solidFill>
-            <a:srgbClr val="152036"/>
+            <a:srgbClr val="1E3A8A"/>
           </a:solidFill>
           <a:ln>
-            <a:solidFill>
-              <a:srgbClr val="FFFFFF"/>
-            </a:solidFill>
+            <a:noFill/>
           </a:ln>
         </p:spPr>
         <p:style>
@@ -8075,14 +8899,14 @@
       </p:sp>
       <p:sp>
         <p:nvSpPr>
-          <p:cNvPr id="9" name="TextBox 8"/>
+          <p:cNvPr id="5" name="TextBox 4"/>
           <p:cNvSpPr txBox="1"/>
           <p:nvPr/>
         </p:nvSpPr>
         <p:spPr>
           <a:xfrm>
-            <a:off x="1005840" y="3154680"/>
-            <a:ext cx="10149840" cy="914400"/>
+            <a:off x="731520" y="365760"/>
+            <a:ext cx="9601200" cy="731520"/>
           </a:xfrm>
           <a:prstGeom prst="rect">
             <a:avLst/>
@@ -8096,50 +8920,109 @@
           <a:lstStyle/>
           <a:p>
             <a:pPr>
-              <a:defRPr sz="2000" b="1">
-                <a:solidFill>
-                  <a:srgbClr val="6366F1"/>
-                </a:solidFill>
-              </a:defRPr>
-            </a:pPr>
-            <a:r>
-              <a:t>Web Application</a:t>
-            </a:r>
-          </a:p>
+              <a:defRPr sz="2600" b="1">
+                <a:solidFill>
+                  <a:srgbClr val="1E3A8A"/>
+                </a:solidFill>
+                <a:latin typeface="Helvetica"/>
+              </a:defRPr>
+            </a:pPr>
+            <a:r>
+              <a:t>Technology Stack &amp; Architecture Matrix</a:t>
+            </a:r>
+          </a:p>
+        </p:txBody>
+      </p:sp>
+      <p:sp>
+        <p:nvSpPr>
+          <p:cNvPr id="6" name="TextBox 5"/>
+          <p:cNvSpPr txBox="1"/>
+          <p:nvPr/>
+        </p:nvSpPr>
+        <p:spPr>
+          <a:xfrm>
+            <a:off x="9601200" y="365760"/>
+            <a:ext cx="1828800" cy="457200"/>
+          </a:xfrm>
+          <a:prstGeom prst="rect">
+            <a:avLst/>
+          </a:prstGeom>
+          <a:noFill/>
+        </p:spPr>
+        <p:txBody>
+          <a:bodyPr wrap="none">
+            <a:spAutoFit/>
+          </a:bodyPr>
+          <a:lstStyle/>
+          <a:p>
+            <a:pPr algn="r">
+              <a:defRPr sz="1300" b="1">
+                <a:solidFill>
+                  <a:srgbClr val="0284C7"/>
+                </a:solidFill>
+              </a:defRPr>
+            </a:pPr>
+            <a:r>
+              <a:t>Slide 08/13</a:t>
+            </a:r>
+          </a:p>
+        </p:txBody>
+      </p:sp>
+      <p:sp>
+        <p:nvSpPr>
+          <p:cNvPr id="7" name="TextBox 6"/>
+          <p:cNvSpPr txBox="1"/>
+          <p:nvPr/>
+        </p:nvSpPr>
+        <p:spPr>
+          <a:xfrm>
+            <a:off x="731520" y="6601968"/>
+            <a:ext cx="10698480" cy="228600"/>
+          </a:xfrm>
+          <a:prstGeom prst="rect">
+            <a:avLst/>
+          </a:prstGeom>
+          <a:noFill/>
+        </p:spPr>
+        <p:txBody>
+          <a:bodyPr wrap="none">
+            <a:spAutoFit/>
+          </a:bodyPr>
+          <a:lstStyle/>
           <a:p>
             <a:pPr>
-              <a:defRPr sz="1500">
-                <a:solidFill>
-                  <a:srgbClr val="F8FAFC"/>
-                </a:solidFill>
-              </a:defRPr>
-            </a:pPr>
-            <a:r>
-              <a:t>HTML5, Custom Glassmorphism CSS3, JavaScript (ES6+), Chart.js</a:t>
-            </a:r>
-          </a:p>
-        </p:txBody>
-      </p:sp>
-      <p:sp>
-        <p:nvSpPr>
-          <p:cNvPr id="10" name="Rounded Rectangle 9"/>
+              <a:defRPr sz="1000">
+                <a:solidFill>
+                  <a:srgbClr val="FFFFFF"/>
+                </a:solidFill>
+              </a:defRPr>
+            </a:pPr>
+            <a:r>
+              <a:t>Sanjana Chirutha (STU ID: STU6817962b86d921746376235)  |  Edunet Foundation  |  AICTE  |  IBM SkillsBuild</a:t>
+            </a:r>
+          </a:p>
+        </p:txBody>
+      </p:sp>
+      <p:sp>
+        <p:nvSpPr>
+          <p:cNvPr id="8" name="Rounded Rectangle 7"/>
           <p:cNvSpPr/>
           <p:nvPr/>
         </p:nvSpPr>
         <p:spPr>
           <a:xfrm>
-            <a:off x="731520" y="4480560"/>
-            <a:ext cx="10698480" cy="1280160"/>
+            <a:off x="731520" y="1463040"/>
+            <a:ext cx="10698480" cy="1371600"/>
           </a:xfrm>
           <a:prstGeom prst="roundRect">
             <a:avLst/>
           </a:prstGeom>
           <a:solidFill>
-            <a:srgbClr val="152036"/>
+            <a:srgbClr val="F1F5F9"/>
           </a:solidFill>
           <a:ln>
             <a:solidFill>
-              <a:srgbClr val="FFFFFF"/>
+              <a:srgbClr val="CBD5E1"/>
             </a:solidFill>
           </a:ln>
         </p:spPr>
@@ -8167,14 +9050,14 @@
       </p:sp>
       <p:sp>
         <p:nvSpPr>
-          <p:cNvPr id="11" name="TextBox 10"/>
+          <p:cNvPr id="9" name="TextBox 8"/>
           <p:cNvSpPr txBox="1"/>
           <p:nvPr/>
         </p:nvSpPr>
         <p:spPr>
           <a:xfrm>
-            <a:off x="1005840" y="4663440"/>
-            <a:ext cx="10149840" cy="914400"/>
+            <a:off x="1005840" y="1645920"/>
+            <a:ext cx="10149840" cy="1005840"/>
           </a:xfrm>
           <a:prstGeom prst="rect">
             <a:avLst/>
@@ -8188,9 +9071,193 @@
           <a:lstStyle/>
           <a:p>
             <a:pPr>
-              <a:defRPr sz="2000" b="1">
-                <a:solidFill>
-                  <a:srgbClr val="6366F1"/>
+              <a:defRPr sz="1800" b="1">
+                <a:solidFill>
+                  <a:srgbClr val="1E3A8A"/>
+                </a:solidFill>
+              </a:defRPr>
+            </a:pPr>
+            <a:r>
+              <a:t>Machine Learning</a:t>
+            </a:r>
+          </a:p>
+          <a:p>
+            <a:pPr>
+              <a:defRPr sz="1400">
+                <a:solidFill>
+                  <a:srgbClr val="0F172A"/>
+                </a:solidFill>
+              </a:defRPr>
+            </a:pPr>
+            <a:r>
+              <a:t>Python 3.12, Scikit-Learn, XGBoost, Pandas, NumPy, Joblib</a:t>
+            </a:r>
+          </a:p>
+        </p:txBody>
+      </p:sp>
+      <p:sp>
+        <p:nvSpPr>
+          <p:cNvPr id="10" name="Rounded Rectangle 9"/>
+          <p:cNvSpPr/>
+          <p:nvPr/>
+        </p:nvSpPr>
+        <p:spPr>
+          <a:xfrm>
+            <a:off x="731520" y="3063240"/>
+            <a:ext cx="10698480" cy="1371600"/>
+          </a:xfrm>
+          <a:prstGeom prst="roundRect">
+            <a:avLst/>
+          </a:prstGeom>
+          <a:solidFill>
+            <a:srgbClr val="F1F5F9"/>
+          </a:solidFill>
+          <a:ln>
+            <a:solidFill>
+              <a:srgbClr val="CBD5E1"/>
+            </a:solidFill>
+          </a:ln>
+        </p:spPr>
+        <p:style>
+          <a:lnRef idx="1">
+            <a:schemeClr val="accent1"/>
+          </a:lnRef>
+          <a:fillRef idx="3">
+            <a:schemeClr val="accent1"/>
+          </a:fillRef>
+          <a:effectRef idx="2">
+            <a:schemeClr val="accent1"/>
+          </a:effectRef>
+          <a:fontRef idx="minor">
+            <a:schemeClr val="lt1"/>
+          </a:fontRef>
+        </p:style>
+        <p:txBody>
+          <a:bodyPr rtlCol="0" anchor="ctr"/>
+          <a:lstStyle/>
+          <a:p>
+            <a:pPr algn="ctr"/>
+          </a:p>
+        </p:txBody>
+      </p:sp>
+      <p:sp>
+        <p:nvSpPr>
+          <p:cNvPr id="11" name="TextBox 10"/>
+          <p:cNvSpPr txBox="1"/>
+          <p:nvPr/>
+        </p:nvSpPr>
+        <p:spPr>
+          <a:xfrm>
+            <a:off x="1005840" y="3246120"/>
+            <a:ext cx="10149840" cy="1005840"/>
+          </a:xfrm>
+          <a:prstGeom prst="rect">
+            <a:avLst/>
+          </a:prstGeom>
+          <a:noFill/>
+        </p:spPr>
+        <p:txBody>
+          <a:bodyPr wrap="square">
+            <a:spAutoFit/>
+          </a:bodyPr>
+          <a:lstStyle/>
+          <a:p>
+            <a:pPr>
+              <a:defRPr sz="1800" b="1">
+                <a:solidFill>
+                  <a:srgbClr val="1E3A8A"/>
+                </a:solidFill>
+              </a:defRPr>
+            </a:pPr>
+            <a:r>
+              <a:t>Web Application</a:t>
+            </a:r>
+          </a:p>
+          <a:p>
+            <a:pPr>
+              <a:defRPr sz="1400">
+                <a:solidFill>
+                  <a:srgbClr val="0F172A"/>
+                </a:solidFill>
+              </a:defRPr>
+            </a:pPr>
+            <a:r>
+              <a:t>HTML5, Custom Glassmorphism CSS3, JavaScript (ES6+), Chart.js</a:t>
+            </a:r>
+          </a:p>
+        </p:txBody>
+      </p:sp>
+      <p:sp>
+        <p:nvSpPr>
+          <p:cNvPr id="12" name="Rounded Rectangle 11"/>
+          <p:cNvSpPr/>
+          <p:nvPr/>
+        </p:nvSpPr>
+        <p:spPr>
+          <a:xfrm>
+            <a:off x="731520" y="4663440"/>
+            <a:ext cx="10698480" cy="1371600"/>
+          </a:xfrm>
+          <a:prstGeom prst="roundRect">
+            <a:avLst/>
+          </a:prstGeom>
+          <a:solidFill>
+            <a:srgbClr val="F1F5F9"/>
+          </a:solidFill>
+          <a:ln>
+            <a:solidFill>
+              <a:srgbClr val="CBD5E1"/>
+            </a:solidFill>
+          </a:ln>
+        </p:spPr>
+        <p:style>
+          <a:lnRef idx="1">
+            <a:schemeClr val="accent1"/>
+          </a:lnRef>
+          <a:fillRef idx="3">
+            <a:schemeClr val="accent1"/>
+          </a:fillRef>
+          <a:effectRef idx="2">
+            <a:schemeClr val="accent1"/>
+          </a:effectRef>
+          <a:fontRef idx="minor">
+            <a:schemeClr val="lt1"/>
+          </a:fontRef>
+        </p:style>
+        <p:txBody>
+          <a:bodyPr rtlCol="0" anchor="ctr"/>
+          <a:lstStyle/>
+          <a:p>
+            <a:pPr algn="ctr"/>
+          </a:p>
+        </p:txBody>
+      </p:sp>
+      <p:sp>
+        <p:nvSpPr>
+          <p:cNvPr id="13" name="TextBox 12"/>
+          <p:cNvSpPr txBox="1"/>
+          <p:nvPr/>
+        </p:nvSpPr>
+        <p:spPr>
+          <a:xfrm>
+            <a:off x="1005840" y="4846320"/>
+            <a:ext cx="10149840" cy="1005840"/>
+          </a:xfrm>
+          <a:prstGeom prst="rect">
+            <a:avLst/>
+          </a:prstGeom>
+          <a:noFill/>
+        </p:spPr>
+        <p:txBody>
+          <a:bodyPr wrap="square">
+            <a:spAutoFit/>
+          </a:bodyPr>
+          <a:lstStyle/>
+          <a:p>
+            <a:pPr>
+              <a:defRPr sz="1800" b="1">
+                <a:solidFill>
+                  <a:srgbClr val="1E3A8A"/>
                 </a:solidFill>
               </a:defRPr>
             </a:pPr>
@@ -8200,9 +9267,9 @@
           </a:p>
           <a:p>
             <a:pPr>
-              <a:defRPr sz="1500">
-                <a:solidFill>
-                  <a:srgbClr val="F8FAFC"/>
+              <a:defRPr sz="1400">
+                <a:solidFill>
+                  <a:srgbClr val="0F172A"/>
                 </a:solidFill>
               </a:defRPr>
             </a:pPr>
@@ -8245,7 +9312,7 @@
             <a:avLst/>
           </a:prstGeom>
           <a:solidFill>
-            <a:srgbClr val="090D16"/>
+            <a:srgbClr val="F8FAFC"/>
           </a:solidFill>
           <a:ln>
             <a:noFill/>
@@ -8275,131 +9342,23 @@
       </p:sp>
       <p:sp>
         <p:nvSpPr>
-          <p:cNvPr id="3" name="TextBox 2"/>
-          <p:cNvSpPr txBox="1"/>
-          <p:nvPr/>
-        </p:nvSpPr>
-        <p:spPr>
-          <a:xfrm>
-            <a:off x="731520" y="365760"/>
-            <a:ext cx="10698480" cy="731520"/>
-          </a:xfrm>
-          <a:prstGeom prst="rect">
-            <a:avLst/>
-          </a:prstGeom>
-          <a:noFill/>
-        </p:spPr>
-        <p:txBody>
-          <a:bodyPr wrap="square">
-            <a:spAutoFit/>
-          </a:bodyPr>
-          <a:lstStyle/>
-          <a:p>
-            <a:pPr>
-              <a:defRPr sz="2600" b="1">
-                <a:solidFill>
-                  <a:srgbClr val="F8FAFC"/>
-                </a:solidFill>
-                <a:latin typeface="Arial"/>
-              </a:defRPr>
-            </a:pPr>
-            <a:r>
-              <a:t>User Interface &amp; Glassmorphism Design</a:t>
-            </a:r>
-          </a:p>
-        </p:txBody>
-      </p:sp>
-      <p:sp>
-        <p:nvSpPr>
-          <p:cNvPr id="4" name="TextBox 3"/>
-          <p:cNvSpPr txBox="1"/>
-          <p:nvPr/>
-        </p:nvSpPr>
-        <p:spPr>
-          <a:xfrm>
-            <a:off x="9601200" y="365760"/>
-            <a:ext cx="1828800" cy="457200"/>
-          </a:xfrm>
-          <a:prstGeom prst="rect">
-            <a:avLst/>
-          </a:prstGeom>
-          <a:noFill/>
-        </p:spPr>
-        <p:txBody>
-          <a:bodyPr wrap="none">
-            <a:spAutoFit/>
-          </a:bodyPr>
-          <a:lstStyle/>
-          <a:p>
-            <a:pPr algn="r">
-              <a:defRPr sz="1300" b="1">
-                <a:solidFill>
-                  <a:srgbClr val="6366F1"/>
-                </a:solidFill>
-              </a:defRPr>
-            </a:pPr>
-            <a:r>
-              <a:t>Slide 09/13</a:t>
-            </a:r>
-          </a:p>
-        </p:txBody>
-      </p:sp>
-      <p:sp>
-        <p:nvSpPr>
-          <p:cNvPr id="5" name="TextBox 4"/>
-          <p:cNvSpPr txBox="1"/>
-          <p:nvPr/>
-        </p:nvSpPr>
-        <p:spPr>
-          <a:xfrm>
-            <a:off x="731520" y="6309360"/>
-            <a:ext cx="10698480" cy="365760"/>
-          </a:xfrm>
-          <a:prstGeom prst="rect">
-            <a:avLst/>
-          </a:prstGeom>
-          <a:noFill/>
-        </p:spPr>
-        <p:txBody>
-          <a:bodyPr wrap="none">
-            <a:spAutoFit/>
-          </a:bodyPr>
-          <a:lstStyle/>
-          <a:p>
-            <a:pPr>
-              <a:defRPr sz="1000">
-                <a:solidFill>
-                  <a:srgbClr val="94A3B8"/>
-                </a:solidFill>
-              </a:defRPr>
-            </a:pPr>
-            <a:r>
-              <a:t>Sanjana Chirutha (STU ID: STU6817962b86d921746376235)  |  Edunet Foundation  |  AICTE  |  IBM SkillsBuild</a:t>
-            </a:r>
-          </a:p>
-        </p:txBody>
-      </p:sp>
-      <p:sp>
-        <p:nvSpPr>
-          <p:cNvPr id="6" name="Rounded Rectangle 5"/>
+          <p:cNvPr id="3" name="Rectangle 2"/>
           <p:cNvSpPr/>
           <p:nvPr/>
         </p:nvSpPr>
         <p:spPr>
           <a:xfrm>
-            <a:off x="731520" y="1371600"/>
-            <a:ext cx="10698480" cy="4389120"/>
-          </a:xfrm>
-          <a:prstGeom prst="roundRect">
+            <a:off x="0" y="0"/>
+            <a:ext cx="365760" cy="6858000"/>
+          </a:xfrm>
+          <a:prstGeom prst="rect">
             <a:avLst/>
           </a:prstGeom>
           <a:solidFill>
-            <a:srgbClr val="152036"/>
+            <a:srgbClr val="0284C7"/>
           </a:solidFill>
           <a:ln>
-            <a:solidFill>
-              <a:srgbClr val="FFFFFF"/>
-            </a:solidFill>
+            <a:noFill/>
           </a:ln>
         </p:spPr>
         <p:style>
@@ -8426,14 +9385,57 @@
       </p:sp>
       <p:sp>
         <p:nvSpPr>
-          <p:cNvPr id="7" name="TextBox 6"/>
+          <p:cNvPr id="4" name="Rectangle 3"/>
+          <p:cNvSpPr/>
+          <p:nvPr/>
+        </p:nvSpPr>
+        <p:spPr>
+          <a:xfrm>
+            <a:off x="365760" y="6583680"/>
+            <a:ext cx="11825935" cy="274320"/>
+          </a:xfrm>
+          <a:prstGeom prst="rect">
+            <a:avLst/>
+          </a:prstGeom>
+          <a:solidFill>
+            <a:srgbClr val="1E3A8A"/>
+          </a:solidFill>
+          <a:ln>
+            <a:noFill/>
+          </a:ln>
+        </p:spPr>
+        <p:style>
+          <a:lnRef idx="1">
+            <a:schemeClr val="accent1"/>
+          </a:lnRef>
+          <a:fillRef idx="3">
+            <a:schemeClr val="accent1"/>
+          </a:fillRef>
+          <a:effectRef idx="2">
+            <a:schemeClr val="accent1"/>
+          </a:effectRef>
+          <a:fontRef idx="minor">
+            <a:schemeClr val="lt1"/>
+          </a:fontRef>
+        </p:style>
+        <p:txBody>
+          <a:bodyPr rtlCol="0" anchor="ctr"/>
+          <a:lstStyle/>
+          <a:p>
+            <a:pPr algn="ctr"/>
+          </a:p>
+        </p:txBody>
+      </p:sp>
+      <p:sp>
+        <p:nvSpPr>
+          <p:cNvPr id="5" name="TextBox 4"/>
           <p:cNvSpPr txBox="1"/>
           <p:nvPr/>
         </p:nvSpPr>
         <p:spPr>
           <a:xfrm>
-            <a:off x="1005840" y="1554480"/>
-            <a:ext cx="10149840" cy="4023360"/>
+            <a:off x="731520" y="365760"/>
+            <a:ext cx="9601200" cy="731520"/>
           </a:xfrm>
           <a:prstGeom prst="rect">
             <a:avLst/>
@@ -8447,21 +9449,172 @@
           <a:lstStyle/>
           <a:p>
             <a:pPr>
+              <a:defRPr sz="2600" b="1">
+                <a:solidFill>
+                  <a:srgbClr val="1E3A8A"/>
+                </a:solidFill>
+                <a:latin typeface="Helvetica"/>
+              </a:defRPr>
+            </a:pPr>
+            <a:r>
+              <a:t>User Interface &amp; Glassmorphism Design</a:t>
+            </a:r>
+          </a:p>
+        </p:txBody>
+      </p:sp>
+      <p:sp>
+        <p:nvSpPr>
+          <p:cNvPr id="6" name="TextBox 5"/>
+          <p:cNvSpPr txBox="1"/>
+          <p:nvPr/>
+        </p:nvSpPr>
+        <p:spPr>
+          <a:xfrm>
+            <a:off x="9601200" y="365760"/>
+            <a:ext cx="1828800" cy="457200"/>
+          </a:xfrm>
+          <a:prstGeom prst="rect">
+            <a:avLst/>
+          </a:prstGeom>
+          <a:noFill/>
+        </p:spPr>
+        <p:txBody>
+          <a:bodyPr wrap="none">
+            <a:spAutoFit/>
+          </a:bodyPr>
+          <a:lstStyle/>
+          <a:p>
+            <a:pPr algn="r">
+              <a:defRPr sz="1300" b="1">
+                <a:solidFill>
+                  <a:srgbClr val="0284C7"/>
+                </a:solidFill>
+              </a:defRPr>
+            </a:pPr>
+            <a:r>
+              <a:t>Slide 09/13</a:t>
+            </a:r>
+          </a:p>
+        </p:txBody>
+      </p:sp>
+      <p:sp>
+        <p:nvSpPr>
+          <p:cNvPr id="7" name="TextBox 6"/>
+          <p:cNvSpPr txBox="1"/>
+          <p:nvPr/>
+        </p:nvSpPr>
+        <p:spPr>
+          <a:xfrm>
+            <a:off x="731520" y="6601968"/>
+            <a:ext cx="10698480" cy="228600"/>
+          </a:xfrm>
+          <a:prstGeom prst="rect">
+            <a:avLst/>
+          </a:prstGeom>
+          <a:noFill/>
+        </p:spPr>
+        <p:txBody>
+          <a:bodyPr wrap="none">
+            <a:spAutoFit/>
+          </a:bodyPr>
+          <a:lstStyle/>
+          <a:p>
+            <a:pPr>
+              <a:defRPr sz="1000">
+                <a:solidFill>
+                  <a:srgbClr val="FFFFFF"/>
+                </a:solidFill>
+              </a:defRPr>
+            </a:pPr>
+            <a:r>
+              <a:t>Sanjana Chirutha (STU ID: STU6817962b86d921746376235)  |  Edunet Foundation  |  AICTE  |  IBM SkillsBuild</a:t>
+            </a:r>
+          </a:p>
+        </p:txBody>
+      </p:sp>
+      <p:sp>
+        <p:nvSpPr>
+          <p:cNvPr id="8" name="Rounded Rectangle 7"/>
+          <p:cNvSpPr/>
+          <p:nvPr/>
+        </p:nvSpPr>
+        <p:spPr>
+          <a:xfrm>
+            <a:off x="731520" y="1371600"/>
+            <a:ext cx="10698480" cy="4754880"/>
+          </a:xfrm>
+          <a:prstGeom prst="roundRect">
+            <a:avLst/>
+          </a:prstGeom>
+          <a:solidFill>
+            <a:srgbClr val="F1F5F9"/>
+          </a:solidFill>
+          <a:ln>
+            <a:solidFill>
+              <a:srgbClr val="CBD5E1"/>
+            </a:solidFill>
+          </a:ln>
+        </p:spPr>
+        <p:style>
+          <a:lnRef idx="1">
+            <a:schemeClr val="accent1"/>
+          </a:lnRef>
+          <a:fillRef idx="3">
+            <a:schemeClr val="accent1"/>
+          </a:fillRef>
+          <a:effectRef idx="2">
+            <a:schemeClr val="accent1"/>
+          </a:effectRef>
+          <a:fontRef idx="minor">
+            <a:schemeClr val="lt1"/>
+          </a:fontRef>
+        </p:style>
+        <p:txBody>
+          <a:bodyPr rtlCol="0" anchor="ctr"/>
+          <a:lstStyle/>
+          <a:p>
+            <a:pPr algn="ctr"/>
+          </a:p>
+        </p:txBody>
+      </p:sp>
+      <p:sp>
+        <p:nvSpPr>
+          <p:cNvPr id="9" name="TextBox 8"/>
+          <p:cNvSpPr txBox="1"/>
+          <p:nvPr/>
+        </p:nvSpPr>
+        <p:spPr>
+          <a:xfrm>
+            <a:off x="1005840" y="1554480"/>
+            <a:ext cx="10149840" cy="4389120"/>
+          </a:xfrm>
+          <a:prstGeom prst="rect">
+            <a:avLst/>
+          </a:prstGeom>
+          <a:noFill/>
+        </p:spPr>
+        <p:txBody>
+          <a:bodyPr wrap="square">
+            <a:spAutoFit/>
+          </a:bodyPr>
+          <a:lstStyle/>
+          <a:p>
+            <a:pPr>
               <a:defRPr sz="2000" b="1">
                 <a:solidFill>
-                  <a:srgbClr val="10B981"/>
-                </a:solidFill>
-              </a:defRPr>
-            </a:pPr>
-            <a:r>
-              <a:t>Modern Glassmorphism UI Architecture</a:t>
+                  <a:srgbClr val="1E3A8A"/>
+                </a:solidFill>
+              </a:defRPr>
+            </a:pPr>
+            <a:r>
+              <a:t>Glassmorphism Design System</a:t>
             </a:r>
           </a:p>
           <a:p>
             <a:pPr>
               <a:defRPr sz="1400">
                 <a:solidFill>
-                  <a:srgbClr val="F8FAFC"/>
+                  <a:srgbClr val="0F172A"/>
                 </a:solidFill>
               </a:defRPr>
             </a:pPr>
@@ -8473,7 +9626,7 @@
             <a:pPr>
               <a:defRPr sz="1400">
                 <a:solidFill>
-                  <a:srgbClr val="F8FAFC"/>
+                  <a:srgbClr val="0F172A"/>
                 </a:solidFill>
               </a:defRPr>
             </a:pPr>
@@ -8485,7 +9638,7 @@
             <a:pPr>
               <a:defRPr sz="1400">
                 <a:solidFill>
-                  <a:srgbClr val="F8FAFC"/>
+                  <a:srgbClr val="0F172A"/>
                 </a:solidFill>
               </a:defRPr>
             </a:pPr>
@@ -8497,7 +9650,7 @@
             <a:pPr>
               <a:defRPr sz="1400">
                 <a:solidFill>
-                  <a:srgbClr val="F8FAFC"/>
+                  <a:srgbClr val="0F172A"/>
                 </a:solidFill>
               </a:defRPr>
             </a:pPr>
@@ -8509,7 +9662,7 @@
             <a:pPr>
               <a:defRPr sz="1400">
                 <a:solidFill>
-                  <a:srgbClr val="F8FAFC"/>
+                  <a:srgbClr val="0F172A"/>
                 </a:solidFill>
               </a:defRPr>
             </a:pPr>
